--- a/class1/class1_transformer.pptx
+++ b/class1/class1_transformer.pptx
@@ -4,30 +4,33 @@
   <p:sldMasterIdLst>
     <p:sldMasterId id="2147483648" r:id="rId1"/>
   </p:sldMasterIdLst>
+  <p:notesMasterIdLst>
+    <p:notesMasterId r:id="rId23"/>
+  </p:notesMasterIdLst>
   <p:sldIdLst>
-    <p:sldId id="256" r:id="rId7"/>
-    <p:sldId id="257" r:id="rId9"/>
-    <p:sldId id="258" r:id="rId10"/>
-    <p:sldId id="259" r:id="rId11"/>
-    <p:sldId id="260" r:id="rId12"/>
-    <p:sldId id="261" r:id="rId13"/>
-    <p:sldId id="262" r:id="rId14"/>
-    <p:sldId id="263" r:id="rId15"/>
-    <p:sldId id="264" r:id="rId16"/>
-    <p:sldId id="265" r:id="rId17"/>
-    <p:sldId id="266" r:id="rId18"/>
-    <p:sldId id="267" r:id="rId19"/>
-    <p:sldId id="268" r:id="rId20"/>
-    <p:sldId id="269" r:id="rId21"/>
-    <p:sldId id="270" r:id="rId22"/>
-    <p:sldId id="271" r:id="rId23"/>
-    <p:sldId id="272" r:id="rId24"/>
-    <p:sldId id="273" r:id="rId25"/>
-    <p:sldId id="274" r:id="rId26"/>
-    <p:sldId id="275" r:id="rId27"/>
-    <p:sldId id="276" r:id="rId28"/>
+    <p:sldId id="256" r:id="rId2"/>
+    <p:sldId id="257" r:id="rId3"/>
+    <p:sldId id="258" r:id="rId4"/>
+    <p:sldId id="259" r:id="rId5"/>
+    <p:sldId id="260" r:id="rId6"/>
+    <p:sldId id="261" r:id="rId7"/>
+    <p:sldId id="262" r:id="rId8"/>
+    <p:sldId id="263" r:id="rId9"/>
+    <p:sldId id="264" r:id="rId10"/>
+    <p:sldId id="265" r:id="rId11"/>
+    <p:sldId id="266" r:id="rId12"/>
+    <p:sldId id="267" r:id="rId13"/>
+    <p:sldId id="268" r:id="rId14"/>
+    <p:sldId id="269" r:id="rId15"/>
+    <p:sldId id="270" r:id="rId16"/>
+    <p:sldId id="271" r:id="rId17"/>
+    <p:sldId id="272" r:id="rId18"/>
+    <p:sldId id="273" r:id="rId19"/>
+    <p:sldId id="274" r:id="rId20"/>
+    <p:sldId id="275" r:id="rId21"/>
+    <p:sldId id="276" r:id="rId22"/>
   </p:sldIdLst>
-  <p:sldSz cx="12191999" cy="6858000" type="screen4x3"/>
+  <p:sldSz cx="12192000" cy="6858000"/>
   <p:notesSz cx="6858000" cy="9144000"/>
   <p:defaultTextStyle>
     <a:defPPr>
@@ -124,11 +127,27 @@
       </a:defRPr>
     </a:lvl9pPr>
   </p:defaultTextStyle>
+  <p:extLst>
+    <p:ext uri="{EFAFB233-063F-42B5-8137-9DF3F51BA10A}">
+      <p15:sldGuideLst xmlns:p15="http://schemas.microsoft.com/office/powerpoint/2012/main">
+        <p15:guide id="1" orient="horz" pos="2160">
+          <p15:clr>
+            <a:srgbClr val="A4A3A4"/>
+          </p15:clr>
+        </p15:guide>
+        <p15:guide id="2" pos="2880">
+          <p15:clr>
+            <a:srgbClr val="A4A3A4"/>
+          </p15:clr>
+        </p15:guide>
+      </p15:sldGuideLst>
+    </p:ext>
+  </p:extLst>
 </p:presentation>
 </file>
 
 <file path=ppt/notesMasters/notesMaster1.xml><?xml version="1.0" encoding="utf-8"?>
-<p:notesMaster xmlns:a="http://schemas.openxmlformats.org/drawingml/2006/main" xmlns:p="http://schemas.openxmlformats.org/presentationml/2006/main" xmlns:r="http://schemas.openxmlformats.org/officeDocument/2006/relationships">
+<p:notesMaster xmlns:a="http://schemas.openxmlformats.org/drawingml/2006/main" xmlns:r="http://schemas.openxmlformats.org/officeDocument/2006/relationships" xmlns:p="http://schemas.openxmlformats.org/presentationml/2006/main">
   <p:cSld>
     <p:bg>
       <p:bgRef idx="1001">
@@ -149,241 +168,16 @@
           <a:chExt cx="0" cy="0"/>
         </a:xfrm>
       </p:grpSpPr>
-      <p:sp>
-        <p:nvSpPr>
-          <p:cNvPr id="2" name="Header Placeholder 1"/>
-          <p:cNvSpPr>
-            <a:spLocks noGrp="1"/>
-          </p:cNvSpPr>
-          <p:nvPr>
-            <p:ph type="hdr" sz="quarter"/>
-          </p:nvPr>
-        </p:nvSpPr>
-        <p:spPr>
-          <a:xfrm>
-            <a:off x="0" y="0"/>
-            <a:ext cx="2971800" cy="457200"/>
-          </a:xfrm>
-          <a:prstGeom prst="rect">
-            <a:avLst/>
-          </a:prstGeom>
-        </p:spPr>
-        <p:txBody>
-          <a:bodyPr vert="horz" lIns="91440" tIns="45720" rIns="91440" bIns="45720" rtlCol="0"/>
-          <a:lstStyle>
-            <a:lvl1pPr algn="l">
-              <a:defRPr sz="1200"/>
-            </a:lvl1pPr>
-          </a:lstStyle>
-          <a:p>
-            <a:endParaRPr lang="en-US"/>
-          </a:p>
-        </p:txBody>
-      </p:sp>
-      <p:sp>
-        <p:nvSpPr>
-          <p:cNvPr id="3" name="Date Placeholder 2"/>
-          <p:cNvSpPr>
-            <a:spLocks noGrp="1"/>
-          </p:cNvSpPr>
-          <p:nvPr>
-            <p:ph type="dt" idx="1"/>
-          </p:nvPr>
-        </p:nvSpPr>
-        <p:spPr>
-          <a:xfrm>
-            <a:off x="3884613" y="0"/>
-            <a:ext cx="2971800" cy="457200"/>
-          </a:xfrm>
-          <a:prstGeom prst="rect">
-            <a:avLst/>
-          </a:prstGeom>
-        </p:spPr>
-        <p:txBody>
-          <a:bodyPr vert="horz" lIns="91440" tIns="45720" rIns="91440" bIns="45720" rtlCol="0"/>
-          <a:lstStyle>
-            <a:lvl1pPr algn="r">
-              <a:defRPr sz="1200"/>
-            </a:lvl1pPr>
-          </a:lstStyle>
-          <a:p>
-            <a:fld id="{0F89C1C7-3DCD-1040-A9CF-14679D8B5DDD}" type="datetimeFigureOut">
-              <a:rPr lang="en-US" smtClean="0"/>
-              <a:t>10/17/16</a:t>
-            </a:fld>
-            <a:endParaRPr lang="en-US"/>
-          </a:p>
-        </p:txBody>
-      </p:sp>
-      <p:sp>
-        <p:nvSpPr>
-          <p:cNvPr id="4" name="Slide Image Placeholder 3"/>
-          <p:cNvSpPr>
-            <a:spLocks noGrp="1" noRot="1" noChangeAspect="1"/>
-          </p:cNvSpPr>
-          <p:nvPr>
-            <p:ph type="sldImg" idx="2"/>
-          </p:nvPr>
-        </p:nvSpPr>
-        <p:spPr>
-          <a:xfrm>
-            <a:off x="1143000" y="685800"/>
-            <a:ext cx="4572000" cy="3429000"/>
-          </a:xfrm>
-          <a:prstGeom prst="rect">
-            <a:avLst/>
-          </a:prstGeom>
-          <a:noFill/>
-          <a:ln w="12700">
-            <a:solidFill>
-              <a:prstClr val="black"/>
-            </a:solidFill>
-          </a:ln>
-        </p:spPr>
-        <p:txBody>
-          <a:bodyPr vert="horz" lIns="91440" tIns="45720" rIns="91440" bIns="45720" rtlCol="0" anchor="ctr"/>
-          <a:lstStyle/>
-          <a:p>
-            <a:endParaRPr lang="en-US"/>
-          </a:p>
-        </p:txBody>
-      </p:sp>
-      <p:sp>
-        <p:nvSpPr>
-          <p:cNvPr id="5" name="Notes Placeholder 4"/>
-          <p:cNvSpPr>
-            <a:spLocks noGrp="1"/>
-          </p:cNvSpPr>
-          <p:nvPr>
-            <p:ph type="body" sz="quarter" idx="3"/>
-          </p:nvPr>
-        </p:nvSpPr>
-        <p:spPr>
-          <a:xfrm>
-            <a:off x="685800" y="4343400"/>
-            <a:ext cx="5486400" cy="4114800"/>
-          </a:xfrm>
-          <a:prstGeom prst="rect">
-            <a:avLst/>
-          </a:prstGeom>
-        </p:spPr>
-        <p:txBody>
-          <a:bodyPr vert="horz" lIns="91440" tIns="45720" rIns="91440" bIns="45720" rtlCol="0"/>
-          <a:lstStyle/>
-          <a:p>
-            <a:pPr lvl="0"/>
-            <a:r>
-              <a:rPr lang="en-US" smtClean="0"/>
-              <a:t>Click to edit Master text styles</a:t>
-            </a:r>
-          </a:p>
-          <a:p>
-            <a:pPr lvl="1"/>
-            <a:r>
-              <a:rPr lang="en-US" smtClean="0"/>
-              <a:t>Second level</a:t>
-            </a:r>
-          </a:p>
-          <a:p>
-            <a:pPr lvl="2"/>
-            <a:r>
-              <a:rPr lang="en-US" smtClean="0"/>
-              <a:t>Third level</a:t>
-            </a:r>
-          </a:p>
-          <a:p>
-            <a:pPr lvl="3"/>
-            <a:r>
-              <a:rPr lang="en-US" smtClean="0"/>
-              <a:t>Fourth level</a:t>
-            </a:r>
-          </a:p>
-          <a:p>
-            <a:pPr lvl="4"/>
-            <a:r>
-              <a:rPr lang="en-US" smtClean="0"/>
-              <a:t>Fifth level</a:t>
-            </a:r>
-            <a:endParaRPr lang="en-US"/>
-          </a:p>
-        </p:txBody>
-      </p:sp>
-      <p:sp>
-        <p:nvSpPr>
-          <p:cNvPr id="6" name="Footer Placeholder 5"/>
-          <p:cNvSpPr>
-            <a:spLocks noGrp="1"/>
-          </p:cNvSpPr>
-          <p:nvPr>
-            <p:ph type="ftr" sz="quarter" idx="4"/>
-          </p:nvPr>
-        </p:nvSpPr>
-        <p:spPr>
-          <a:xfrm>
-            <a:off x="0" y="8685213"/>
-            <a:ext cx="2971800" cy="457200"/>
-          </a:xfrm>
-          <a:prstGeom prst="rect">
-            <a:avLst/>
-          </a:prstGeom>
-        </p:spPr>
-        <p:txBody>
-          <a:bodyPr vert="horz" lIns="91440" tIns="45720" rIns="91440" bIns="45720" rtlCol="0" anchor="b"/>
-          <a:lstStyle>
-            <a:lvl1pPr algn="l">
-              <a:defRPr sz="1200"/>
-            </a:lvl1pPr>
-          </a:lstStyle>
-          <a:p>
-            <a:endParaRPr lang="en-US"/>
-          </a:p>
-        </p:txBody>
-      </p:sp>
-      <p:sp>
-        <p:nvSpPr>
-          <p:cNvPr id="7" name="Slide Number Placeholder 6"/>
-          <p:cNvSpPr>
-            <a:spLocks noGrp="1"/>
-          </p:cNvSpPr>
-          <p:nvPr>
-            <p:ph type="sldNum" sz="quarter" idx="5"/>
-          </p:nvPr>
-        </p:nvSpPr>
-        <p:spPr>
-          <a:xfrm>
-            <a:off x="3884613" y="8685213"/>
-            <a:ext cx="2971800" cy="457200"/>
-          </a:xfrm>
-          <a:prstGeom prst="rect">
-            <a:avLst/>
-          </a:prstGeom>
-        </p:spPr>
-        <p:txBody>
-          <a:bodyPr vert="horz" lIns="91440" tIns="45720" rIns="91440" bIns="45720" rtlCol="0" anchor="b"/>
-          <a:lstStyle>
-            <a:lvl1pPr algn="r">
-              <a:defRPr sz="1200"/>
-            </a:lvl1pPr>
-          </a:lstStyle>
-          <a:p>
-            <a:fld id="{BB5E49A5-4136-284D-997B-48E1D791AD67}" type="slidenum">
-              <a:rPr lang="en-US" smtClean="0"/>
-              <a:t>‹#›</a:t>
-            </a:fld>
-            <a:endParaRPr lang="en-US"/>
-          </a:p>
-        </p:txBody>
-      </p:sp>
     </p:spTree>
     <p:extLst>
       <p:ext uri="{BB962C8B-B14F-4D97-AF65-F5344CB8AC3E}">
-        <p14:creationId xmlns:p14="http://schemas.microsoft.com/office/powerpoint/2010/main" val="2623252185"/>
+        <p14:creationId xmlns:p14="http://schemas.microsoft.com/office/powerpoint/2010/main" val="1837625113"/>
       </p:ext>
     </p:extLst>
   </p:cSld>
   <p:clrMap bg1="lt1" tx1="dk1" bg2="lt2" tx2="dk2" accent1="accent1" accent2="accent2" accent3="accent3" accent4="accent4" accent5="accent5" accent6="accent6" hlink="hlink" folHlink="folHlink"/>
   <p:notesStyle>
-    <a:lvl1pPr marL="0" algn="l" defTabSz="457200" rtl="0" eaLnBrk="1" latinLnBrk="0" hangingPunct="1">
+    <a:lvl1pPr marL="0" algn="l" defTabSz="914400" rtl="0" eaLnBrk="1" latinLnBrk="0" hangingPunct="1">
       <a:defRPr sz="1200" kern="1200">
         <a:solidFill>
           <a:schemeClr val="tx1"/>
@@ -393,7 +187,7 @@
         <a:cs typeface="+mn-cs"/>
       </a:defRPr>
     </a:lvl1pPr>
-    <a:lvl2pPr marL="457200" algn="l" defTabSz="457200" rtl="0" eaLnBrk="1" latinLnBrk="0" hangingPunct="1">
+    <a:lvl2pPr marL="457200" algn="l" defTabSz="914400" rtl="0" eaLnBrk="1" latinLnBrk="0" hangingPunct="1">
       <a:defRPr sz="1200" kern="1200">
         <a:solidFill>
           <a:schemeClr val="tx1"/>
@@ -403,7 +197,7 @@
         <a:cs typeface="+mn-cs"/>
       </a:defRPr>
     </a:lvl2pPr>
-    <a:lvl3pPr marL="914400" algn="l" defTabSz="457200" rtl="0" eaLnBrk="1" latinLnBrk="0" hangingPunct="1">
+    <a:lvl3pPr marL="914400" algn="l" defTabSz="914400" rtl="0" eaLnBrk="1" latinLnBrk="0" hangingPunct="1">
       <a:defRPr sz="1200" kern="1200">
         <a:solidFill>
           <a:schemeClr val="tx1"/>
@@ -413,7 +207,7 @@
         <a:cs typeface="+mn-cs"/>
       </a:defRPr>
     </a:lvl3pPr>
-    <a:lvl4pPr marL="1371600" algn="l" defTabSz="457200" rtl="0" eaLnBrk="1" latinLnBrk="0" hangingPunct="1">
+    <a:lvl4pPr marL="1371600" algn="l" defTabSz="914400" rtl="0" eaLnBrk="1" latinLnBrk="0" hangingPunct="1">
       <a:defRPr sz="1200" kern="1200">
         <a:solidFill>
           <a:schemeClr val="tx1"/>
@@ -423,7 +217,7 @@
         <a:cs typeface="+mn-cs"/>
       </a:defRPr>
     </a:lvl4pPr>
-    <a:lvl5pPr marL="1828800" algn="l" defTabSz="457200" rtl="0" eaLnBrk="1" latinLnBrk="0" hangingPunct="1">
+    <a:lvl5pPr marL="1828800" algn="l" defTabSz="914400" rtl="0" eaLnBrk="1" latinLnBrk="0" hangingPunct="1">
       <a:defRPr sz="1200" kern="1200">
         <a:solidFill>
           <a:schemeClr val="tx1"/>
@@ -433,7 +227,7 @@
         <a:cs typeface="+mn-cs"/>
       </a:defRPr>
     </a:lvl5pPr>
-    <a:lvl6pPr marL="2286000" algn="l" defTabSz="457200" rtl="0" eaLnBrk="1" latinLnBrk="0" hangingPunct="1">
+    <a:lvl6pPr marL="2286000" algn="l" defTabSz="914400" rtl="0" eaLnBrk="1" latinLnBrk="0" hangingPunct="1">
       <a:defRPr sz="1200" kern="1200">
         <a:solidFill>
           <a:schemeClr val="tx1"/>
@@ -443,7 +237,7 @@
         <a:cs typeface="+mn-cs"/>
       </a:defRPr>
     </a:lvl6pPr>
-    <a:lvl7pPr marL="2743200" algn="l" defTabSz="457200" rtl="0" eaLnBrk="1" latinLnBrk="0" hangingPunct="1">
+    <a:lvl7pPr marL="2743200" algn="l" defTabSz="914400" rtl="0" eaLnBrk="1" latinLnBrk="0" hangingPunct="1">
       <a:defRPr sz="1200" kern="1200">
         <a:solidFill>
           <a:schemeClr val="tx1"/>
@@ -453,7 +247,7 @@
         <a:cs typeface="+mn-cs"/>
       </a:defRPr>
     </a:lvl7pPr>
-    <a:lvl8pPr marL="3200400" algn="l" defTabSz="457200" rtl="0" eaLnBrk="1" latinLnBrk="0" hangingPunct="1">
+    <a:lvl8pPr marL="3200400" algn="l" defTabSz="914400" rtl="0" eaLnBrk="1" latinLnBrk="0" hangingPunct="1">
       <a:defRPr sz="1200" kern="1200">
         <a:solidFill>
           <a:schemeClr val="tx1"/>
@@ -463,7 +257,7 @@
         <a:cs typeface="+mn-cs"/>
       </a:defRPr>
     </a:lvl8pPr>
-    <a:lvl9pPr marL="3657600" algn="l" defTabSz="457200" rtl="0" eaLnBrk="1" latinLnBrk="0" hangingPunct="1">
+    <a:lvl9pPr marL="3657600" algn="l" defTabSz="914400" rtl="0" eaLnBrk="1" latinLnBrk="0" hangingPunct="1">
       <a:defRPr sz="1200" kern="1200">
         <a:solidFill>
           <a:schemeClr val="tx1"/>
@@ -478,7 +272,7 @@
 </file>
 
 <file path=ppt/notesSlides/notesSlide1.xml><?xml version="1.0" encoding="utf-8"?>
-<p:notes xmlns:a="http://schemas.openxmlformats.org/drawingml/2006/main" xmlns:p="http://schemas.openxmlformats.org/presentationml/2006/main" xmlns:r="http://schemas.openxmlformats.org/officeDocument/2006/relationships">
+<p:notes xmlns:a="http://schemas.openxmlformats.org/drawingml/2006/main" xmlns:r="http://schemas.openxmlformats.org/officeDocument/2006/relationships" xmlns:p="http://schemas.openxmlformats.org/presentationml/2006/main">
   <p:cSld>
     <p:spTree>
       <p:nvGrpSpPr>
@@ -498,7 +292,7 @@
         <p:nvSpPr>
           <p:cNvPr id="2" name="Slide Image Placeholder 1"/>
           <p:cNvSpPr>
-            <a:spLocks noGrp="1"/>
+            <a:spLocks noGrp="1" noRot="1" noChangeAspect="1"/>
           </p:cNvSpPr>
           <p:nvPr>
             <p:ph type="sldImg" idx="2"/>
@@ -513,7 +307,7 @@
             <a:spLocks noGrp="1"/>
           </p:cNvSpPr>
           <p:nvPr>
-            <p:ph type="body" idx="3" sz="quarter"/>
+            <p:ph type="body" sz="quarter" idx="3"/>
           </p:nvPr>
         </p:nvSpPr>
         <p:spPr/>
@@ -539,7 +333,7 @@
             <a:spLocks noGrp="1"/>
           </p:cNvSpPr>
           <p:nvPr>
-            <p:ph type="sldNum" idx="5" sz="quarter"/>
+            <p:ph type="sldNum" sz="quarter" idx="5"/>
           </p:nvPr>
         </p:nvSpPr>
         <p:spPr/>
@@ -553,7 +347,7 @@
 </file>
 
 <file path=ppt/notesSlides/notesSlide10.xml><?xml version="1.0" encoding="utf-8"?>
-<p:notes xmlns:a="http://schemas.openxmlformats.org/drawingml/2006/main" xmlns:p="http://schemas.openxmlformats.org/presentationml/2006/main" xmlns:r="http://schemas.openxmlformats.org/officeDocument/2006/relationships">
+<p:notes xmlns:a="http://schemas.openxmlformats.org/drawingml/2006/main" xmlns:r="http://schemas.openxmlformats.org/officeDocument/2006/relationships" xmlns:p="http://schemas.openxmlformats.org/presentationml/2006/main">
   <p:cSld>
     <p:spTree>
       <p:nvGrpSpPr>
@@ -573,7 +367,7 @@
         <p:nvSpPr>
           <p:cNvPr id="2" name="Slide Image Placeholder 1"/>
           <p:cNvSpPr>
-            <a:spLocks noGrp="1"/>
+            <a:spLocks noGrp="1" noRot="1" noChangeAspect="1"/>
           </p:cNvSpPr>
           <p:nvPr>
             <p:ph type="sldImg" idx="2"/>
@@ -588,7 +382,7 @@
             <a:spLocks noGrp="1"/>
           </p:cNvSpPr>
           <p:nvPr>
-            <p:ph type="body" idx="3" sz="quarter"/>
+            <p:ph type="body" sz="quarter" idx="3"/>
           </p:nvPr>
         </p:nvSpPr>
         <p:spPr/>
@@ -614,7 +408,7 @@
             <a:spLocks noGrp="1"/>
           </p:cNvSpPr>
           <p:nvPr>
-            <p:ph type="sldNum" idx="5" sz="quarter"/>
+            <p:ph type="sldNum" sz="quarter" idx="5"/>
           </p:nvPr>
         </p:nvSpPr>
         <p:spPr/>
@@ -628,7 +422,7 @@
 </file>
 
 <file path=ppt/notesSlides/notesSlide11.xml><?xml version="1.0" encoding="utf-8"?>
-<p:notes xmlns:a="http://schemas.openxmlformats.org/drawingml/2006/main" xmlns:p="http://schemas.openxmlformats.org/presentationml/2006/main" xmlns:r="http://schemas.openxmlformats.org/officeDocument/2006/relationships">
+<p:notes xmlns:a="http://schemas.openxmlformats.org/drawingml/2006/main" xmlns:r="http://schemas.openxmlformats.org/officeDocument/2006/relationships" xmlns:p="http://schemas.openxmlformats.org/presentationml/2006/main">
   <p:cSld>
     <p:spTree>
       <p:nvGrpSpPr>
@@ -648,7 +442,7 @@
         <p:nvSpPr>
           <p:cNvPr id="2" name="Slide Image Placeholder 1"/>
           <p:cNvSpPr>
-            <a:spLocks noGrp="1"/>
+            <a:spLocks noGrp="1" noRot="1" noChangeAspect="1"/>
           </p:cNvSpPr>
           <p:nvPr>
             <p:ph type="sldImg" idx="2"/>
@@ -663,7 +457,7 @@
             <a:spLocks noGrp="1"/>
           </p:cNvSpPr>
           <p:nvPr>
-            <p:ph type="body" idx="3" sz="quarter"/>
+            <p:ph type="body" sz="quarter" idx="3"/>
           </p:nvPr>
         </p:nvSpPr>
         <p:spPr/>
@@ -689,7 +483,7 @@
             <a:spLocks noGrp="1"/>
           </p:cNvSpPr>
           <p:nvPr>
-            <p:ph type="sldNum" idx="5" sz="quarter"/>
+            <p:ph type="sldNum" sz="quarter" idx="5"/>
           </p:nvPr>
         </p:nvSpPr>
         <p:spPr/>
@@ -703,7 +497,7 @@
 </file>
 
 <file path=ppt/notesSlides/notesSlide12.xml><?xml version="1.0" encoding="utf-8"?>
-<p:notes xmlns:a="http://schemas.openxmlformats.org/drawingml/2006/main" xmlns:p="http://schemas.openxmlformats.org/presentationml/2006/main" xmlns:r="http://schemas.openxmlformats.org/officeDocument/2006/relationships">
+<p:notes xmlns:a="http://schemas.openxmlformats.org/drawingml/2006/main" xmlns:r="http://schemas.openxmlformats.org/officeDocument/2006/relationships" xmlns:p="http://schemas.openxmlformats.org/presentationml/2006/main">
   <p:cSld>
     <p:spTree>
       <p:nvGrpSpPr>
@@ -723,7 +517,7 @@
         <p:nvSpPr>
           <p:cNvPr id="2" name="Slide Image Placeholder 1"/>
           <p:cNvSpPr>
-            <a:spLocks noGrp="1"/>
+            <a:spLocks noGrp="1" noRot="1" noChangeAspect="1"/>
           </p:cNvSpPr>
           <p:nvPr>
             <p:ph type="sldImg" idx="2"/>
@@ -738,7 +532,7 @@
             <a:spLocks noGrp="1"/>
           </p:cNvSpPr>
           <p:nvPr>
-            <p:ph type="body" idx="3" sz="quarter"/>
+            <p:ph type="body" sz="quarter" idx="3"/>
           </p:nvPr>
         </p:nvSpPr>
         <p:spPr/>
@@ -764,7 +558,7 @@
             <a:spLocks noGrp="1"/>
           </p:cNvSpPr>
           <p:nvPr>
-            <p:ph type="sldNum" idx="5" sz="quarter"/>
+            <p:ph type="sldNum" sz="quarter" idx="5"/>
           </p:nvPr>
         </p:nvSpPr>
         <p:spPr/>
@@ -778,7 +572,7 @@
 </file>
 
 <file path=ppt/notesSlides/notesSlide13.xml><?xml version="1.0" encoding="utf-8"?>
-<p:notes xmlns:a="http://schemas.openxmlformats.org/drawingml/2006/main" xmlns:p="http://schemas.openxmlformats.org/presentationml/2006/main" xmlns:r="http://schemas.openxmlformats.org/officeDocument/2006/relationships">
+<p:notes xmlns:a="http://schemas.openxmlformats.org/drawingml/2006/main" xmlns:r="http://schemas.openxmlformats.org/officeDocument/2006/relationships" xmlns:p="http://schemas.openxmlformats.org/presentationml/2006/main">
   <p:cSld>
     <p:spTree>
       <p:nvGrpSpPr>
@@ -798,7 +592,7 @@
         <p:nvSpPr>
           <p:cNvPr id="2" name="Slide Image Placeholder 1"/>
           <p:cNvSpPr>
-            <a:spLocks noGrp="1"/>
+            <a:spLocks noGrp="1" noRot="1" noChangeAspect="1"/>
           </p:cNvSpPr>
           <p:nvPr>
             <p:ph type="sldImg" idx="2"/>
@@ -813,7 +607,7 @@
             <a:spLocks noGrp="1"/>
           </p:cNvSpPr>
           <p:nvPr>
-            <p:ph type="body" idx="3" sz="quarter"/>
+            <p:ph type="body" sz="quarter" idx="3"/>
           </p:nvPr>
         </p:nvSpPr>
         <p:spPr/>
@@ -839,7 +633,7 @@
             <a:spLocks noGrp="1"/>
           </p:cNvSpPr>
           <p:nvPr>
-            <p:ph type="sldNum" idx="5" sz="quarter"/>
+            <p:ph type="sldNum" sz="quarter" idx="5"/>
           </p:nvPr>
         </p:nvSpPr>
         <p:spPr/>
@@ -853,7 +647,7 @@
 </file>
 
 <file path=ppt/notesSlides/notesSlide14.xml><?xml version="1.0" encoding="utf-8"?>
-<p:notes xmlns:a="http://schemas.openxmlformats.org/drawingml/2006/main" xmlns:p="http://schemas.openxmlformats.org/presentationml/2006/main" xmlns:r="http://schemas.openxmlformats.org/officeDocument/2006/relationships">
+<p:notes xmlns:a="http://schemas.openxmlformats.org/drawingml/2006/main" xmlns:r="http://schemas.openxmlformats.org/officeDocument/2006/relationships" xmlns:p="http://schemas.openxmlformats.org/presentationml/2006/main">
   <p:cSld>
     <p:spTree>
       <p:nvGrpSpPr>
@@ -873,7 +667,7 @@
         <p:nvSpPr>
           <p:cNvPr id="2" name="Slide Image Placeholder 1"/>
           <p:cNvSpPr>
-            <a:spLocks noGrp="1"/>
+            <a:spLocks noGrp="1" noRot="1" noChangeAspect="1"/>
           </p:cNvSpPr>
           <p:nvPr>
             <p:ph type="sldImg" idx="2"/>
@@ -888,7 +682,7 @@
             <a:spLocks noGrp="1"/>
           </p:cNvSpPr>
           <p:nvPr>
-            <p:ph type="body" idx="3" sz="quarter"/>
+            <p:ph type="body" sz="quarter" idx="3"/>
           </p:nvPr>
         </p:nvSpPr>
         <p:spPr/>
@@ -914,7 +708,7 @@
             <a:spLocks noGrp="1"/>
           </p:cNvSpPr>
           <p:nvPr>
-            <p:ph type="sldNum" idx="5" sz="quarter"/>
+            <p:ph type="sldNum" sz="quarter" idx="5"/>
           </p:nvPr>
         </p:nvSpPr>
         <p:spPr/>
@@ -928,7 +722,7 @@
 </file>
 
 <file path=ppt/notesSlides/notesSlide15.xml><?xml version="1.0" encoding="utf-8"?>
-<p:notes xmlns:a="http://schemas.openxmlformats.org/drawingml/2006/main" xmlns:p="http://schemas.openxmlformats.org/presentationml/2006/main" xmlns:r="http://schemas.openxmlformats.org/officeDocument/2006/relationships">
+<p:notes xmlns:a="http://schemas.openxmlformats.org/drawingml/2006/main" xmlns:r="http://schemas.openxmlformats.org/officeDocument/2006/relationships" xmlns:p="http://schemas.openxmlformats.org/presentationml/2006/main">
   <p:cSld>
     <p:spTree>
       <p:nvGrpSpPr>
@@ -948,7 +742,7 @@
         <p:nvSpPr>
           <p:cNvPr id="2" name="Slide Image Placeholder 1"/>
           <p:cNvSpPr>
-            <a:spLocks noGrp="1"/>
+            <a:spLocks noGrp="1" noRot="1" noChangeAspect="1"/>
           </p:cNvSpPr>
           <p:nvPr>
             <p:ph type="sldImg" idx="2"/>
@@ -963,7 +757,7 @@
             <a:spLocks noGrp="1"/>
           </p:cNvSpPr>
           <p:nvPr>
-            <p:ph type="body" idx="3" sz="quarter"/>
+            <p:ph type="body" sz="quarter" idx="3"/>
           </p:nvPr>
         </p:nvSpPr>
         <p:spPr/>
@@ -989,7 +783,7 @@
             <a:spLocks noGrp="1"/>
           </p:cNvSpPr>
           <p:nvPr>
-            <p:ph type="sldNum" idx="5" sz="quarter"/>
+            <p:ph type="sldNum" sz="quarter" idx="5"/>
           </p:nvPr>
         </p:nvSpPr>
         <p:spPr/>
@@ -1003,7 +797,7 @@
 </file>
 
 <file path=ppt/notesSlides/notesSlide16.xml><?xml version="1.0" encoding="utf-8"?>
-<p:notes xmlns:a="http://schemas.openxmlformats.org/drawingml/2006/main" xmlns:p="http://schemas.openxmlformats.org/presentationml/2006/main" xmlns:r="http://schemas.openxmlformats.org/officeDocument/2006/relationships">
+<p:notes xmlns:a="http://schemas.openxmlformats.org/drawingml/2006/main" xmlns:r="http://schemas.openxmlformats.org/officeDocument/2006/relationships" xmlns:p="http://schemas.openxmlformats.org/presentationml/2006/main">
   <p:cSld>
     <p:spTree>
       <p:nvGrpSpPr>
@@ -1023,7 +817,7 @@
         <p:nvSpPr>
           <p:cNvPr id="2" name="Slide Image Placeholder 1"/>
           <p:cNvSpPr>
-            <a:spLocks noGrp="1"/>
+            <a:spLocks noGrp="1" noRot="1" noChangeAspect="1"/>
           </p:cNvSpPr>
           <p:nvPr>
             <p:ph type="sldImg" idx="2"/>
@@ -1038,7 +832,7 @@
             <a:spLocks noGrp="1"/>
           </p:cNvSpPr>
           <p:nvPr>
-            <p:ph type="body" idx="3" sz="quarter"/>
+            <p:ph type="body" sz="quarter" idx="3"/>
           </p:nvPr>
         </p:nvSpPr>
         <p:spPr/>
@@ -1064,7 +858,7 @@
             <a:spLocks noGrp="1"/>
           </p:cNvSpPr>
           <p:nvPr>
-            <p:ph type="sldNum" idx="5" sz="quarter"/>
+            <p:ph type="sldNum" sz="quarter" idx="5"/>
           </p:nvPr>
         </p:nvSpPr>
         <p:spPr/>
@@ -1078,7 +872,7 @@
 </file>
 
 <file path=ppt/notesSlides/notesSlide17.xml><?xml version="1.0" encoding="utf-8"?>
-<p:notes xmlns:a="http://schemas.openxmlformats.org/drawingml/2006/main" xmlns:p="http://schemas.openxmlformats.org/presentationml/2006/main" xmlns:r="http://schemas.openxmlformats.org/officeDocument/2006/relationships">
+<p:notes xmlns:a="http://schemas.openxmlformats.org/drawingml/2006/main" xmlns:r="http://schemas.openxmlformats.org/officeDocument/2006/relationships" xmlns:p="http://schemas.openxmlformats.org/presentationml/2006/main">
   <p:cSld>
     <p:spTree>
       <p:nvGrpSpPr>
@@ -1098,7 +892,7 @@
         <p:nvSpPr>
           <p:cNvPr id="2" name="Slide Image Placeholder 1"/>
           <p:cNvSpPr>
-            <a:spLocks noGrp="1"/>
+            <a:spLocks noGrp="1" noRot="1" noChangeAspect="1"/>
           </p:cNvSpPr>
           <p:nvPr>
             <p:ph type="sldImg" idx="2"/>
@@ -1113,7 +907,7 @@
             <a:spLocks noGrp="1"/>
           </p:cNvSpPr>
           <p:nvPr>
-            <p:ph type="body" idx="3" sz="quarter"/>
+            <p:ph type="body" sz="quarter" idx="3"/>
           </p:nvPr>
         </p:nvSpPr>
         <p:spPr/>
@@ -1139,7 +933,7 @@
             <a:spLocks noGrp="1"/>
           </p:cNvSpPr>
           <p:nvPr>
-            <p:ph type="sldNum" idx="5" sz="quarter"/>
+            <p:ph type="sldNum" sz="quarter" idx="5"/>
           </p:nvPr>
         </p:nvSpPr>
         <p:spPr/>
@@ -1153,7 +947,7 @@
 </file>
 
 <file path=ppt/notesSlides/notesSlide18.xml><?xml version="1.0" encoding="utf-8"?>
-<p:notes xmlns:a="http://schemas.openxmlformats.org/drawingml/2006/main" xmlns:p="http://schemas.openxmlformats.org/presentationml/2006/main" xmlns:r="http://schemas.openxmlformats.org/officeDocument/2006/relationships">
+<p:notes xmlns:a="http://schemas.openxmlformats.org/drawingml/2006/main" xmlns:r="http://schemas.openxmlformats.org/officeDocument/2006/relationships" xmlns:p="http://schemas.openxmlformats.org/presentationml/2006/main">
   <p:cSld>
     <p:spTree>
       <p:nvGrpSpPr>
@@ -1173,7 +967,7 @@
         <p:nvSpPr>
           <p:cNvPr id="2" name="Slide Image Placeholder 1"/>
           <p:cNvSpPr>
-            <a:spLocks noGrp="1"/>
+            <a:spLocks noGrp="1" noRot="1" noChangeAspect="1"/>
           </p:cNvSpPr>
           <p:nvPr>
             <p:ph type="sldImg" idx="2"/>
@@ -1188,7 +982,7 @@
             <a:spLocks noGrp="1"/>
           </p:cNvSpPr>
           <p:nvPr>
-            <p:ph type="body" idx="3" sz="quarter"/>
+            <p:ph type="body" sz="quarter" idx="3"/>
           </p:nvPr>
         </p:nvSpPr>
         <p:spPr/>
@@ -1214,7 +1008,7 @@
             <a:spLocks noGrp="1"/>
           </p:cNvSpPr>
           <p:nvPr>
-            <p:ph type="sldNum" idx="5" sz="quarter"/>
+            <p:ph type="sldNum" sz="quarter" idx="5"/>
           </p:nvPr>
         </p:nvSpPr>
         <p:spPr/>
@@ -1228,7 +1022,7 @@
 </file>
 
 <file path=ppt/notesSlides/notesSlide19.xml><?xml version="1.0" encoding="utf-8"?>
-<p:notes xmlns:a="http://schemas.openxmlformats.org/drawingml/2006/main" xmlns:p="http://schemas.openxmlformats.org/presentationml/2006/main" xmlns:r="http://schemas.openxmlformats.org/officeDocument/2006/relationships">
+<p:notes xmlns:a="http://schemas.openxmlformats.org/drawingml/2006/main" xmlns:r="http://schemas.openxmlformats.org/officeDocument/2006/relationships" xmlns:p="http://schemas.openxmlformats.org/presentationml/2006/main">
   <p:cSld>
     <p:spTree>
       <p:nvGrpSpPr>
@@ -1248,7 +1042,7 @@
         <p:nvSpPr>
           <p:cNvPr id="2" name="Slide Image Placeholder 1"/>
           <p:cNvSpPr>
-            <a:spLocks noGrp="1"/>
+            <a:spLocks noGrp="1" noRot="1" noChangeAspect="1"/>
           </p:cNvSpPr>
           <p:nvPr>
             <p:ph type="sldImg" idx="2"/>
@@ -1263,7 +1057,7 @@
             <a:spLocks noGrp="1"/>
           </p:cNvSpPr>
           <p:nvPr>
-            <p:ph type="body" idx="3" sz="quarter"/>
+            <p:ph type="body" sz="quarter" idx="3"/>
           </p:nvPr>
         </p:nvSpPr>
         <p:spPr/>
@@ -1289,7 +1083,7 @@
             <a:spLocks noGrp="1"/>
           </p:cNvSpPr>
           <p:nvPr>
-            <p:ph type="sldNum" idx="5" sz="quarter"/>
+            <p:ph type="sldNum" sz="quarter" idx="5"/>
           </p:nvPr>
         </p:nvSpPr>
         <p:spPr/>
@@ -1303,7 +1097,7 @@
 </file>
 
 <file path=ppt/notesSlides/notesSlide2.xml><?xml version="1.0" encoding="utf-8"?>
-<p:notes xmlns:a="http://schemas.openxmlformats.org/drawingml/2006/main" xmlns:p="http://schemas.openxmlformats.org/presentationml/2006/main" xmlns:r="http://schemas.openxmlformats.org/officeDocument/2006/relationships">
+<p:notes xmlns:a="http://schemas.openxmlformats.org/drawingml/2006/main" xmlns:r="http://schemas.openxmlformats.org/officeDocument/2006/relationships" xmlns:p="http://schemas.openxmlformats.org/presentationml/2006/main">
   <p:cSld>
     <p:spTree>
       <p:nvGrpSpPr>
@@ -1323,7 +1117,7 @@
         <p:nvSpPr>
           <p:cNvPr id="2" name="Slide Image Placeholder 1"/>
           <p:cNvSpPr>
-            <a:spLocks noGrp="1"/>
+            <a:spLocks noGrp="1" noRot="1" noChangeAspect="1"/>
           </p:cNvSpPr>
           <p:nvPr>
             <p:ph type="sldImg" idx="2"/>
@@ -1338,7 +1132,7 @@
             <a:spLocks noGrp="1"/>
           </p:cNvSpPr>
           <p:nvPr>
-            <p:ph type="body" idx="3" sz="quarter"/>
+            <p:ph type="body" sz="quarter" idx="3"/>
           </p:nvPr>
         </p:nvSpPr>
         <p:spPr/>
@@ -1364,7 +1158,7 @@
             <a:spLocks noGrp="1"/>
           </p:cNvSpPr>
           <p:nvPr>
-            <p:ph type="sldNum" idx="5" sz="quarter"/>
+            <p:ph type="sldNum" sz="quarter" idx="5"/>
           </p:nvPr>
         </p:nvSpPr>
         <p:spPr/>
@@ -1378,7 +1172,7 @@
 </file>
 
 <file path=ppt/notesSlides/notesSlide20.xml><?xml version="1.0" encoding="utf-8"?>
-<p:notes xmlns:a="http://schemas.openxmlformats.org/drawingml/2006/main" xmlns:p="http://schemas.openxmlformats.org/presentationml/2006/main" xmlns:r="http://schemas.openxmlformats.org/officeDocument/2006/relationships">
+<p:notes xmlns:a="http://schemas.openxmlformats.org/drawingml/2006/main" xmlns:r="http://schemas.openxmlformats.org/officeDocument/2006/relationships" xmlns:p="http://schemas.openxmlformats.org/presentationml/2006/main">
   <p:cSld>
     <p:spTree>
       <p:nvGrpSpPr>
@@ -1398,7 +1192,7 @@
         <p:nvSpPr>
           <p:cNvPr id="2" name="Slide Image Placeholder 1"/>
           <p:cNvSpPr>
-            <a:spLocks noGrp="1"/>
+            <a:spLocks noGrp="1" noRot="1" noChangeAspect="1"/>
           </p:cNvSpPr>
           <p:nvPr>
             <p:ph type="sldImg" idx="2"/>
@@ -1413,7 +1207,7 @@
             <a:spLocks noGrp="1"/>
           </p:cNvSpPr>
           <p:nvPr>
-            <p:ph type="body" idx="3" sz="quarter"/>
+            <p:ph type="body" sz="quarter" idx="3"/>
           </p:nvPr>
         </p:nvSpPr>
         <p:spPr/>
@@ -1439,7 +1233,7 @@
             <a:spLocks noGrp="1"/>
           </p:cNvSpPr>
           <p:nvPr>
-            <p:ph type="sldNum" idx="5" sz="quarter"/>
+            <p:ph type="sldNum" sz="quarter" idx="5"/>
           </p:nvPr>
         </p:nvSpPr>
         <p:spPr/>
@@ -1453,7 +1247,7 @@
 </file>
 
 <file path=ppt/notesSlides/notesSlide21.xml><?xml version="1.0" encoding="utf-8"?>
-<p:notes xmlns:a="http://schemas.openxmlformats.org/drawingml/2006/main" xmlns:p="http://schemas.openxmlformats.org/presentationml/2006/main" xmlns:r="http://schemas.openxmlformats.org/officeDocument/2006/relationships">
+<p:notes xmlns:a="http://schemas.openxmlformats.org/drawingml/2006/main" xmlns:r="http://schemas.openxmlformats.org/officeDocument/2006/relationships" xmlns:p="http://schemas.openxmlformats.org/presentationml/2006/main">
   <p:cSld>
     <p:spTree>
       <p:nvGrpSpPr>
@@ -1473,7 +1267,7 @@
         <p:nvSpPr>
           <p:cNvPr id="2" name="Slide Image Placeholder 1"/>
           <p:cNvSpPr>
-            <a:spLocks noGrp="1"/>
+            <a:spLocks noGrp="1" noRot="1" noChangeAspect="1"/>
           </p:cNvSpPr>
           <p:nvPr>
             <p:ph type="sldImg" idx="2"/>
@@ -1488,7 +1282,7 @@
             <a:spLocks noGrp="1"/>
           </p:cNvSpPr>
           <p:nvPr>
-            <p:ph type="body" idx="3" sz="quarter"/>
+            <p:ph type="body" sz="quarter" idx="3"/>
           </p:nvPr>
         </p:nvSpPr>
         <p:spPr/>
@@ -1514,7 +1308,7 @@
             <a:spLocks noGrp="1"/>
           </p:cNvSpPr>
           <p:nvPr>
-            <p:ph type="sldNum" idx="5" sz="quarter"/>
+            <p:ph type="sldNum" sz="quarter" idx="5"/>
           </p:nvPr>
         </p:nvSpPr>
         <p:spPr/>
@@ -1528,7 +1322,7 @@
 </file>
 
 <file path=ppt/notesSlides/notesSlide3.xml><?xml version="1.0" encoding="utf-8"?>
-<p:notes xmlns:a="http://schemas.openxmlformats.org/drawingml/2006/main" xmlns:p="http://schemas.openxmlformats.org/presentationml/2006/main" xmlns:r="http://schemas.openxmlformats.org/officeDocument/2006/relationships">
+<p:notes xmlns:a="http://schemas.openxmlformats.org/drawingml/2006/main" xmlns:r="http://schemas.openxmlformats.org/officeDocument/2006/relationships" xmlns:p="http://schemas.openxmlformats.org/presentationml/2006/main">
   <p:cSld>
     <p:spTree>
       <p:nvGrpSpPr>
@@ -1548,7 +1342,7 @@
         <p:nvSpPr>
           <p:cNvPr id="2" name="Slide Image Placeholder 1"/>
           <p:cNvSpPr>
-            <a:spLocks noGrp="1"/>
+            <a:spLocks noGrp="1" noRot="1" noChangeAspect="1"/>
           </p:cNvSpPr>
           <p:nvPr>
             <p:ph type="sldImg" idx="2"/>
@@ -1563,7 +1357,7 @@
             <a:spLocks noGrp="1"/>
           </p:cNvSpPr>
           <p:nvPr>
-            <p:ph type="body" idx="3" sz="quarter"/>
+            <p:ph type="body" sz="quarter" idx="3"/>
           </p:nvPr>
         </p:nvSpPr>
         <p:spPr/>
@@ -1589,7 +1383,7 @@
             <a:spLocks noGrp="1"/>
           </p:cNvSpPr>
           <p:nvPr>
-            <p:ph type="sldNum" idx="5" sz="quarter"/>
+            <p:ph type="sldNum" sz="quarter" idx="5"/>
           </p:nvPr>
         </p:nvSpPr>
         <p:spPr/>
@@ -1603,7 +1397,7 @@
 </file>
 
 <file path=ppt/notesSlides/notesSlide4.xml><?xml version="1.0" encoding="utf-8"?>
-<p:notes xmlns:a="http://schemas.openxmlformats.org/drawingml/2006/main" xmlns:p="http://schemas.openxmlformats.org/presentationml/2006/main" xmlns:r="http://schemas.openxmlformats.org/officeDocument/2006/relationships">
+<p:notes xmlns:a="http://schemas.openxmlformats.org/drawingml/2006/main" xmlns:r="http://schemas.openxmlformats.org/officeDocument/2006/relationships" xmlns:p="http://schemas.openxmlformats.org/presentationml/2006/main">
   <p:cSld>
     <p:spTree>
       <p:nvGrpSpPr>
@@ -1623,7 +1417,7 @@
         <p:nvSpPr>
           <p:cNvPr id="2" name="Slide Image Placeholder 1"/>
           <p:cNvSpPr>
-            <a:spLocks noGrp="1"/>
+            <a:spLocks noGrp="1" noRot="1" noChangeAspect="1"/>
           </p:cNvSpPr>
           <p:nvPr>
             <p:ph type="sldImg" idx="2"/>
@@ -1638,7 +1432,7 @@
             <a:spLocks noGrp="1"/>
           </p:cNvSpPr>
           <p:nvPr>
-            <p:ph type="body" idx="3" sz="quarter"/>
+            <p:ph type="body" sz="quarter" idx="3"/>
           </p:nvPr>
         </p:nvSpPr>
         <p:spPr/>
@@ -1664,7 +1458,7 @@
             <a:spLocks noGrp="1"/>
           </p:cNvSpPr>
           <p:nvPr>
-            <p:ph type="sldNum" idx="5" sz="quarter"/>
+            <p:ph type="sldNum" sz="quarter" idx="5"/>
           </p:nvPr>
         </p:nvSpPr>
         <p:spPr/>
@@ -1678,7 +1472,7 @@
 </file>
 
 <file path=ppt/notesSlides/notesSlide5.xml><?xml version="1.0" encoding="utf-8"?>
-<p:notes xmlns:a="http://schemas.openxmlformats.org/drawingml/2006/main" xmlns:p="http://schemas.openxmlformats.org/presentationml/2006/main" xmlns:r="http://schemas.openxmlformats.org/officeDocument/2006/relationships">
+<p:notes xmlns:a="http://schemas.openxmlformats.org/drawingml/2006/main" xmlns:r="http://schemas.openxmlformats.org/officeDocument/2006/relationships" xmlns:p="http://schemas.openxmlformats.org/presentationml/2006/main">
   <p:cSld>
     <p:spTree>
       <p:nvGrpSpPr>
@@ -1698,7 +1492,7 @@
         <p:nvSpPr>
           <p:cNvPr id="2" name="Slide Image Placeholder 1"/>
           <p:cNvSpPr>
-            <a:spLocks noGrp="1"/>
+            <a:spLocks noGrp="1" noRot="1" noChangeAspect="1"/>
           </p:cNvSpPr>
           <p:nvPr>
             <p:ph type="sldImg" idx="2"/>
@@ -1713,7 +1507,7 @@
             <a:spLocks noGrp="1"/>
           </p:cNvSpPr>
           <p:nvPr>
-            <p:ph type="body" idx="3" sz="quarter"/>
+            <p:ph type="body" sz="quarter" idx="3"/>
           </p:nvPr>
         </p:nvSpPr>
         <p:spPr/>
@@ -1739,7 +1533,7 @@
             <a:spLocks noGrp="1"/>
           </p:cNvSpPr>
           <p:nvPr>
-            <p:ph type="sldNum" idx="5" sz="quarter"/>
+            <p:ph type="sldNum" sz="quarter" idx="5"/>
           </p:nvPr>
         </p:nvSpPr>
         <p:spPr/>
@@ -1753,7 +1547,7 @@
 </file>
 
 <file path=ppt/notesSlides/notesSlide6.xml><?xml version="1.0" encoding="utf-8"?>
-<p:notes xmlns:a="http://schemas.openxmlformats.org/drawingml/2006/main" xmlns:p="http://schemas.openxmlformats.org/presentationml/2006/main" xmlns:r="http://schemas.openxmlformats.org/officeDocument/2006/relationships">
+<p:notes xmlns:a="http://schemas.openxmlformats.org/drawingml/2006/main" xmlns:r="http://schemas.openxmlformats.org/officeDocument/2006/relationships" xmlns:p="http://schemas.openxmlformats.org/presentationml/2006/main">
   <p:cSld>
     <p:spTree>
       <p:nvGrpSpPr>
@@ -1773,7 +1567,7 @@
         <p:nvSpPr>
           <p:cNvPr id="2" name="Slide Image Placeholder 1"/>
           <p:cNvSpPr>
-            <a:spLocks noGrp="1"/>
+            <a:spLocks noGrp="1" noRot="1" noChangeAspect="1"/>
           </p:cNvSpPr>
           <p:nvPr>
             <p:ph type="sldImg" idx="2"/>
@@ -1788,7 +1582,7 @@
             <a:spLocks noGrp="1"/>
           </p:cNvSpPr>
           <p:nvPr>
-            <p:ph type="body" idx="3" sz="quarter"/>
+            <p:ph type="body" sz="quarter" idx="3"/>
           </p:nvPr>
         </p:nvSpPr>
         <p:spPr/>
@@ -1797,13 +1591,151 @@
           <a:lstStyle/>
           <a:p>
             <a:r>
-              <a:t>第 6 页｜15–18 分钟</a:t>
-            </a:r>
-          </a:p>
-          <a:p>
-            <a:r>
-              <a:t>用 Python 列表讲向量，用列表的列表讲矩阵。T 表示几个 token，D 表示每个 token 有多少个数字。本课 D=32。不要宣称某一维一定代表性别或词性；随机初始化的向量也还没有学到语言关系。</a:t>
-            </a:r>
+              <a:rPr dirty="0" err="1"/>
+              <a:t>第</a:t>
+            </a:r>
+            <a:r>
+              <a:rPr dirty="0"/>
+              <a:t> 6 页｜15–18 </a:t>
+            </a:r>
+            <a:r>
+              <a:rPr dirty="0" err="1"/>
+              <a:t>分钟</a:t>
+            </a:r>
+            <a:endParaRPr dirty="0"/>
+          </a:p>
+          <a:p>
+            <a:r>
+              <a:rPr dirty="0" err="1"/>
+              <a:t>用</a:t>
+            </a:r>
+            <a:r>
+              <a:rPr dirty="0"/>
+              <a:t> Python </a:t>
+            </a:r>
+            <a:r>
+              <a:rPr dirty="0" err="1"/>
+              <a:t>列表讲向量，用列表的列表讲矩阵。T</a:t>
+            </a:r>
+            <a:r>
+              <a:rPr dirty="0"/>
+              <a:t> </a:t>
+            </a:r>
+            <a:r>
+              <a:rPr dirty="0" err="1"/>
+              <a:t>表示几个</a:t>
+            </a:r>
+            <a:r>
+              <a:rPr dirty="0"/>
+              <a:t> </a:t>
+            </a:r>
+            <a:r>
+              <a:rPr dirty="0" err="1"/>
+              <a:t>token，D</a:t>
+            </a:r>
+            <a:r>
+              <a:rPr dirty="0"/>
+              <a:t> </a:t>
+            </a:r>
+            <a:r>
+              <a:rPr dirty="0" err="1"/>
+              <a:t>表示每个</a:t>
+            </a:r>
+            <a:r>
+              <a:rPr dirty="0"/>
+              <a:t> token </a:t>
+            </a:r>
+            <a:r>
+              <a:rPr dirty="0" err="1"/>
+              <a:t>有多少个数字。本课</a:t>
+            </a:r>
+            <a:r>
+              <a:rPr dirty="0"/>
+              <a:t> D=32。不要宣称某一维一定代表性别或词性；随机初始化的向量也还没有学到语言关系。</a:t>
+            </a:r>
+            <a:endParaRPr lang="en-US" dirty="0"/>
+          </a:p>
+          <a:p>
+            <a:endParaRPr lang="en-US" dirty="0"/>
+          </a:p>
+          <a:p>
+            <a:endParaRPr lang="en-US" dirty="0"/>
+          </a:p>
+          <a:p>
+            <a:endParaRPr lang="en-US" dirty="0"/>
+          </a:p>
+          <a:p>
+            <a:r>
+              <a:rPr lang="zh-CN" altLang="en-US" dirty="0"/>
+              <a:t>张嘉怡 </a:t>
+            </a:r>
+            <a:r>
+              <a:rPr lang="en-US" altLang="zh-CN" dirty="0"/>
+              <a:t>[1,2,3,4,5]</a:t>
+            </a:r>
+          </a:p>
+          <a:p>
+            <a:r>
+              <a:rPr lang="en-US" dirty="0" err="1"/>
+              <a:t>小猫</a:t>
+            </a:r>
+            <a:r>
+              <a:rPr lang="zh-CN" altLang="en-US" dirty="0"/>
+              <a:t> </a:t>
+            </a:r>
+            <a:r>
+              <a:rPr lang="en-US" altLang="zh-CN" dirty="0"/>
+              <a:t>[1,2.1,3,4,5]</a:t>
+            </a:r>
+          </a:p>
+          <a:p>
+            <a:endParaRPr lang="en-US" dirty="0"/>
+          </a:p>
+          <a:p>
+            <a:endParaRPr lang="en-US" dirty="0"/>
+          </a:p>
+          <a:p>
+            <a:r>
+              <a:rPr lang="en-US" dirty="0" err="1"/>
+              <a:t>张嘉怡</a:t>
+            </a:r>
+            <a:r>
+              <a:rPr lang="zh-CN" altLang="en-US" dirty="0"/>
+              <a:t> </a:t>
+            </a:r>
+            <a:r>
+              <a:rPr lang="en-US" altLang="zh-CN" dirty="0"/>
+              <a:t>2</a:t>
+            </a:r>
+          </a:p>
+          <a:p>
+            <a:r>
+              <a:rPr lang="en-US" dirty="0" err="1"/>
+              <a:t>小猫</a:t>
+            </a:r>
+            <a:r>
+              <a:rPr lang="zh-CN" altLang="en-US" dirty="0"/>
+              <a:t> </a:t>
+            </a:r>
+            <a:r>
+              <a:rPr lang="en-US" altLang="zh-CN" dirty="0"/>
+              <a:t>3</a:t>
+            </a:r>
+          </a:p>
+          <a:p>
+            <a:r>
+              <a:rPr lang="en-US" dirty="0" err="1"/>
+              <a:t>微微妹妹</a:t>
+            </a:r>
+            <a:r>
+              <a:rPr lang="zh-CN" altLang="en-US" dirty="0"/>
+              <a:t> </a:t>
+            </a:r>
+            <a:r>
+              <a:rPr lang="en-US" altLang="zh-CN"/>
+              <a:t>1</a:t>
+            </a:r>
+            <a:endParaRPr lang="en-US" dirty="0"/>
           </a:p>
         </p:txBody>
       </p:sp>
@@ -1814,7 +1746,7 @@
             <a:spLocks noGrp="1"/>
           </p:cNvSpPr>
           <p:nvPr>
-            <p:ph type="sldNum" idx="5" sz="quarter"/>
+            <p:ph type="sldNum" sz="quarter" idx="5"/>
           </p:nvPr>
         </p:nvSpPr>
         <p:spPr/>
@@ -1828,7 +1760,7 @@
 </file>
 
 <file path=ppt/notesSlides/notesSlide7.xml><?xml version="1.0" encoding="utf-8"?>
-<p:notes xmlns:a="http://schemas.openxmlformats.org/drawingml/2006/main" xmlns:p="http://schemas.openxmlformats.org/presentationml/2006/main" xmlns:r="http://schemas.openxmlformats.org/officeDocument/2006/relationships">
+<p:notes xmlns:a="http://schemas.openxmlformats.org/drawingml/2006/main" xmlns:r="http://schemas.openxmlformats.org/officeDocument/2006/relationships" xmlns:p="http://schemas.openxmlformats.org/presentationml/2006/main">
   <p:cSld>
     <p:spTree>
       <p:nvGrpSpPr>
@@ -1848,7 +1780,7 @@
         <p:nvSpPr>
           <p:cNvPr id="2" name="Slide Image Placeholder 1"/>
           <p:cNvSpPr>
-            <a:spLocks noGrp="1"/>
+            <a:spLocks noGrp="1" noRot="1" noChangeAspect="1"/>
           </p:cNvSpPr>
           <p:nvPr>
             <p:ph type="sldImg" idx="2"/>
@@ -1863,7 +1795,7 @@
             <a:spLocks noGrp="1"/>
           </p:cNvSpPr>
           <p:nvPr>
-            <p:ph type="body" idx="3" sz="quarter"/>
+            <p:ph type="body" sz="quarter" idx="3"/>
           </p:nvPr>
         </p:nvSpPr>
         <p:spPr/>
@@ -1889,7 +1821,7 @@
             <a:spLocks noGrp="1"/>
           </p:cNvSpPr>
           <p:nvPr>
-            <p:ph type="sldNum" idx="5" sz="quarter"/>
+            <p:ph type="sldNum" sz="quarter" idx="5"/>
           </p:nvPr>
         </p:nvSpPr>
         <p:spPr/>
@@ -1903,7 +1835,7 @@
 </file>
 
 <file path=ppt/notesSlides/notesSlide8.xml><?xml version="1.0" encoding="utf-8"?>
-<p:notes xmlns:a="http://schemas.openxmlformats.org/drawingml/2006/main" xmlns:p="http://schemas.openxmlformats.org/presentationml/2006/main" xmlns:r="http://schemas.openxmlformats.org/officeDocument/2006/relationships">
+<p:notes xmlns:a="http://schemas.openxmlformats.org/drawingml/2006/main" xmlns:r="http://schemas.openxmlformats.org/officeDocument/2006/relationships" xmlns:p="http://schemas.openxmlformats.org/presentationml/2006/main">
   <p:cSld>
     <p:spTree>
       <p:nvGrpSpPr>
@@ -1923,7 +1855,7 @@
         <p:nvSpPr>
           <p:cNvPr id="2" name="Slide Image Placeholder 1"/>
           <p:cNvSpPr>
-            <a:spLocks noGrp="1"/>
+            <a:spLocks noGrp="1" noRot="1" noChangeAspect="1"/>
           </p:cNvSpPr>
           <p:nvPr>
             <p:ph type="sldImg" idx="2"/>
@@ -1938,7 +1870,7 @@
             <a:spLocks noGrp="1"/>
           </p:cNvSpPr>
           <p:nvPr>
-            <p:ph type="body" idx="3" sz="quarter"/>
+            <p:ph type="body" sz="quarter" idx="3"/>
           </p:nvPr>
         </p:nvSpPr>
         <p:spPr/>
@@ -1964,7 +1896,7 @@
             <a:spLocks noGrp="1"/>
           </p:cNvSpPr>
           <p:nvPr>
-            <p:ph type="sldNum" idx="5" sz="quarter"/>
+            <p:ph type="sldNum" sz="quarter" idx="5"/>
           </p:nvPr>
         </p:nvSpPr>
         <p:spPr/>
@@ -1978,7 +1910,7 @@
 </file>
 
 <file path=ppt/notesSlides/notesSlide9.xml><?xml version="1.0" encoding="utf-8"?>
-<p:notes xmlns:a="http://schemas.openxmlformats.org/drawingml/2006/main" xmlns:p="http://schemas.openxmlformats.org/presentationml/2006/main" xmlns:r="http://schemas.openxmlformats.org/officeDocument/2006/relationships">
+<p:notes xmlns:a="http://schemas.openxmlformats.org/drawingml/2006/main" xmlns:r="http://schemas.openxmlformats.org/officeDocument/2006/relationships" xmlns:p="http://schemas.openxmlformats.org/presentationml/2006/main">
   <p:cSld>
     <p:spTree>
       <p:nvGrpSpPr>
@@ -1998,7 +1930,7 @@
         <p:nvSpPr>
           <p:cNvPr id="2" name="Slide Image Placeholder 1"/>
           <p:cNvSpPr>
-            <a:spLocks noGrp="1"/>
+            <a:spLocks noGrp="1" noRot="1" noChangeAspect="1"/>
           </p:cNvSpPr>
           <p:nvPr>
             <p:ph type="sldImg" idx="2"/>
@@ -2013,7 +1945,7 @@
             <a:spLocks noGrp="1"/>
           </p:cNvSpPr>
           <p:nvPr>
-            <p:ph type="body" idx="3" sz="quarter"/>
+            <p:ph type="body" sz="quarter" idx="3"/>
           </p:nvPr>
         </p:nvSpPr>
         <p:spPr/>
@@ -2039,7 +1971,7 @@
             <a:spLocks noGrp="1"/>
           </p:cNvSpPr>
           <p:nvPr>
-            <p:ph type="sldNum" idx="5" sz="quarter"/>
+            <p:ph type="sldNum" sz="quarter" idx="5"/>
           </p:nvPr>
         </p:nvSpPr>
         <p:spPr/>
@@ -2090,10 +2022,9 @@
           <a:lstStyle/>
           <a:p>
             <a:r>
-              <a:rPr lang="en-US" smtClean="0"/>
+              <a:rPr lang="en-US"/>
               <a:t>Click to edit Master title style</a:t>
             </a:r>
-            <a:endParaRPr lang="en-US"/>
           </a:p>
         </p:txBody>
       </p:sp>
@@ -2209,10 +2140,9 @@
           </a:lstStyle>
           <a:p>
             <a:r>
-              <a:rPr lang="en-US" smtClean="0"/>
+              <a:rPr lang="en-US"/>
               <a:t>Click to edit Master subtitle style</a:t>
             </a:r>
-            <a:endParaRPr lang="en-US"/>
           </a:p>
         </p:txBody>
       </p:sp>
@@ -2233,7 +2163,7 @@
           <a:p>
             <a:fld id="{5BCAD085-E8A6-8845-BD4E-CB4CCA059FC4}" type="datetimeFigureOut">
               <a:rPr lang="en-US" smtClean="0"/>
-              <a:t>1/27/13</a:t>
+              <a:t>10/15/26</a:t>
             </a:fld>
             <a:endParaRPr lang="en-US"/>
           </a:p>
@@ -2327,10 +2257,9 @@
           <a:lstStyle/>
           <a:p>
             <a:r>
-              <a:rPr lang="en-US" smtClean="0"/>
+              <a:rPr lang="en-US"/>
               <a:t>Click to edit Master title style</a:t>
             </a:r>
-            <a:endParaRPr lang="en-US"/>
           </a:p>
         </p:txBody>
       </p:sp>
@@ -2351,38 +2280,37 @@
           <a:p>
             <a:pPr lvl="0"/>
             <a:r>
-              <a:rPr lang="en-US" smtClean="0"/>
+              <a:rPr lang="en-US"/>
               <a:t>Click to edit Master text styles</a:t>
             </a:r>
           </a:p>
           <a:p>
             <a:pPr lvl="1"/>
             <a:r>
-              <a:rPr lang="en-US" smtClean="0"/>
+              <a:rPr lang="en-US"/>
               <a:t>Second level</a:t>
             </a:r>
           </a:p>
           <a:p>
             <a:pPr lvl="2"/>
             <a:r>
-              <a:rPr lang="en-US" smtClean="0"/>
+              <a:rPr lang="en-US"/>
               <a:t>Third level</a:t>
             </a:r>
           </a:p>
           <a:p>
             <a:pPr lvl="3"/>
             <a:r>
-              <a:rPr lang="en-US" smtClean="0"/>
+              <a:rPr lang="en-US"/>
               <a:t>Fourth level</a:t>
             </a:r>
           </a:p>
           <a:p>
             <a:pPr lvl="4"/>
             <a:r>
-              <a:rPr lang="en-US" smtClean="0"/>
+              <a:rPr lang="en-US"/>
               <a:t>Fifth level</a:t>
             </a:r>
-            <a:endParaRPr lang="en-US"/>
           </a:p>
         </p:txBody>
       </p:sp>
@@ -2403,7 +2331,7 @@
           <a:p>
             <a:fld id="{5BCAD085-E8A6-8845-BD4E-CB4CCA059FC4}" type="datetimeFigureOut">
               <a:rPr lang="en-US" smtClean="0"/>
-              <a:t>1/27/13</a:t>
+              <a:t>10/15/26</a:t>
             </a:fld>
             <a:endParaRPr lang="en-US"/>
           </a:p>
@@ -2502,10 +2430,9 @@
           <a:lstStyle/>
           <a:p>
             <a:r>
-              <a:rPr lang="en-US" smtClean="0"/>
+              <a:rPr lang="en-US"/>
               <a:t>Click to edit Master title style</a:t>
             </a:r>
-            <a:endParaRPr lang="en-US"/>
           </a:p>
         </p:txBody>
       </p:sp>
@@ -2531,38 +2458,37 @@
           <a:p>
             <a:pPr lvl="0"/>
             <a:r>
-              <a:rPr lang="en-US" smtClean="0"/>
+              <a:rPr lang="en-US"/>
               <a:t>Click to edit Master text styles</a:t>
             </a:r>
           </a:p>
           <a:p>
             <a:pPr lvl="1"/>
             <a:r>
-              <a:rPr lang="en-US" smtClean="0"/>
+              <a:rPr lang="en-US"/>
               <a:t>Second level</a:t>
             </a:r>
           </a:p>
           <a:p>
             <a:pPr lvl="2"/>
             <a:r>
-              <a:rPr lang="en-US" smtClean="0"/>
+              <a:rPr lang="en-US"/>
               <a:t>Third level</a:t>
             </a:r>
           </a:p>
           <a:p>
             <a:pPr lvl="3"/>
             <a:r>
-              <a:rPr lang="en-US" smtClean="0"/>
+              <a:rPr lang="en-US"/>
               <a:t>Fourth level</a:t>
             </a:r>
           </a:p>
           <a:p>
             <a:pPr lvl="4"/>
             <a:r>
-              <a:rPr lang="en-US" smtClean="0"/>
+              <a:rPr lang="en-US"/>
               <a:t>Fifth level</a:t>
             </a:r>
-            <a:endParaRPr lang="en-US"/>
           </a:p>
         </p:txBody>
       </p:sp>
@@ -2583,7 +2509,7 @@
           <a:p>
             <a:fld id="{5BCAD085-E8A6-8845-BD4E-CB4CCA059FC4}" type="datetimeFigureOut">
               <a:rPr lang="en-US" smtClean="0"/>
-              <a:t>1/27/13</a:t>
+              <a:t>10/15/26</a:t>
             </a:fld>
             <a:endParaRPr lang="en-US"/>
           </a:p>
@@ -2677,10 +2603,9 @@
           <a:lstStyle/>
           <a:p>
             <a:r>
-              <a:rPr lang="en-US" smtClean="0"/>
+              <a:rPr lang="en-US"/>
               <a:t>Click to edit Master title style</a:t>
             </a:r>
-            <a:endParaRPr lang="en-US"/>
           </a:p>
         </p:txBody>
       </p:sp>
@@ -2701,38 +2626,37 @@
           <a:p>
             <a:pPr lvl="0"/>
             <a:r>
-              <a:rPr lang="en-US" smtClean="0"/>
+              <a:rPr lang="en-US"/>
               <a:t>Click to edit Master text styles</a:t>
             </a:r>
           </a:p>
           <a:p>
             <a:pPr lvl="1"/>
             <a:r>
-              <a:rPr lang="en-US" smtClean="0"/>
+              <a:rPr lang="en-US"/>
               <a:t>Second level</a:t>
             </a:r>
           </a:p>
           <a:p>
             <a:pPr lvl="2"/>
             <a:r>
-              <a:rPr lang="en-US" smtClean="0"/>
+              <a:rPr lang="en-US"/>
               <a:t>Third level</a:t>
             </a:r>
           </a:p>
           <a:p>
             <a:pPr lvl="3"/>
             <a:r>
-              <a:rPr lang="en-US" smtClean="0"/>
+              <a:rPr lang="en-US"/>
               <a:t>Fourth level</a:t>
             </a:r>
           </a:p>
           <a:p>
             <a:pPr lvl="4"/>
             <a:r>
-              <a:rPr lang="en-US" smtClean="0"/>
+              <a:rPr lang="en-US"/>
               <a:t>Fifth level</a:t>
             </a:r>
-            <a:endParaRPr lang="en-US"/>
           </a:p>
         </p:txBody>
       </p:sp>
@@ -2753,7 +2677,7 @@
           <a:p>
             <a:fld id="{5BCAD085-E8A6-8845-BD4E-CB4CCA059FC4}" type="datetimeFigureOut">
               <a:rPr lang="en-US" smtClean="0"/>
-              <a:t>1/27/13</a:t>
+              <a:t>10/15/26</a:t>
             </a:fld>
             <a:endParaRPr lang="en-US"/>
           </a:p>
@@ -2856,10 +2780,9 @@
           </a:lstStyle>
           <a:p>
             <a:r>
-              <a:rPr lang="en-US" smtClean="0"/>
+              <a:rPr lang="en-US"/>
               <a:t>Click to edit Master title style</a:t>
             </a:r>
-            <a:endParaRPr lang="en-US"/>
           </a:p>
         </p:txBody>
       </p:sp>
@@ -2976,7 +2899,7 @@
           <a:p>
             <a:pPr lvl="0"/>
             <a:r>
-              <a:rPr lang="en-US" smtClean="0"/>
+              <a:rPr lang="en-US"/>
               <a:t>Click to edit Master text styles</a:t>
             </a:r>
           </a:p>
@@ -2999,7 +2922,7 @@
           <a:p>
             <a:fld id="{5BCAD085-E8A6-8845-BD4E-CB4CCA059FC4}" type="datetimeFigureOut">
               <a:rPr lang="en-US" smtClean="0"/>
-              <a:t>1/27/13</a:t>
+              <a:t>10/15/26</a:t>
             </a:fld>
             <a:endParaRPr lang="en-US"/>
           </a:p>
@@ -3093,10 +3016,9 @@
           <a:lstStyle/>
           <a:p>
             <a:r>
-              <a:rPr lang="en-US" smtClean="0"/>
+              <a:rPr lang="en-US"/>
               <a:t>Click to edit Master title style</a:t>
             </a:r>
-            <a:endParaRPr lang="en-US"/>
           </a:p>
         </p:txBody>
       </p:sp>
@@ -3150,38 +3072,37 @@
           <a:p>
             <a:pPr lvl="0"/>
             <a:r>
-              <a:rPr lang="en-US" smtClean="0"/>
+              <a:rPr lang="en-US"/>
               <a:t>Click to edit Master text styles</a:t>
             </a:r>
           </a:p>
           <a:p>
             <a:pPr lvl="1"/>
             <a:r>
-              <a:rPr lang="en-US" smtClean="0"/>
+              <a:rPr lang="en-US"/>
               <a:t>Second level</a:t>
             </a:r>
           </a:p>
           <a:p>
             <a:pPr lvl="2"/>
             <a:r>
-              <a:rPr lang="en-US" smtClean="0"/>
+              <a:rPr lang="en-US"/>
               <a:t>Third level</a:t>
             </a:r>
           </a:p>
           <a:p>
             <a:pPr lvl="3"/>
             <a:r>
-              <a:rPr lang="en-US" smtClean="0"/>
+              <a:rPr lang="en-US"/>
               <a:t>Fourth level</a:t>
             </a:r>
           </a:p>
           <a:p>
             <a:pPr lvl="4"/>
             <a:r>
-              <a:rPr lang="en-US" smtClean="0"/>
+              <a:rPr lang="en-US"/>
               <a:t>Fifth level</a:t>
             </a:r>
-            <a:endParaRPr lang="en-US"/>
           </a:p>
         </p:txBody>
       </p:sp>
@@ -3235,38 +3156,37 @@
           <a:p>
             <a:pPr lvl="0"/>
             <a:r>
-              <a:rPr lang="en-US" smtClean="0"/>
+              <a:rPr lang="en-US"/>
               <a:t>Click to edit Master text styles</a:t>
             </a:r>
           </a:p>
           <a:p>
             <a:pPr lvl="1"/>
             <a:r>
-              <a:rPr lang="en-US" smtClean="0"/>
+              <a:rPr lang="en-US"/>
               <a:t>Second level</a:t>
             </a:r>
           </a:p>
           <a:p>
             <a:pPr lvl="2"/>
             <a:r>
-              <a:rPr lang="en-US" smtClean="0"/>
+              <a:rPr lang="en-US"/>
               <a:t>Third level</a:t>
             </a:r>
           </a:p>
           <a:p>
             <a:pPr lvl="3"/>
             <a:r>
-              <a:rPr lang="en-US" smtClean="0"/>
+              <a:rPr lang="en-US"/>
               <a:t>Fourth level</a:t>
             </a:r>
           </a:p>
           <a:p>
             <a:pPr lvl="4"/>
             <a:r>
-              <a:rPr lang="en-US" smtClean="0"/>
+              <a:rPr lang="en-US"/>
               <a:t>Fifth level</a:t>
             </a:r>
-            <a:endParaRPr lang="en-US"/>
           </a:p>
         </p:txBody>
       </p:sp>
@@ -3287,7 +3207,7 @@
           <a:p>
             <a:fld id="{5BCAD085-E8A6-8845-BD4E-CB4CCA059FC4}" type="datetimeFigureOut">
               <a:rPr lang="en-US" smtClean="0"/>
-              <a:t>1/27/13</a:t>
+              <a:t>10/15/26</a:t>
             </a:fld>
             <a:endParaRPr lang="en-US"/>
           </a:p>
@@ -3385,10 +3305,9 @@
           </a:lstStyle>
           <a:p>
             <a:r>
-              <a:rPr lang="en-US" smtClean="0"/>
+              <a:rPr lang="en-US"/>
               <a:t>Click to edit Master title style</a:t>
             </a:r>
-            <a:endParaRPr lang="en-US"/>
           </a:p>
         </p:txBody>
       </p:sp>
@@ -3451,7 +3370,7 @@
           <a:p>
             <a:pPr lvl="0"/>
             <a:r>
-              <a:rPr lang="en-US" smtClean="0"/>
+              <a:rPr lang="en-US"/>
               <a:t>Click to edit Master text styles</a:t>
             </a:r>
           </a:p>
@@ -3507,38 +3426,37 @@
           <a:p>
             <a:pPr lvl="0"/>
             <a:r>
-              <a:rPr lang="en-US" smtClean="0"/>
+              <a:rPr lang="en-US"/>
               <a:t>Click to edit Master text styles</a:t>
             </a:r>
           </a:p>
           <a:p>
             <a:pPr lvl="1"/>
             <a:r>
-              <a:rPr lang="en-US" smtClean="0"/>
+              <a:rPr lang="en-US"/>
               <a:t>Second level</a:t>
             </a:r>
           </a:p>
           <a:p>
             <a:pPr lvl="2"/>
             <a:r>
-              <a:rPr lang="en-US" smtClean="0"/>
+              <a:rPr lang="en-US"/>
               <a:t>Third level</a:t>
             </a:r>
           </a:p>
           <a:p>
             <a:pPr lvl="3"/>
             <a:r>
-              <a:rPr lang="en-US" smtClean="0"/>
+              <a:rPr lang="en-US"/>
               <a:t>Fourth level</a:t>
             </a:r>
           </a:p>
           <a:p>
             <a:pPr lvl="4"/>
             <a:r>
-              <a:rPr lang="en-US" smtClean="0"/>
+              <a:rPr lang="en-US"/>
               <a:t>Fifth level</a:t>
             </a:r>
-            <a:endParaRPr lang="en-US"/>
           </a:p>
         </p:txBody>
       </p:sp>
@@ -3601,7 +3519,7 @@
           <a:p>
             <a:pPr lvl="0"/>
             <a:r>
-              <a:rPr lang="en-US" smtClean="0"/>
+              <a:rPr lang="en-US"/>
               <a:t>Click to edit Master text styles</a:t>
             </a:r>
           </a:p>
@@ -3657,38 +3575,37 @@
           <a:p>
             <a:pPr lvl="0"/>
             <a:r>
-              <a:rPr lang="en-US" smtClean="0"/>
+              <a:rPr lang="en-US"/>
               <a:t>Click to edit Master text styles</a:t>
             </a:r>
           </a:p>
           <a:p>
             <a:pPr lvl="1"/>
             <a:r>
-              <a:rPr lang="en-US" smtClean="0"/>
+              <a:rPr lang="en-US"/>
               <a:t>Second level</a:t>
             </a:r>
           </a:p>
           <a:p>
             <a:pPr lvl="2"/>
             <a:r>
-              <a:rPr lang="en-US" smtClean="0"/>
+              <a:rPr lang="en-US"/>
               <a:t>Third level</a:t>
             </a:r>
           </a:p>
           <a:p>
             <a:pPr lvl="3"/>
             <a:r>
-              <a:rPr lang="en-US" smtClean="0"/>
+              <a:rPr lang="en-US"/>
               <a:t>Fourth level</a:t>
             </a:r>
           </a:p>
           <a:p>
             <a:pPr lvl="4"/>
             <a:r>
-              <a:rPr lang="en-US" smtClean="0"/>
+              <a:rPr lang="en-US"/>
               <a:t>Fifth level</a:t>
             </a:r>
-            <a:endParaRPr lang="en-US"/>
           </a:p>
         </p:txBody>
       </p:sp>
@@ -3709,7 +3626,7 @@
           <a:p>
             <a:fld id="{5BCAD085-E8A6-8845-BD4E-CB4CCA059FC4}" type="datetimeFigureOut">
               <a:rPr lang="en-US" smtClean="0"/>
-              <a:t>1/27/13</a:t>
+              <a:t>10/15/26</a:t>
             </a:fld>
             <a:endParaRPr lang="en-US"/>
           </a:p>
@@ -3803,10 +3720,9 @@
           <a:lstStyle/>
           <a:p>
             <a:r>
-              <a:rPr lang="en-US" smtClean="0"/>
+              <a:rPr lang="en-US"/>
               <a:t>Click to edit Master title style</a:t>
             </a:r>
-            <a:endParaRPr lang="en-US"/>
           </a:p>
         </p:txBody>
       </p:sp>
@@ -3827,7 +3743,7 @@
           <a:p>
             <a:fld id="{5BCAD085-E8A6-8845-BD4E-CB4CCA059FC4}" type="datetimeFigureOut">
               <a:rPr lang="en-US" smtClean="0"/>
-              <a:t>1/27/13</a:t>
+              <a:t>10/15/26</a:t>
             </a:fld>
             <a:endParaRPr lang="en-US"/>
           </a:p>
@@ -3922,7 +3838,7 @@
           <a:p>
             <a:fld id="{5BCAD085-E8A6-8845-BD4E-CB4CCA059FC4}" type="datetimeFigureOut">
               <a:rPr lang="en-US" smtClean="0"/>
-              <a:t>1/27/13</a:t>
+              <a:t>10/15/26</a:t>
             </a:fld>
             <a:endParaRPr lang="en-US"/>
           </a:p>
@@ -4025,10 +3941,9 @@
           </a:lstStyle>
           <a:p>
             <a:r>
-              <a:rPr lang="en-US" smtClean="0"/>
+              <a:rPr lang="en-US"/>
               <a:t>Click to edit Master title style</a:t>
             </a:r>
-            <a:endParaRPr lang="en-US"/>
           </a:p>
         </p:txBody>
       </p:sp>
@@ -4082,38 +3997,37 @@
           <a:p>
             <a:pPr lvl="0"/>
             <a:r>
-              <a:rPr lang="en-US" smtClean="0"/>
+              <a:rPr lang="en-US"/>
               <a:t>Click to edit Master text styles</a:t>
             </a:r>
           </a:p>
           <a:p>
             <a:pPr lvl="1"/>
             <a:r>
-              <a:rPr lang="en-US" smtClean="0"/>
+              <a:rPr lang="en-US"/>
               <a:t>Second level</a:t>
             </a:r>
           </a:p>
           <a:p>
             <a:pPr lvl="2"/>
             <a:r>
-              <a:rPr lang="en-US" smtClean="0"/>
+              <a:rPr lang="en-US"/>
               <a:t>Third level</a:t>
             </a:r>
           </a:p>
           <a:p>
             <a:pPr lvl="3"/>
             <a:r>
-              <a:rPr lang="en-US" smtClean="0"/>
+              <a:rPr lang="en-US"/>
               <a:t>Fourth level</a:t>
             </a:r>
           </a:p>
           <a:p>
             <a:pPr lvl="4"/>
             <a:r>
-              <a:rPr lang="en-US" smtClean="0"/>
+              <a:rPr lang="en-US"/>
               <a:t>Fifth level</a:t>
             </a:r>
-            <a:endParaRPr lang="en-US"/>
           </a:p>
         </p:txBody>
       </p:sp>
@@ -4176,7 +4090,7 @@
           <a:p>
             <a:pPr lvl="0"/>
             <a:r>
-              <a:rPr lang="en-US" smtClean="0"/>
+              <a:rPr lang="en-US"/>
               <a:t>Click to edit Master text styles</a:t>
             </a:r>
           </a:p>
@@ -4199,7 +4113,7 @@
           <a:p>
             <a:fld id="{5BCAD085-E8A6-8845-BD4E-CB4CCA059FC4}" type="datetimeFigureOut">
               <a:rPr lang="en-US" smtClean="0"/>
-              <a:t>1/27/13</a:t>
+              <a:t>10/15/26</a:t>
             </a:fld>
             <a:endParaRPr lang="en-US"/>
           </a:p>
@@ -4302,10 +4216,9 @@
           </a:lstStyle>
           <a:p>
             <a:r>
-              <a:rPr lang="en-US" smtClean="0"/>
+              <a:rPr lang="en-US"/>
               <a:t>Click to edit Master title style</a:t>
             </a:r>
-            <a:endParaRPr lang="en-US"/>
           </a:p>
         </p:txBody>
       </p:sp>
@@ -4429,7 +4342,7 @@
           <a:p>
             <a:pPr lvl="0"/>
             <a:r>
-              <a:rPr lang="en-US" smtClean="0"/>
+              <a:rPr lang="en-US"/>
               <a:t>Click to edit Master text styles</a:t>
             </a:r>
           </a:p>
@@ -4452,7 +4365,7 @@
           <a:p>
             <a:fld id="{5BCAD085-E8A6-8845-BD4E-CB4CCA059FC4}" type="datetimeFigureOut">
               <a:rPr lang="en-US" smtClean="0"/>
-              <a:t>1/27/13</a:t>
+              <a:t>10/15/26</a:t>
             </a:fld>
             <a:endParaRPr lang="en-US"/>
           </a:p>
@@ -4561,10 +4474,9 @@
           <a:lstStyle/>
           <a:p>
             <a:r>
-              <a:rPr lang="en-US" smtClean="0"/>
+              <a:rPr lang="en-US"/>
               <a:t>Click to edit Master title style</a:t>
             </a:r>
-            <a:endParaRPr lang="en-US"/>
           </a:p>
         </p:txBody>
       </p:sp>
@@ -4595,38 +4507,37 @@
           <a:p>
             <a:pPr lvl="0"/>
             <a:r>
-              <a:rPr lang="en-US" smtClean="0"/>
+              <a:rPr lang="en-US"/>
               <a:t>Click to edit Master text styles</a:t>
             </a:r>
           </a:p>
           <a:p>
             <a:pPr lvl="1"/>
             <a:r>
-              <a:rPr lang="en-US" smtClean="0"/>
+              <a:rPr lang="en-US"/>
               <a:t>Second level</a:t>
             </a:r>
           </a:p>
           <a:p>
             <a:pPr lvl="2"/>
             <a:r>
-              <a:rPr lang="en-US" smtClean="0"/>
+              <a:rPr lang="en-US"/>
               <a:t>Third level</a:t>
             </a:r>
           </a:p>
           <a:p>
             <a:pPr lvl="3"/>
             <a:r>
-              <a:rPr lang="en-US" smtClean="0"/>
+              <a:rPr lang="en-US"/>
               <a:t>Fourth level</a:t>
             </a:r>
           </a:p>
           <a:p>
             <a:pPr lvl="4"/>
             <a:r>
-              <a:rPr lang="en-US" smtClean="0"/>
+              <a:rPr lang="en-US"/>
               <a:t>Fifth level</a:t>
             </a:r>
-            <a:endParaRPr lang="en-US"/>
           </a:p>
         </p:txBody>
       </p:sp>
@@ -4665,7 +4576,7 @@
           <a:p>
             <a:fld id="{5BCAD085-E8A6-8845-BD4E-CB4CCA059FC4}" type="datetimeFigureOut">
               <a:rPr lang="en-US" smtClean="0"/>
-              <a:t>1/27/13</a:t>
+              <a:t>10/15/26</a:t>
             </a:fld>
             <a:endParaRPr lang="en-US"/>
           </a:p>
@@ -5024,7 +4935,7 @@
 </file>
 
 <file path=ppt/slides/slide1.xml><?xml version="1.0" encoding="utf-8"?>
-<p:sld xmlns:a="http://schemas.openxmlformats.org/drawingml/2006/main" xmlns:p="http://schemas.openxmlformats.org/presentationml/2006/main" xmlns:r="http://schemas.openxmlformats.org/officeDocument/2006/relationships">
+<p:sld xmlns:a="http://schemas.openxmlformats.org/drawingml/2006/main" xmlns:r="http://schemas.openxmlformats.org/officeDocument/2006/relationships" xmlns:p="http://schemas.openxmlformats.org/presentationml/2006/main">
   <p:cSld>
     <p:bg>
       <p:bgPr>
@@ -5040,7 +4951,14 @@
         <p:cNvGrpSpPr/>
         <p:nvPr/>
       </p:nvGrpSpPr>
-      <p:grpSpPr/>
+      <p:grpSpPr>
+        <a:xfrm>
+          <a:off x="0" y="0"/>
+          <a:ext cx="0" cy="0"/>
+          <a:chOff x="0" y="0"/>
+          <a:chExt cx="0" cy="0"/>
+        </a:xfrm>
+      </p:grpSpPr>
       <p:sp>
         <p:nvSpPr>
           <p:cNvPr id="2" name="Rectangle 1"/>
@@ -5081,6 +4999,7 @@
           <a:lstStyle/>
           <a:p>
             <a:pPr algn="ctr"/>
+            <a:endParaRPr/>
           </a:p>
         </p:txBody>
       </p:sp>
@@ -5101,7 +5020,7 @@
           <a:noFill/>
         </p:spPr>
         <p:txBody>
-          <a:bodyPr wrap="none" lIns="0" rIns="0" tIns="0" bIns="0">
+          <a:bodyPr wrap="none" lIns="0" tIns="0" rIns="0" bIns="0">
             <a:spAutoFit/>
           </a:bodyPr>
           <a:lstStyle/>
@@ -5146,7 +5065,7 @@
           <a:noFill/>
         </p:spPr>
         <p:txBody>
-          <a:bodyPr wrap="none" lIns="0" rIns="0" tIns="0" bIns="0">
+          <a:bodyPr wrap="none" lIns="0" tIns="0" rIns="0" bIns="0">
             <a:spAutoFit/>
           </a:bodyPr>
           <a:lstStyle/>
@@ -5191,7 +5110,7 @@
           <a:noFill/>
         </p:spPr>
         <p:txBody>
-          <a:bodyPr wrap="none" lIns="0" rIns="0" tIns="0" bIns="0">
+          <a:bodyPr wrap="none" lIns="0" tIns="0" rIns="0" bIns="0">
             <a:spAutoFit/>
           </a:bodyPr>
           <a:lstStyle/>
@@ -5261,6 +5180,7 @@
           <a:lstStyle/>
           <a:p>
             <a:pPr algn="ctr"/>
+            <a:endParaRPr/>
           </a:p>
         </p:txBody>
       </p:sp>
@@ -5306,6 +5226,7 @@
           <a:lstStyle/>
           <a:p>
             <a:pPr algn="ctr"/>
+            <a:endParaRPr/>
           </a:p>
         </p:txBody>
       </p:sp>
@@ -5326,7 +5247,7 @@
           <a:noFill/>
         </p:spPr>
         <p:txBody>
-          <a:bodyPr wrap="none" lIns="0" rIns="0" tIns="0" bIns="0">
+          <a:bodyPr wrap="none" lIns="0" tIns="0" rIns="0" bIns="0">
             <a:spAutoFit/>
           </a:bodyPr>
           <a:lstStyle/>
@@ -5371,7 +5292,7 @@
           <a:noFill/>
         </p:spPr>
         <p:txBody>
-          <a:bodyPr wrap="none" lIns="0" rIns="0" tIns="0" bIns="0">
+          <a:bodyPr wrap="none" lIns="0" tIns="0" rIns="0" bIns="0">
             <a:spAutoFit/>
           </a:bodyPr>
           <a:lstStyle/>
@@ -5441,6 +5362,7 @@
           <a:lstStyle/>
           <a:p>
             <a:pPr algn="ctr"/>
+            <a:endParaRPr/>
           </a:p>
         </p:txBody>
       </p:sp>
@@ -5461,7 +5383,7 @@
           <a:noFill/>
         </p:spPr>
         <p:txBody>
-          <a:bodyPr wrap="none" lIns="0" rIns="0" tIns="0" bIns="0">
+          <a:bodyPr wrap="none" lIns="0" tIns="0" rIns="0" bIns="0">
             <a:spAutoFit/>
           </a:bodyPr>
           <a:lstStyle/>
@@ -5506,7 +5428,7 @@
           <a:noFill/>
         </p:spPr>
         <p:txBody>
-          <a:bodyPr wrap="none" lIns="0" rIns="0" tIns="0" bIns="0">
+          <a:bodyPr wrap="none" lIns="0" tIns="0" rIns="0" bIns="0">
             <a:spAutoFit/>
           </a:bodyPr>
           <a:lstStyle/>
@@ -5529,8 +5451,10 @@
               </a:defRPr>
             </a:pPr>
             <a:r>
+              <a:rPr dirty="0" err="1"/>
               <a:t>你已经会的：看代码、运行函数</a:t>
             </a:r>
+            <a:endParaRPr dirty="0"/>
           </a:p>
         </p:txBody>
       </p:sp>
@@ -5576,6 +5500,7 @@
           <a:lstStyle/>
           <a:p>
             <a:pPr algn="ctr"/>
+            <a:endParaRPr/>
           </a:p>
         </p:txBody>
       </p:sp>
@@ -5596,7 +5521,7 @@
           <a:noFill/>
         </p:spPr>
         <p:txBody>
-          <a:bodyPr wrap="none" lIns="0" rIns="0" tIns="0" bIns="0">
+          <a:bodyPr wrap="none" lIns="0" tIns="0" rIns="0" bIns="0">
             <a:spAutoFit/>
           </a:bodyPr>
           <a:lstStyle/>
@@ -5641,7 +5566,7 @@
           <a:noFill/>
         </p:spPr>
         <p:txBody>
-          <a:bodyPr wrap="none" lIns="0" rIns="0" tIns="0" bIns="0">
+          <a:bodyPr wrap="none" lIns="0" tIns="0" rIns="0" bIns="0">
             <a:spAutoFit/>
           </a:bodyPr>
           <a:lstStyle/>
@@ -5686,7 +5611,7 @@
           <a:noFill/>
         </p:spPr>
         <p:txBody>
-          <a:bodyPr wrap="none" lIns="0" rIns="0" tIns="0" bIns="0">
+          <a:bodyPr wrap="none" lIns="0" tIns="0" rIns="0" bIns="0">
             <a:spAutoFit/>
           </a:bodyPr>
           <a:lstStyle/>
@@ -5731,7 +5656,7 @@
           <a:noFill/>
         </p:spPr>
         <p:txBody>
-          <a:bodyPr wrap="none" lIns="0" rIns="0" tIns="0" bIns="0">
+          <a:bodyPr wrap="none" lIns="0" tIns="0" rIns="0" bIns="0">
             <a:spAutoFit/>
           </a:bodyPr>
           <a:lstStyle/>
@@ -5823,6 +5748,7 @@
           <a:lstStyle/>
           <a:p>
             <a:pPr algn="ctr"/>
+            <a:endParaRPr/>
           </a:p>
         </p:txBody>
       </p:sp>
@@ -5834,16 +5760,16 @@
         </p:nvSpPr>
         <p:spPr>
           <a:xfrm>
-            <a:off x="6885432" y="4352544"/>
-            <a:ext cx="1499616" cy="420624"/>
-          </a:xfrm>
-          <a:prstGeom prst="rect">
-            <a:avLst/>
-          </a:prstGeom>
-          <a:noFill/>
-        </p:spPr>
-        <p:txBody>
-          <a:bodyPr wrap="none" lIns="0" rIns="0" tIns="0" bIns="0">
+            <a:off x="7487767" y="4352544"/>
+            <a:ext cx="294953" cy="358688"/>
+          </a:xfrm>
+          <a:prstGeom prst="rect">
+            <a:avLst/>
+          </a:prstGeom>
+          <a:noFill/>
+        </p:spPr>
+        <p:txBody>
+          <a:bodyPr wrap="none" lIns="0" tIns="0" rIns="0" bIns="0">
             <a:spAutoFit/>
           </a:bodyPr>
           <a:lstStyle/>
@@ -5866,8 +5792,10 @@
               </a:defRPr>
             </a:pPr>
             <a:r>
-              <a:t>茶</a:t>
-            </a:r>
+              <a:rPr lang="en-US" dirty="0" err="1"/>
+              <a:t>酒</a:t>
+            </a:r>
+            <a:endParaRPr dirty="0"/>
           </a:p>
         </p:txBody>
       </p:sp>
@@ -5913,6 +5841,7 @@
           <a:lstStyle/>
           <a:p>
             <a:pPr algn="ctr"/>
+            <a:endParaRPr/>
           </a:p>
         </p:txBody>
       </p:sp>
@@ -5933,7 +5862,7 @@
           <a:noFill/>
         </p:spPr>
         <p:txBody>
-          <a:bodyPr wrap="none" lIns="0" rIns="0" tIns="0" bIns="0">
+          <a:bodyPr wrap="none" lIns="0" tIns="0" rIns="0" bIns="0">
             <a:spAutoFit/>
           </a:bodyPr>
           <a:lstStyle/>
@@ -6003,6 +5932,7 @@
           <a:lstStyle/>
           <a:p>
             <a:pPr algn="ctr"/>
+            <a:endParaRPr/>
           </a:p>
         </p:txBody>
       </p:sp>
@@ -6023,7 +5953,7 @@
           <a:noFill/>
         </p:spPr>
         <p:txBody>
-          <a:bodyPr wrap="none" lIns="0" rIns="0" tIns="0" bIns="0">
+          <a:bodyPr wrap="none" lIns="0" tIns="0" rIns="0" bIns="0">
             <a:spAutoFit/>
           </a:bodyPr>
           <a:lstStyle/>
@@ -6068,7 +5998,7 @@
           <a:noFill/>
         </p:spPr>
         <p:txBody>
-          <a:bodyPr wrap="none" lIns="0" rIns="0" tIns="0" bIns="0">
+          <a:bodyPr wrap="none" lIns="0" tIns="0" rIns="0" bIns="0">
             <a:spAutoFit/>
           </a:bodyPr>
           <a:lstStyle/>
@@ -6113,7 +6043,7 @@
           <a:noFill/>
         </p:spPr>
         <p:txBody>
-          <a:bodyPr wrap="none" lIns="0" rIns="0" tIns="0" bIns="0">
+          <a:bodyPr wrap="none" lIns="0" tIns="0" rIns="0" bIns="0">
             <a:spAutoFit/>
           </a:bodyPr>
           <a:lstStyle/>
@@ -6150,7 +6080,7 @@
 </file>
 
 <file path=ppt/slides/slide10.xml><?xml version="1.0" encoding="utf-8"?>
-<p:sld xmlns:a="http://schemas.openxmlformats.org/drawingml/2006/main" xmlns:p="http://schemas.openxmlformats.org/presentationml/2006/main" xmlns:r="http://schemas.openxmlformats.org/officeDocument/2006/relationships">
+<p:sld xmlns:a="http://schemas.openxmlformats.org/drawingml/2006/main" xmlns:r="http://schemas.openxmlformats.org/officeDocument/2006/relationships" xmlns:p="http://schemas.openxmlformats.org/presentationml/2006/main">
   <p:cSld>
     <p:bg>
       <p:bgPr>
@@ -6166,7 +6096,14 @@
         <p:cNvGrpSpPr/>
         <p:nvPr/>
       </p:nvGrpSpPr>
-      <p:grpSpPr/>
+      <p:grpSpPr>
+        <a:xfrm>
+          <a:off x="0" y="0"/>
+          <a:ext cx="0" cy="0"/>
+          <a:chOff x="0" y="0"/>
+          <a:chExt cx="0" cy="0"/>
+        </a:xfrm>
+      </p:grpSpPr>
       <p:sp>
         <p:nvSpPr>
           <p:cNvPr id="2" name="Rectangle 1"/>
@@ -6207,6 +6144,7 @@
           <a:lstStyle/>
           <a:p>
             <a:pPr algn="ctr"/>
+            <a:endParaRPr/>
           </a:p>
         </p:txBody>
       </p:sp>
@@ -6227,7 +6165,7 @@
           <a:noFill/>
         </p:spPr>
         <p:txBody>
-          <a:bodyPr wrap="none" lIns="0" rIns="0" tIns="0" bIns="0">
+          <a:bodyPr wrap="none" lIns="0" tIns="0" rIns="0" bIns="0">
             <a:spAutoFit/>
           </a:bodyPr>
           <a:lstStyle/>
@@ -6272,7 +6210,7 @@
           <a:noFill/>
         </p:spPr>
         <p:txBody>
-          <a:bodyPr wrap="none" lIns="0" rIns="0" tIns="0" bIns="0">
+          <a:bodyPr wrap="none" lIns="0" tIns="0" rIns="0" bIns="0">
             <a:spAutoFit/>
           </a:bodyPr>
           <a:lstStyle/>
@@ -6317,7 +6255,7 @@
           <a:noFill/>
         </p:spPr>
         <p:txBody>
-          <a:bodyPr wrap="none" lIns="0" rIns="0" tIns="0" bIns="0">
+          <a:bodyPr wrap="none" lIns="0" tIns="0" rIns="0" bIns="0">
             <a:spAutoFit/>
           </a:bodyPr>
           <a:lstStyle/>
@@ -6387,6 +6325,7 @@
           <a:lstStyle/>
           <a:p>
             <a:pPr algn="ctr"/>
+            <a:endParaRPr/>
           </a:p>
         </p:txBody>
       </p:sp>
@@ -6432,6 +6371,7 @@
           <a:lstStyle/>
           <a:p>
             <a:pPr algn="ctr"/>
+            <a:endParaRPr/>
           </a:p>
         </p:txBody>
       </p:sp>
@@ -6452,7 +6392,7 @@
           <a:noFill/>
         </p:spPr>
         <p:txBody>
-          <a:bodyPr wrap="none" lIns="0" rIns="0" tIns="0" bIns="0">
+          <a:bodyPr wrap="none" lIns="0" tIns="0" rIns="0" bIns="0">
             <a:spAutoFit/>
           </a:bodyPr>
           <a:lstStyle/>
@@ -6497,7 +6437,7 @@
           <a:noFill/>
         </p:spPr>
         <p:txBody>
-          <a:bodyPr wrap="none" lIns="0" rIns="0" tIns="0" bIns="0">
+          <a:bodyPr wrap="none" lIns="0" tIns="0" rIns="0" bIns="0">
             <a:spAutoFit/>
           </a:bodyPr>
           <a:lstStyle/>
@@ -6567,6 +6507,7 @@
           <a:lstStyle/>
           <a:p>
             <a:pPr algn="ctr"/>
+            <a:endParaRPr/>
           </a:p>
         </p:txBody>
       </p:sp>
@@ -6587,7 +6528,7 @@
           <a:noFill/>
         </p:spPr>
         <p:txBody>
-          <a:bodyPr wrap="none" lIns="0" rIns="0" tIns="0" bIns="0">
+          <a:bodyPr wrap="none" lIns="0" tIns="0" rIns="0" bIns="0">
             <a:spAutoFit/>
           </a:bodyPr>
           <a:lstStyle/>
@@ -6632,7 +6573,7 @@
           <a:noFill/>
         </p:spPr>
         <p:txBody>
-          <a:bodyPr wrap="none" lIns="0" rIns="0" tIns="0" bIns="0">
+          <a:bodyPr wrap="none" lIns="0" tIns="0" rIns="0" bIns="0">
             <a:spAutoFit/>
           </a:bodyPr>
           <a:lstStyle/>
@@ -6702,6 +6643,7 @@
           <a:lstStyle/>
           <a:p>
             <a:pPr algn="ctr"/>
+            <a:endParaRPr/>
           </a:p>
         </p:txBody>
       </p:sp>
@@ -6722,7 +6664,7 @@
           <a:noFill/>
         </p:spPr>
         <p:txBody>
-          <a:bodyPr wrap="none" lIns="0" rIns="0" tIns="0" bIns="0">
+          <a:bodyPr wrap="none" lIns="0" tIns="0" rIns="0" bIns="0">
             <a:spAutoFit/>
           </a:bodyPr>
           <a:lstStyle/>
@@ -6767,7 +6709,7 @@
           <a:noFill/>
         </p:spPr>
         <p:txBody>
-          <a:bodyPr wrap="none" lIns="0" rIns="0" tIns="0" bIns="0">
+          <a:bodyPr wrap="none" lIns="0" tIns="0" rIns="0" bIns="0">
             <a:spAutoFit/>
           </a:bodyPr>
           <a:lstStyle/>
@@ -6837,6 +6779,7 @@
           <a:lstStyle/>
           <a:p>
             <a:pPr algn="ctr"/>
+            <a:endParaRPr/>
           </a:p>
         </p:txBody>
       </p:sp>
@@ -6857,7 +6800,7 @@
           <a:noFill/>
         </p:spPr>
         <p:txBody>
-          <a:bodyPr wrap="none" lIns="0" rIns="0" tIns="0" bIns="0">
+          <a:bodyPr wrap="none" lIns="0" tIns="0" rIns="0" bIns="0">
             <a:spAutoFit/>
           </a:bodyPr>
           <a:lstStyle/>
@@ -6960,6 +6903,7 @@
           <a:lstStyle/>
           <a:p>
             <a:pPr algn="ctr"/>
+            <a:endParaRPr/>
           </a:p>
         </p:txBody>
       </p:sp>
@@ -7005,6 +6949,7 @@
           <a:lstStyle/>
           <a:p>
             <a:pPr algn="ctr"/>
+            <a:endParaRPr/>
           </a:p>
         </p:txBody>
       </p:sp>
@@ -7025,7 +6970,7 @@
           <a:noFill/>
         </p:spPr>
         <p:txBody>
-          <a:bodyPr wrap="none" lIns="0" rIns="0" tIns="0" bIns="0">
+          <a:bodyPr wrap="none" lIns="0" tIns="0" rIns="0" bIns="0">
             <a:spAutoFit/>
           </a:bodyPr>
           <a:lstStyle/>
@@ -7128,6 +7073,7 @@
           <a:lstStyle/>
           <a:p>
             <a:pPr algn="ctr"/>
+            <a:endParaRPr/>
           </a:p>
         </p:txBody>
       </p:sp>
@@ -7173,6 +7119,7 @@
           <a:lstStyle/>
           <a:p>
             <a:pPr algn="ctr"/>
+            <a:endParaRPr/>
           </a:p>
         </p:txBody>
       </p:sp>
@@ -7193,7 +7140,7 @@
           <a:noFill/>
         </p:spPr>
         <p:txBody>
-          <a:bodyPr wrap="none" lIns="0" rIns="0" tIns="0" bIns="0">
+          <a:bodyPr wrap="none" lIns="0" tIns="0" rIns="0" bIns="0">
             <a:spAutoFit/>
           </a:bodyPr>
           <a:lstStyle/>
@@ -7263,6 +7210,7 @@
           <a:lstStyle/>
           <a:p>
             <a:pPr algn="ctr"/>
+            <a:endParaRPr/>
           </a:p>
         </p:txBody>
       </p:sp>
@@ -7283,7 +7231,7 @@
           <a:noFill/>
         </p:spPr>
         <p:txBody>
-          <a:bodyPr wrap="none" lIns="0" rIns="0" tIns="0" bIns="0">
+          <a:bodyPr wrap="none" lIns="0" tIns="0" rIns="0" bIns="0">
             <a:spAutoFit/>
           </a:bodyPr>
           <a:lstStyle/>
@@ -7328,7 +7276,7 @@
           <a:noFill/>
         </p:spPr>
         <p:txBody>
-          <a:bodyPr wrap="none" lIns="0" rIns="0" tIns="0" bIns="0">
+          <a:bodyPr wrap="none" lIns="0" tIns="0" rIns="0" bIns="0">
             <a:spAutoFit/>
           </a:bodyPr>
           <a:lstStyle/>
@@ -7373,7 +7321,7 @@
           <a:noFill/>
         </p:spPr>
         <p:txBody>
-          <a:bodyPr wrap="none" lIns="0" rIns="0" tIns="0" bIns="0">
+          <a:bodyPr wrap="none" lIns="0" tIns="0" rIns="0" bIns="0">
             <a:spAutoFit/>
           </a:bodyPr>
           <a:lstStyle/>
@@ -7410,7 +7358,7 @@
 </file>
 
 <file path=ppt/slides/slide11.xml><?xml version="1.0" encoding="utf-8"?>
-<p:sld xmlns:a="http://schemas.openxmlformats.org/drawingml/2006/main" xmlns:p="http://schemas.openxmlformats.org/presentationml/2006/main" xmlns:r="http://schemas.openxmlformats.org/officeDocument/2006/relationships">
+<p:sld xmlns:a="http://schemas.openxmlformats.org/drawingml/2006/main" xmlns:r="http://schemas.openxmlformats.org/officeDocument/2006/relationships" xmlns:p="http://schemas.openxmlformats.org/presentationml/2006/main">
   <p:cSld>
     <p:bg>
       <p:bgPr>
@@ -7426,7 +7374,14 @@
         <p:cNvGrpSpPr/>
         <p:nvPr/>
       </p:nvGrpSpPr>
-      <p:grpSpPr/>
+      <p:grpSpPr>
+        <a:xfrm>
+          <a:off x="0" y="0"/>
+          <a:ext cx="0" cy="0"/>
+          <a:chOff x="0" y="0"/>
+          <a:chExt cx="0" cy="0"/>
+        </a:xfrm>
+      </p:grpSpPr>
       <p:sp>
         <p:nvSpPr>
           <p:cNvPr id="2" name="Rectangle 1"/>
@@ -7467,6 +7422,7 @@
           <a:lstStyle/>
           <a:p>
             <a:pPr algn="ctr"/>
+            <a:endParaRPr/>
           </a:p>
         </p:txBody>
       </p:sp>
@@ -7487,7 +7443,7 @@
           <a:noFill/>
         </p:spPr>
         <p:txBody>
-          <a:bodyPr wrap="none" lIns="0" rIns="0" tIns="0" bIns="0">
+          <a:bodyPr wrap="none" lIns="0" tIns="0" rIns="0" bIns="0">
             <a:spAutoFit/>
           </a:bodyPr>
           <a:lstStyle/>
@@ -7532,7 +7488,7 @@
           <a:noFill/>
         </p:spPr>
         <p:txBody>
-          <a:bodyPr wrap="none" lIns="0" rIns="0" tIns="0" bIns="0">
+          <a:bodyPr wrap="none" lIns="0" tIns="0" rIns="0" bIns="0">
             <a:spAutoFit/>
           </a:bodyPr>
           <a:lstStyle/>
@@ -7577,7 +7533,7 @@
           <a:noFill/>
         </p:spPr>
         <p:txBody>
-          <a:bodyPr wrap="none" lIns="0" rIns="0" tIns="0" bIns="0">
+          <a:bodyPr wrap="none" lIns="0" tIns="0" rIns="0" bIns="0">
             <a:spAutoFit/>
           </a:bodyPr>
           <a:lstStyle/>
@@ -7647,6 +7603,7 @@
           <a:lstStyle/>
           <a:p>
             <a:pPr algn="ctr"/>
+            <a:endParaRPr/>
           </a:p>
         </p:txBody>
       </p:sp>
@@ -7692,6 +7649,7 @@
           <a:lstStyle/>
           <a:p>
             <a:pPr algn="ctr"/>
+            <a:endParaRPr/>
           </a:p>
         </p:txBody>
       </p:sp>
@@ -7712,7 +7670,7 @@
           <a:noFill/>
         </p:spPr>
         <p:txBody>
-          <a:bodyPr wrap="none" lIns="0" rIns="0" tIns="0" bIns="0">
+          <a:bodyPr wrap="none" lIns="0" tIns="0" rIns="0" bIns="0">
             <a:spAutoFit/>
           </a:bodyPr>
           <a:lstStyle/>
@@ -7757,7 +7715,7 @@
           <a:noFill/>
         </p:spPr>
         <p:txBody>
-          <a:bodyPr wrap="none" lIns="0" rIns="0" tIns="0" bIns="0">
+          <a:bodyPr wrap="none" lIns="0" tIns="0" rIns="0" bIns="0">
             <a:spAutoFit/>
           </a:bodyPr>
           <a:lstStyle/>
@@ -7827,6 +7785,7 @@
           <a:lstStyle/>
           <a:p>
             <a:pPr algn="ctr"/>
+            <a:endParaRPr/>
           </a:p>
         </p:txBody>
       </p:sp>
@@ -7847,7 +7806,7 @@
           <a:noFill/>
         </p:spPr>
         <p:txBody>
-          <a:bodyPr wrap="none" lIns="0" rIns="0" tIns="0" bIns="0">
+          <a:bodyPr wrap="none" lIns="0" tIns="0" rIns="0" bIns="0">
             <a:spAutoFit/>
           </a:bodyPr>
           <a:lstStyle/>
@@ -7892,7 +7851,7 @@
           <a:noFill/>
         </p:spPr>
         <p:txBody>
-          <a:bodyPr wrap="none" lIns="0" rIns="0" tIns="0" bIns="0">
+          <a:bodyPr wrap="none" lIns="0" tIns="0" rIns="0" bIns="0">
             <a:spAutoFit/>
           </a:bodyPr>
           <a:lstStyle/>
@@ -7962,6 +7921,7 @@
           <a:lstStyle/>
           <a:p>
             <a:pPr algn="ctr"/>
+            <a:endParaRPr/>
           </a:p>
         </p:txBody>
       </p:sp>
@@ -7982,7 +7942,7 @@
           <a:noFill/>
         </p:spPr>
         <p:txBody>
-          <a:bodyPr wrap="none" lIns="0" rIns="0" tIns="0" bIns="0">
+          <a:bodyPr wrap="none" lIns="0" tIns="0" rIns="0" bIns="0">
             <a:spAutoFit/>
           </a:bodyPr>
           <a:lstStyle/>
@@ -8027,7 +7987,7 @@
           <a:noFill/>
         </p:spPr>
         <p:txBody>
-          <a:bodyPr wrap="none" lIns="0" rIns="0" tIns="0" bIns="0">
+          <a:bodyPr wrap="none" lIns="0" tIns="0" rIns="0" bIns="0">
             <a:spAutoFit/>
           </a:bodyPr>
           <a:lstStyle/>
@@ -8072,7 +8032,7 @@
           <a:noFill/>
         </p:spPr>
         <p:txBody>
-          <a:bodyPr wrap="none" lIns="0" rIns="0" tIns="0" bIns="0">
+          <a:bodyPr wrap="none" lIns="0" tIns="0" rIns="0" bIns="0">
             <a:spAutoFit/>
           </a:bodyPr>
           <a:lstStyle/>
@@ -8117,7 +8077,7 @@
           <a:noFill/>
         </p:spPr>
         <p:txBody>
-          <a:bodyPr wrap="none" lIns="0" rIns="0" tIns="0" bIns="0">
+          <a:bodyPr wrap="none" lIns="0" tIns="0" rIns="0" bIns="0">
             <a:spAutoFit/>
           </a:bodyPr>
           <a:lstStyle/>
@@ -8187,6 +8147,7 @@
           <a:lstStyle/>
           <a:p>
             <a:pPr algn="ctr"/>
+            <a:endParaRPr/>
           </a:p>
         </p:txBody>
       </p:sp>
@@ -8207,7 +8168,7 @@
           <a:noFill/>
         </p:spPr>
         <p:txBody>
-          <a:bodyPr wrap="none" lIns="0" rIns="0" tIns="0" bIns="0">
+          <a:bodyPr wrap="none" lIns="0" tIns="0" rIns="0" bIns="0">
             <a:spAutoFit/>
           </a:bodyPr>
           <a:lstStyle/>
@@ -8277,6 +8238,7 @@
           <a:lstStyle/>
           <a:p>
             <a:pPr algn="ctr"/>
+            <a:endParaRPr/>
           </a:p>
         </p:txBody>
       </p:sp>
@@ -8297,7 +8259,7 @@
           <a:noFill/>
         </p:spPr>
         <p:txBody>
-          <a:bodyPr wrap="none" lIns="0" rIns="0" tIns="0" bIns="0">
+          <a:bodyPr wrap="none" lIns="0" tIns="0" rIns="0" bIns="0">
             <a:spAutoFit/>
           </a:bodyPr>
           <a:lstStyle/>
@@ -8367,6 +8329,7 @@
           <a:lstStyle/>
           <a:p>
             <a:pPr algn="ctr"/>
+            <a:endParaRPr/>
           </a:p>
         </p:txBody>
       </p:sp>
@@ -8387,7 +8350,7 @@
           <a:noFill/>
         </p:spPr>
         <p:txBody>
-          <a:bodyPr wrap="none" lIns="0" rIns="0" tIns="0" bIns="0">
+          <a:bodyPr wrap="none" lIns="0" tIns="0" rIns="0" bIns="0">
             <a:spAutoFit/>
           </a:bodyPr>
           <a:lstStyle/>
@@ -8432,7 +8395,7 @@
           <a:noFill/>
         </p:spPr>
         <p:txBody>
-          <a:bodyPr wrap="none" lIns="0" rIns="0" tIns="0" bIns="0">
+          <a:bodyPr wrap="none" lIns="0" tIns="0" rIns="0" bIns="0">
             <a:spAutoFit/>
           </a:bodyPr>
           <a:lstStyle/>
@@ -8502,6 +8465,7 @@
           <a:lstStyle/>
           <a:p>
             <a:pPr algn="ctr"/>
+            <a:endParaRPr/>
           </a:p>
         </p:txBody>
       </p:sp>
@@ -8522,7 +8486,7 @@
           <a:noFill/>
         </p:spPr>
         <p:txBody>
-          <a:bodyPr wrap="none" lIns="0" rIns="0" tIns="0" bIns="0">
+          <a:bodyPr wrap="none" lIns="0" tIns="0" rIns="0" bIns="0">
             <a:spAutoFit/>
           </a:bodyPr>
           <a:lstStyle/>
@@ -8592,6 +8556,7 @@
           <a:lstStyle/>
           <a:p>
             <a:pPr algn="ctr"/>
+            <a:endParaRPr/>
           </a:p>
         </p:txBody>
       </p:sp>
@@ -8612,7 +8577,7 @@
           <a:noFill/>
         </p:spPr>
         <p:txBody>
-          <a:bodyPr wrap="none" lIns="0" rIns="0" tIns="0" bIns="0">
+          <a:bodyPr wrap="none" lIns="0" tIns="0" rIns="0" bIns="0">
             <a:spAutoFit/>
           </a:bodyPr>
           <a:lstStyle/>
@@ -8682,6 +8647,7 @@
           <a:lstStyle/>
           <a:p>
             <a:pPr algn="ctr"/>
+            <a:endParaRPr/>
           </a:p>
         </p:txBody>
       </p:sp>
@@ -8702,7 +8668,7 @@
           <a:noFill/>
         </p:spPr>
         <p:txBody>
-          <a:bodyPr wrap="none" lIns="0" rIns="0" tIns="0" bIns="0">
+          <a:bodyPr wrap="none" lIns="0" tIns="0" rIns="0" bIns="0">
             <a:spAutoFit/>
           </a:bodyPr>
           <a:lstStyle/>
@@ -8747,7 +8713,7 @@
           <a:noFill/>
         </p:spPr>
         <p:txBody>
-          <a:bodyPr wrap="none" lIns="0" rIns="0" tIns="0" bIns="0">
+          <a:bodyPr wrap="none" lIns="0" tIns="0" rIns="0" bIns="0">
             <a:spAutoFit/>
           </a:bodyPr>
           <a:lstStyle/>
@@ -8817,6 +8783,7 @@
           <a:lstStyle/>
           <a:p>
             <a:pPr algn="ctr"/>
+            <a:endParaRPr/>
           </a:p>
         </p:txBody>
       </p:sp>
@@ -8837,7 +8804,7 @@
           <a:noFill/>
         </p:spPr>
         <p:txBody>
-          <a:bodyPr wrap="none" lIns="0" rIns="0" tIns="0" bIns="0">
+          <a:bodyPr wrap="none" lIns="0" tIns="0" rIns="0" bIns="0">
             <a:spAutoFit/>
           </a:bodyPr>
           <a:lstStyle/>
@@ -8907,6 +8874,7 @@
           <a:lstStyle/>
           <a:p>
             <a:pPr algn="ctr"/>
+            <a:endParaRPr/>
           </a:p>
         </p:txBody>
       </p:sp>
@@ -8927,7 +8895,7 @@
           <a:noFill/>
         </p:spPr>
         <p:txBody>
-          <a:bodyPr wrap="none" lIns="0" rIns="0" tIns="0" bIns="0">
+          <a:bodyPr wrap="none" lIns="0" tIns="0" rIns="0" bIns="0">
             <a:spAutoFit/>
           </a:bodyPr>
           <a:lstStyle/>
@@ -8997,6 +8965,7 @@
           <a:lstStyle/>
           <a:p>
             <a:pPr algn="ctr"/>
+            <a:endParaRPr/>
           </a:p>
         </p:txBody>
       </p:sp>
@@ -9017,7 +8986,7 @@
           <a:noFill/>
         </p:spPr>
         <p:txBody>
-          <a:bodyPr wrap="none" lIns="0" rIns="0" tIns="0" bIns="0">
+          <a:bodyPr wrap="none" lIns="0" tIns="0" rIns="0" bIns="0">
             <a:spAutoFit/>
           </a:bodyPr>
           <a:lstStyle/>
@@ -9062,7 +9031,7 @@
           <a:noFill/>
         </p:spPr>
         <p:txBody>
-          <a:bodyPr wrap="none" lIns="0" rIns="0" tIns="0" bIns="0">
+          <a:bodyPr wrap="none" lIns="0" tIns="0" rIns="0" bIns="0">
             <a:spAutoFit/>
           </a:bodyPr>
           <a:lstStyle/>
@@ -9154,6 +9123,7 @@
           <a:lstStyle/>
           <a:p>
             <a:pPr algn="ctr"/>
+            <a:endParaRPr/>
           </a:p>
         </p:txBody>
       </p:sp>
@@ -9174,7 +9144,7 @@
           <a:noFill/>
         </p:spPr>
         <p:txBody>
-          <a:bodyPr wrap="none" lIns="0" rIns="0" tIns="0" bIns="0">
+          <a:bodyPr wrap="none" lIns="0" tIns="0" rIns="0" bIns="0">
             <a:spAutoFit/>
           </a:bodyPr>
           <a:lstStyle/>
@@ -9219,7 +9189,7 @@
           <a:noFill/>
         </p:spPr>
         <p:txBody>
-          <a:bodyPr wrap="none" lIns="0" rIns="0" tIns="0" bIns="0">
+          <a:bodyPr wrap="none" lIns="0" tIns="0" rIns="0" bIns="0">
             <a:spAutoFit/>
           </a:bodyPr>
           <a:lstStyle/>
@@ -9264,7 +9234,7 @@
           <a:noFill/>
         </p:spPr>
         <p:txBody>
-          <a:bodyPr wrap="none" lIns="0" rIns="0" tIns="0" bIns="0">
+          <a:bodyPr wrap="none" lIns="0" tIns="0" rIns="0" bIns="0">
             <a:spAutoFit/>
           </a:bodyPr>
           <a:lstStyle/>
@@ -9301,7 +9271,7 @@
 </file>
 
 <file path=ppt/slides/slide12.xml><?xml version="1.0" encoding="utf-8"?>
-<p:sld xmlns:a="http://schemas.openxmlformats.org/drawingml/2006/main" xmlns:p="http://schemas.openxmlformats.org/presentationml/2006/main" xmlns:r="http://schemas.openxmlformats.org/officeDocument/2006/relationships">
+<p:sld xmlns:a="http://schemas.openxmlformats.org/drawingml/2006/main" xmlns:r="http://schemas.openxmlformats.org/officeDocument/2006/relationships" xmlns:p="http://schemas.openxmlformats.org/presentationml/2006/main">
   <p:cSld>
     <p:bg>
       <p:bgPr>
@@ -9317,7 +9287,14 @@
         <p:cNvGrpSpPr/>
         <p:nvPr/>
       </p:nvGrpSpPr>
-      <p:grpSpPr/>
+      <p:grpSpPr>
+        <a:xfrm>
+          <a:off x="0" y="0"/>
+          <a:ext cx="0" cy="0"/>
+          <a:chOff x="0" y="0"/>
+          <a:chExt cx="0" cy="0"/>
+        </a:xfrm>
+      </p:grpSpPr>
       <p:sp>
         <p:nvSpPr>
           <p:cNvPr id="2" name="Rectangle 1"/>
@@ -9358,6 +9335,7 @@
           <a:lstStyle/>
           <a:p>
             <a:pPr algn="ctr"/>
+            <a:endParaRPr/>
           </a:p>
         </p:txBody>
       </p:sp>
@@ -9378,7 +9356,7 @@
           <a:noFill/>
         </p:spPr>
         <p:txBody>
-          <a:bodyPr wrap="none" lIns="0" rIns="0" tIns="0" bIns="0">
+          <a:bodyPr wrap="none" lIns="0" tIns="0" rIns="0" bIns="0">
             <a:spAutoFit/>
           </a:bodyPr>
           <a:lstStyle/>
@@ -9423,7 +9401,7 @@
           <a:noFill/>
         </p:spPr>
         <p:txBody>
-          <a:bodyPr wrap="none" lIns="0" rIns="0" tIns="0" bIns="0">
+          <a:bodyPr wrap="none" lIns="0" tIns="0" rIns="0" bIns="0">
             <a:spAutoFit/>
           </a:bodyPr>
           <a:lstStyle/>
@@ -9468,7 +9446,7 @@
           <a:noFill/>
         </p:spPr>
         <p:txBody>
-          <a:bodyPr wrap="none" lIns="0" rIns="0" tIns="0" bIns="0">
+          <a:bodyPr wrap="none" lIns="0" tIns="0" rIns="0" bIns="0">
             <a:spAutoFit/>
           </a:bodyPr>
           <a:lstStyle/>
@@ -9538,6 +9516,7 @@
           <a:lstStyle/>
           <a:p>
             <a:pPr algn="ctr"/>
+            <a:endParaRPr/>
           </a:p>
         </p:txBody>
       </p:sp>
@@ -9583,6 +9562,7 @@
           <a:lstStyle/>
           <a:p>
             <a:pPr algn="ctr"/>
+            <a:endParaRPr/>
           </a:p>
         </p:txBody>
       </p:sp>
@@ -9603,7 +9583,7 @@
           <a:noFill/>
         </p:spPr>
         <p:txBody>
-          <a:bodyPr wrap="none" lIns="0" rIns="0" tIns="0" bIns="0">
+          <a:bodyPr wrap="none" lIns="0" tIns="0" rIns="0" bIns="0">
             <a:spAutoFit/>
           </a:bodyPr>
           <a:lstStyle/>
@@ -9648,7 +9628,7 @@
           <a:noFill/>
         </p:spPr>
         <p:txBody>
-          <a:bodyPr wrap="none" lIns="0" rIns="0" tIns="0" bIns="0">
+          <a:bodyPr wrap="none" lIns="0" tIns="0" rIns="0" bIns="0">
             <a:spAutoFit/>
           </a:bodyPr>
           <a:lstStyle/>
@@ -9740,6 +9720,7 @@
           <a:lstStyle/>
           <a:p>
             <a:pPr algn="ctr"/>
+            <a:endParaRPr/>
           </a:p>
         </p:txBody>
       </p:sp>
@@ -9760,7 +9741,7 @@
           <a:noFill/>
         </p:spPr>
         <p:txBody>
-          <a:bodyPr wrap="none" lIns="0" rIns="0" tIns="0" bIns="0">
+          <a:bodyPr wrap="none" lIns="0" tIns="0" rIns="0" bIns="0">
             <a:spAutoFit/>
           </a:bodyPr>
           <a:lstStyle/>
@@ -9805,7 +9786,7 @@
           <a:noFill/>
         </p:spPr>
         <p:txBody>
-          <a:bodyPr wrap="none" lIns="0" rIns="0" tIns="0" bIns="0">
+          <a:bodyPr wrap="none" lIns="0" tIns="0" rIns="0" bIns="0">
             <a:spAutoFit/>
           </a:bodyPr>
           <a:lstStyle/>
@@ -9875,6 +9856,7 @@
           <a:lstStyle/>
           <a:p>
             <a:pPr algn="ctr"/>
+            <a:endParaRPr/>
           </a:p>
         </p:txBody>
       </p:sp>
@@ -9895,7 +9877,7 @@
           <a:noFill/>
         </p:spPr>
         <p:txBody>
-          <a:bodyPr wrap="none" lIns="0" rIns="0" tIns="0" bIns="0">
+          <a:bodyPr wrap="none" lIns="0" tIns="0" rIns="0" bIns="0">
             <a:spAutoFit/>
           </a:bodyPr>
           <a:lstStyle/>
@@ -9940,7 +9922,7 @@
           <a:noFill/>
         </p:spPr>
         <p:txBody>
-          <a:bodyPr wrap="none" lIns="0" rIns="0" tIns="0" bIns="0">
+          <a:bodyPr wrap="none" lIns="0" tIns="0" rIns="0" bIns="0">
             <a:spAutoFit/>
           </a:bodyPr>
           <a:lstStyle/>
@@ -10010,6 +9992,7 @@
           <a:lstStyle/>
           <a:p>
             <a:pPr algn="ctr"/>
+            <a:endParaRPr/>
           </a:p>
         </p:txBody>
       </p:sp>
@@ -10030,7 +10013,7 @@
           <a:noFill/>
         </p:spPr>
         <p:txBody>
-          <a:bodyPr wrap="none" lIns="0" rIns="0" tIns="0" bIns="0">
+          <a:bodyPr wrap="none" lIns="0" tIns="0" rIns="0" bIns="0">
             <a:spAutoFit/>
           </a:bodyPr>
           <a:lstStyle/>
@@ -10074,6 +10057,7 @@
                 <a:latin typeface="Microsoft YaHei"/>
               </a:defRPr>
             </a:pPr>
+            <a:endParaRPr/>
           </a:p>
           <a:p>
             <a:pPr>
@@ -10116,7 +10100,7 @@
           <a:noFill/>
         </p:spPr>
         <p:txBody>
-          <a:bodyPr wrap="none" lIns="0" rIns="0" tIns="0" bIns="0">
+          <a:bodyPr wrap="none" lIns="0" tIns="0" rIns="0" bIns="0">
             <a:spAutoFit/>
           </a:bodyPr>
           <a:lstStyle/>
@@ -10186,6 +10170,7 @@
           <a:lstStyle/>
           <a:p>
             <a:pPr algn="ctr"/>
+            <a:endParaRPr/>
           </a:p>
         </p:txBody>
       </p:sp>
@@ -10206,7 +10191,7 @@
           <a:noFill/>
         </p:spPr>
         <p:txBody>
-          <a:bodyPr wrap="none" lIns="0" rIns="0" tIns="0" bIns="0">
+          <a:bodyPr wrap="none" lIns="0" tIns="0" rIns="0" bIns="0">
             <a:spAutoFit/>
           </a:bodyPr>
           <a:lstStyle/>
@@ -10309,6 +10294,7 @@
           <a:lstStyle/>
           <a:p>
             <a:pPr algn="ctr"/>
+            <a:endParaRPr/>
           </a:p>
         </p:txBody>
       </p:sp>
@@ -10354,6 +10340,7 @@
           <a:lstStyle/>
           <a:p>
             <a:pPr algn="ctr"/>
+            <a:endParaRPr/>
           </a:p>
         </p:txBody>
       </p:sp>
@@ -10374,7 +10361,7 @@
           <a:noFill/>
         </p:spPr>
         <p:txBody>
-          <a:bodyPr wrap="none" lIns="0" rIns="0" tIns="0" bIns="0">
+          <a:bodyPr wrap="none" lIns="0" tIns="0" rIns="0" bIns="0">
             <a:spAutoFit/>
           </a:bodyPr>
           <a:lstStyle/>
@@ -10477,6 +10464,7 @@
           <a:lstStyle/>
           <a:p>
             <a:pPr algn="ctr"/>
+            <a:endParaRPr/>
           </a:p>
         </p:txBody>
       </p:sp>
@@ -10522,6 +10510,7 @@
           <a:lstStyle/>
           <a:p>
             <a:pPr algn="ctr"/>
+            <a:endParaRPr/>
           </a:p>
         </p:txBody>
       </p:sp>
@@ -10542,7 +10531,7 @@
           <a:noFill/>
         </p:spPr>
         <p:txBody>
-          <a:bodyPr wrap="none" lIns="0" rIns="0" tIns="0" bIns="0">
+          <a:bodyPr wrap="none" lIns="0" tIns="0" rIns="0" bIns="0">
             <a:spAutoFit/>
           </a:bodyPr>
           <a:lstStyle/>
@@ -10612,6 +10601,7 @@
           <a:lstStyle/>
           <a:p>
             <a:pPr algn="ctr"/>
+            <a:endParaRPr/>
           </a:p>
         </p:txBody>
       </p:sp>
@@ -10632,7 +10622,7 @@
           <a:noFill/>
         </p:spPr>
         <p:txBody>
-          <a:bodyPr wrap="none" lIns="0" rIns="0" tIns="0" bIns="0">
+          <a:bodyPr wrap="none" lIns="0" tIns="0" rIns="0" bIns="0">
             <a:spAutoFit/>
           </a:bodyPr>
           <a:lstStyle/>
@@ -10677,7 +10667,7 @@
           <a:noFill/>
         </p:spPr>
         <p:txBody>
-          <a:bodyPr wrap="none" lIns="0" rIns="0" tIns="0" bIns="0">
+          <a:bodyPr wrap="none" lIns="0" tIns="0" rIns="0" bIns="0">
             <a:spAutoFit/>
           </a:bodyPr>
           <a:lstStyle/>
@@ -10722,7 +10712,7 @@
           <a:noFill/>
         </p:spPr>
         <p:txBody>
-          <a:bodyPr wrap="none" lIns="0" rIns="0" tIns="0" bIns="0">
+          <a:bodyPr wrap="none" lIns="0" tIns="0" rIns="0" bIns="0">
             <a:spAutoFit/>
           </a:bodyPr>
           <a:lstStyle/>
@@ -10759,7 +10749,7 @@
 </file>
 
 <file path=ppt/slides/slide13.xml><?xml version="1.0" encoding="utf-8"?>
-<p:sld xmlns:a="http://schemas.openxmlformats.org/drawingml/2006/main" xmlns:p="http://schemas.openxmlformats.org/presentationml/2006/main" xmlns:r="http://schemas.openxmlformats.org/officeDocument/2006/relationships">
+<p:sld xmlns:a="http://schemas.openxmlformats.org/drawingml/2006/main" xmlns:r="http://schemas.openxmlformats.org/officeDocument/2006/relationships" xmlns:p="http://schemas.openxmlformats.org/presentationml/2006/main">
   <p:cSld>
     <p:bg>
       <p:bgPr>
@@ -10775,7 +10765,14 @@
         <p:cNvGrpSpPr/>
         <p:nvPr/>
       </p:nvGrpSpPr>
-      <p:grpSpPr/>
+      <p:grpSpPr>
+        <a:xfrm>
+          <a:off x="0" y="0"/>
+          <a:ext cx="0" cy="0"/>
+          <a:chOff x="0" y="0"/>
+          <a:chExt cx="0" cy="0"/>
+        </a:xfrm>
+      </p:grpSpPr>
       <p:sp>
         <p:nvSpPr>
           <p:cNvPr id="2" name="Rectangle 1"/>
@@ -10816,6 +10813,7 @@
           <a:lstStyle/>
           <a:p>
             <a:pPr algn="ctr"/>
+            <a:endParaRPr/>
           </a:p>
         </p:txBody>
       </p:sp>
@@ -10836,7 +10834,7 @@
           <a:noFill/>
         </p:spPr>
         <p:txBody>
-          <a:bodyPr wrap="none" lIns="0" rIns="0" tIns="0" bIns="0">
+          <a:bodyPr wrap="none" lIns="0" tIns="0" rIns="0" bIns="0">
             <a:spAutoFit/>
           </a:bodyPr>
           <a:lstStyle/>
@@ -10881,7 +10879,7 @@
           <a:noFill/>
         </p:spPr>
         <p:txBody>
-          <a:bodyPr wrap="none" lIns="0" rIns="0" tIns="0" bIns="0">
+          <a:bodyPr wrap="none" lIns="0" tIns="0" rIns="0" bIns="0">
             <a:spAutoFit/>
           </a:bodyPr>
           <a:lstStyle/>
@@ -10926,7 +10924,7 @@
           <a:noFill/>
         </p:spPr>
         <p:txBody>
-          <a:bodyPr wrap="none" lIns="0" rIns="0" tIns="0" bIns="0">
+          <a:bodyPr wrap="none" lIns="0" tIns="0" rIns="0" bIns="0">
             <a:spAutoFit/>
           </a:bodyPr>
           <a:lstStyle/>
@@ -10996,6 +10994,7 @@
           <a:lstStyle/>
           <a:p>
             <a:pPr algn="ctr"/>
+            <a:endParaRPr/>
           </a:p>
         </p:txBody>
       </p:sp>
@@ -11041,6 +11040,7 @@
           <a:lstStyle/>
           <a:p>
             <a:pPr algn="ctr"/>
+            <a:endParaRPr/>
           </a:p>
         </p:txBody>
       </p:sp>
@@ -11061,7 +11061,7 @@
           <a:noFill/>
         </p:spPr>
         <p:txBody>
-          <a:bodyPr wrap="none" lIns="0" rIns="0" tIns="0" bIns="0">
+          <a:bodyPr wrap="none" lIns="0" tIns="0" rIns="0" bIns="0">
             <a:spAutoFit/>
           </a:bodyPr>
           <a:lstStyle/>
@@ -11106,7 +11106,7 @@
           <a:noFill/>
         </p:spPr>
         <p:txBody>
-          <a:bodyPr wrap="none" lIns="0" rIns="0" tIns="0" bIns="0">
+          <a:bodyPr wrap="none" lIns="0" tIns="0" rIns="0" bIns="0">
             <a:spAutoFit/>
           </a:bodyPr>
           <a:lstStyle/>
@@ -11176,6 +11176,7 @@
           <a:lstStyle/>
           <a:p>
             <a:pPr algn="ctr"/>
+            <a:endParaRPr/>
           </a:p>
         </p:txBody>
       </p:sp>
@@ -11196,7 +11197,7 @@
           <a:noFill/>
         </p:spPr>
         <p:txBody>
-          <a:bodyPr wrap="none" lIns="0" rIns="0" tIns="0" bIns="0">
+          <a:bodyPr wrap="none" lIns="0" tIns="0" rIns="0" bIns="0">
             <a:spAutoFit/>
           </a:bodyPr>
           <a:lstStyle/>
@@ -11241,7 +11242,7 @@
           <a:noFill/>
         </p:spPr>
         <p:txBody>
-          <a:bodyPr wrap="none" lIns="0" rIns="0" tIns="0" bIns="0">
+          <a:bodyPr wrap="none" lIns="0" tIns="0" rIns="0" bIns="0">
             <a:spAutoFit/>
           </a:bodyPr>
           <a:lstStyle/>
@@ -11311,6 +11312,7 @@
           <a:lstStyle/>
           <a:p>
             <a:pPr algn="ctr"/>
+            <a:endParaRPr/>
           </a:p>
         </p:txBody>
       </p:sp>
@@ -11331,7 +11333,7 @@
           <a:noFill/>
         </p:spPr>
         <p:txBody>
-          <a:bodyPr wrap="none" lIns="0" rIns="0" tIns="0" bIns="0">
+          <a:bodyPr wrap="none" lIns="0" tIns="0" rIns="0" bIns="0">
             <a:spAutoFit/>
           </a:bodyPr>
           <a:lstStyle/>
@@ -11376,7 +11378,7 @@
           <a:noFill/>
         </p:spPr>
         <p:txBody>
-          <a:bodyPr wrap="none" lIns="0" rIns="0" tIns="0" bIns="0">
+          <a:bodyPr wrap="none" lIns="0" tIns="0" rIns="0" bIns="0">
             <a:spAutoFit/>
           </a:bodyPr>
           <a:lstStyle/>
@@ -11421,7 +11423,7 @@
           <a:noFill/>
         </p:spPr>
         <p:txBody>
-          <a:bodyPr wrap="none" lIns="0" rIns="0" tIns="0" bIns="0">
+          <a:bodyPr wrap="none" lIns="0" tIns="0" rIns="0" bIns="0">
             <a:spAutoFit/>
           </a:bodyPr>
           <a:lstStyle/>
@@ -11466,7 +11468,7 @@
           <a:noFill/>
         </p:spPr>
         <p:txBody>
-          <a:bodyPr wrap="none" lIns="0" rIns="0" tIns="0" bIns="0">
+          <a:bodyPr wrap="none" lIns="0" tIns="0" rIns="0" bIns="0">
             <a:spAutoFit/>
           </a:bodyPr>
           <a:lstStyle/>
@@ -11536,6 +11538,7 @@
           <a:lstStyle/>
           <a:p>
             <a:pPr algn="ctr"/>
+            <a:endParaRPr/>
           </a:p>
         </p:txBody>
       </p:sp>
@@ -11556,7 +11559,7 @@
           <a:noFill/>
         </p:spPr>
         <p:txBody>
-          <a:bodyPr wrap="none" lIns="0" rIns="0" tIns="0" bIns="0">
+          <a:bodyPr wrap="none" lIns="0" tIns="0" rIns="0" bIns="0">
             <a:spAutoFit/>
           </a:bodyPr>
           <a:lstStyle/>
@@ -11626,6 +11629,7 @@
           <a:lstStyle/>
           <a:p>
             <a:pPr algn="ctr"/>
+            <a:endParaRPr/>
           </a:p>
         </p:txBody>
       </p:sp>
@@ -11646,7 +11650,7 @@
           <a:noFill/>
         </p:spPr>
         <p:txBody>
-          <a:bodyPr wrap="none" lIns="0" rIns="0" tIns="0" bIns="0">
+          <a:bodyPr wrap="none" lIns="0" tIns="0" rIns="0" bIns="0">
             <a:spAutoFit/>
           </a:bodyPr>
           <a:lstStyle/>
@@ -11716,6 +11720,7 @@
           <a:lstStyle/>
           <a:p>
             <a:pPr algn="ctr"/>
+            <a:endParaRPr/>
           </a:p>
         </p:txBody>
       </p:sp>
@@ -11736,7 +11741,7 @@
           <a:noFill/>
         </p:spPr>
         <p:txBody>
-          <a:bodyPr wrap="none" lIns="0" rIns="0" tIns="0" bIns="0">
+          <a:bodyPr wrap="none" lIns="0" tIns="0" rIns="0" bIns="0">
             <a:spAutoFit/>
           </a:bodyPr>
           <a:lstStyle/>
@@ -11781,7 +11786,7 @@
           <a:noFill/>
         </p:spPr>
         <p:txBody>
-          <a:bodyPr wrap="none" lIns="0" rIns="0" tIns="0" bIns="0">
+          <a:bodyPr wrap="none" lIns="0" tIns="0" rIns="0" bIns="0">
             <a:spAutoFit/>
           </a:bodyPr>
           <a:lstStyle/>
@@ -11851,6 +11856,7 @@
           <a:lstStyle/>
           <a:p>
             <a:pPr algn="ctr"/>
+            <a:endParaRPr/>
           </a:p>
         </p:txBody>
       </p:sp>
@@ -11871,7 +11877,7 @@
           <a:noFill/>
         </p:spPr>
         <p:txBody>
-          <a:bodyPr wrap="none" lIns="0" rIns="0" tIns="0" bIns="0">
+          <a:bodyPr wrap="none" lIns="0" tIns="0" rIns="0" bIns="0">
             <a:spAutoFit/>
           </a:bodyPr>
           <a:lstStyle/>
@@ -11941,6 +11947,7 @@
           <a:lstStyle/>
           <a:p>
             <a:pPr algn="ctr"/>
+            <a:endParaRPr/>
           </a:p>
         </p:txBody>
       </p:sp>
@@ -11961,7 +11968,7 @@
           <a:noFill/>
         </p:spPr>
         <p:txBody>
-          <a:bodyPr wrap="none" lIns="0" rIns="0" tIns="0" bIns="0">
+          <a:bodyPr wrap="none" lIns="0" tIns="0" rIns="0" bIns="0">
             <a:spAutoFit/>
           </a:bodyPr>
           <a:lstStyle/>
@@ -12031,6 +12038,7 @@
           <a:lstStyle/>
           <a:p>
             <a:pPr algn="ctr"/>
+            <a:endParaRPr/>
           </a:p>
         </p:txBody>
       </p:sp>
@@ -12051,7 +12059,7 @@
           <a:noFill/>
         </p:spPr>
         <p:txBody>
-          <a:bodyPr wrap="none" lIns="0" rIns="0" tIns="0" bIns="0">
+          <a:bodyPr wrap="none" lIns="0" tIns="0" rIns="0" bIns="0">
             <a:spAutoFit/>
           </a:bodyPr>
           <a:lstStyle/>
@@ -12096,7 +12104,7 @@
           <a:noFill/>
         </p:spPr>
         <p:txBody>
-          <a:bodyPr wrap="none" lIns="0" rIns="0" tIns="0" bIns="0">
+          <a:bodyPr wrap="none" lIns="0" tIns="0" rIns="0" bIns="0">
             <a:spAutoFit/>
           </a:bodyPr>
           <a:lstStyle/>
@@ -12166,6 +12174,7 @@
           <a:lstStyle/>
           <a:p>
             <a:pPr algn="ctr"/>
+            <a:endParaRPr/>
           </a:p>
         </p:txBody>
       </p:sp>
@@ -12186,7 +12195,7 @@
           <a:noFill/>
         </p:spPr>
         <p:txBody>
-          <a:bodyPr wrap="none" lIns="0" rIns="0" tIns="0" bIns="0">
+          <a:bodyPr wrap="none" lIns="0" tIns="0" rIns="0" bIns="0">
             <a:spAutoFit/>
           </a:bodyPr>
           <a:lstStyle/>
@@ -12256,6 +12265,7 @@
           <a:lstStyle/>
           <a:p>
             <a:pPr algn="ctr"/>
+            <a:endParaRPr/>
           </a:p>
         </p:txBody>
       </p:sp>
@@ -12276,7 +12286,7 @@
           <a:noFill/>
         </p:spPr>
         <p:txBody>
-          <a:bodyPr wrap="none" lIns="0" rIns="0" tIns="0" bIns="0">
+          <a:bodyPr wrap="none" lIns="0" tIns="0" rIns="0" bIns="0">
             <a:spAutoFit/>
           </a:bodyPr>
           <a:lstStyle/>
@@ -12346,6 +12356,7 @@
           <a:lstStyle/>
           <a:p>
             <a:pPr algn="ctr"/>
+            <a:endParaRPr/>
           </a:p>
         </p:txBody>
       </p:sp>
@@ -12366,7 +12377,7 @@
           <a:noFill/>
         </p:spPr>
         <p:txBody>
-          <a:bodyPr wrap="none" lIns="0" rIns="0" tIns="0" bIns="0">
+          <a:bodyPr wrap="none" lIns="0" tIns="0" rIns="0" bIns="0">
             <a:spAutoFit/>
           </a:bodyPr>
           <a:lstStyle/>
@@ -12411,7 +12422,7 @@
           <a:noFill/>
         </p:spPr>
         <p:txBody>
-          <a:bodyPr wrap="none" lIns="0" rIns="0" tIns="0" bIns="0">
+          <a:bodyPr wrap="none" lIns="0" tIns="0" rIns="0" bIns="0">
             <a:spAutoFit/>
           </a:bodyPr>
           <a:lstStyle/>
@@ -12503,6 +12514,7 @@
           <a:lstStyle/>
           <a:p>
             <a:pPr algn="ctr"/>
+            <a:endParaRPr/>
           </a:p>
         </p:txBody>
       </p:sp>
@@ -12523,7 +12535,7 @@
           <a:noFill/>
         </p:spPr>
         <p:txBody>
-          <a:bodyPr wrap="none" lIns="0" rIns="0" tIns="0" bIns="0">
+          <a:bodyPr wrap="none" lIns="0" tIns="0" rIns="0" bIns="0">
             <a:spAutoFit/>
           </a:bodyPr>
           <a:lstStyle/>
@@ -12568,7 +12580,7 @@
           <a:noFill/>
         </p:spPr>
         <p:txBody>
-          <a:bodyPr wrap="none" lIns="0" rIns="0" tIns="0" bIns="0">
+          <a:bodyPr wrap="none" lIns="0" tIns="0" rIns="0" bIns="0">
             <a:spAutoFit/>
           </a:bodyPr>
           <a:lstStyle/>
@@ -12613,7 +12625,7 @@
           <a:noFill/>
         </p:spPr>
         <p:txBody>
-          <a:bodyPr wrap="none" lIns="0" rIns="0" tIns="0" bIns="0">
+          <a:bodyPr wrap="none" lIns="0" tIns="0" rIns="0" bIns="0">
             <a:spAutoFit/>
           </a:bodyPr>
           <a:lstStyle/>
@@ -12650,7 +12662,7 @@
 </file>
 
 <file path=ppt/slides/slide14.xml><?xml version="1.0" encoding="utf-8"?>
-<p:sld xmlns:a="http://schemas.openxmlformats.org/drawingml/2006/main" xmlns:p="http://schemas.openxmlformats.org/presentationml/2006/main" xmlns:r="http://schemas.openxmlformats.org/officeDocument/2006/relationships">
+<p:sld xmlns:a="http://schemas.openxmlformats.org/drawingml/2006/main" xmlns:r="http://schemas.openxmlformats.org/officeDocument/2006/relationships" xmlns:p="http://schemas.openxmlformats.org/presentationml/2006/main">
   <p:cSld>
     <p:bg>
       <p:bgPr>
@@ -12666,7 +12678,14 @@
         <p:cNvGrpSpPr/>
         <p:nvPr/>
       </p:nvGrpSpPr>
-      <p:grpSpPr/>
+      <p:grpSpPr>
+        <a:xfrm>
+          <a:off x="0" y="0"/>
+          <a:ext cx="0" cy="0"/>
+          <a:chOff x="0" y="0"/>
+          <a:chExt cx="0" cy="0"/>
+        </a:xfrm>
+      </p:grpSpPr>
       <p:sp>
         <p:nvSpPr>
           <p:cNvPr id="2" name="Rectangle 1"/>
@@ -12707,6 +12726,7 @@
           <a:lstStyle/>
           <a:p>
             <a:pPr algn="ctr"/>
+            <a:endParaRPr/>
           </a:p>
         </p:txBody>
       </p:sp>
@@ -12727,7 +12747,7 @@
           <a:noFill/>
         </p:spPr>
         <p:txBody>
-          <a:bodyPr wrap="none" lIns="0" rIns="0" tIns="0" bIns="0">
+          <a:bodyPr wrap="none" lIns="0" tIns="0" rIns="0" bIns="0">
             <a:spAutoFit/>
           </a:bodyPr>
           <a:lstStyle/>
@@ -12772,7 +12792,7 @@
           <a:noFill/>
         </p:spPr>
         <p:txBody>
-          <a:bodyPr wrap="none" lIns="0" rIns="0" tIns="0" bIns="0">
+          <a:bodyPr wrap="none" lIns="0" tIns="0" rIns="0" bIns="0">
             <a:spAutoFit/>
           </a:bodyPr>
           <a:lstStyle/>
@@ -12817,7 +12837,7 @@
           <a:noFill/>
         </p:spPr>
         <p:txBody>
-          <a:bodyPr wrap="none" lIns="0" rIns="0" tIns="0" bIns="0">
+          <a:bodyPr wrap="none" lIns="0" tIns="0" rIns="0" bIns="0">
             <a:spAutoFit/>
           </a:bodyPr>
           <a:lstStyle/>
@@ -12887,6 +12907,7 @@
           <a:lstStyle/>
           <a:p>
             <a:pPr algn="ctr"/>
+            <a:endParaRPr/>
           </a:p>
         </p:txBody>
       </p:sp>
@@ -12932,6 +12953,7 @@
           <a:lstStyle/>
           <a:p>
             <a:pPr algn="ctr"/>
+            <a:endParaRPr/>
           </a:p>
         </p:txBody>
       </p:sp>
@@ -12952,7 +12974,7 @@
           <a:noFill/>
         </p:spPr>
         <p:txBody>
-          <a:bodyPr wrap="none" lIns="0" rIns="0" tIns="0" bIns="0">
+          <a:bodyPr wrap="none" lIns="0" tIns="0" rIns="0" bIns="0">
             <a:spAutoFit/>
           </a:bodyPr>
           <a:lstStyle/>
@@ -12997,7 +13019,7 @@
           <a:noFill/>
         </p:spPr>
         <p:txBody>
-          <a:bodyPr wrap="none" lIns="0" rIns="0" tIns="0" bIns="0">
+          <a:bodyPr wrap="none" lIns="0" tIns="0" rIns="0" bIns="0">
             <a:spAutoFit/>
           </a:bodyPr>
           <a:lstStyle/>
@@ -13067,6 +13089,7 @@
           <a:lstStyle/>
           <a:p>
             <a:pPr algn="ctr"/>
+            <a:endParaRPr/>
           </a:p>
         </p:txBody>
       </p:sp>
@@ -13087,7 +13110,7 @@
           <a:noFill/>
         </p:spPr>
         <p:txBody>
-          <a:bodyPr wrap="none" lIns="0" rIns="0" tIns="0" bIns="0">
+          <a:bodyPr wrap="none" lIns="0" tIns="0" rIns="0" bIns="0">
             <a:spAutoFit/>
           </a:bodyPr>
           <a:lstStyle/>
@@ -13132,7 +13155,7 @@
           <a:noFill/>
         </p:spPr>
         <p:txBody>
-          <a:bodyPr wrap="none" lIns="0" rIns="0" tIns="0" bIns="0">
+          <a:bodyPr wrap="none" lIns="0" tIns="0" rIns="0" bIns="0">
             <a:spAutoFit/>
           </a:bodyPr>
           <a:lstStyle/>
@@ -13202,6 +13225,7 @@
           <a:lstStyle/>
           <a:p>
             <a:pPr algn="ctr"/>
+            <a:endParaRPr/>
           </a:p>
         </p:txBody>
       </p:sp>
@@ -13222,7 +13246,7 @@
           <a:noFill/>
         </p:spPr>
         <p:txBody>
-          <a:bodyPr wrap="none" lIns="0" rIns="0" tIns="0" bIns="0">
+          <a:bodyPr wrap="none" lIns="0" tIns="0" rIns="0" bIns="0">
             <a:spAutoFit/>
           </a:bodyPr>
           <a:lstStyle/>
@@ -13267,7 +13291,7 @@
           <a:noFill/>
         </p:spPr>
         <p:txBody>
-          <a:bodyPr wrap="none" lIns="0" rIns="0" tIns="0" bIns="0">
+          <a:bodyPr wrap="none" lIns="0" tIns="0" rIns="0" bIns="0">
             <a:spAutoFit/>
           </a:bodyPr>
           <a:lstStyle/>
@@ -13359,6 +13383,7 @@
           <a:lstStyle/>
           <a:p>
             <a:pPr algn="ctr"/>
+            <a:endParaRPr/>
           </a:p>
         </p:txBody>
       </p:sp>
@@ -13379,7 +13404,7 @@
           <a:noFill/>
         </p:spPr>
         <p:txBody>
-          <a:bodyPr wrap="none" lIns="0" rIns="0" tIns="0" bIns="0">
+          <a:bodyPr wrap="none" lIns="0" tIns="0" rIns="0" bIns="0">
             <a:spAutoFit/>
           </a:bodyPr>
           <a:lstStyle/>
@@ -13482,6 +13507,7 @@
           <a:lstStyle/>
           <a:p>
             <a:pPr algn="ctr"/>
+            <a:endParaRPr/>
           </a:p>
         </p:txBody>
       </p:sp>
@@ -13527,6 +13553,7 @@
           <a:lstStyle/>
           <a:p>
             <a:pPr algn="ctr"/>
+            <a:endParaRPr/>
           </a:p>
         </p:txBody>
       </p:sp>
@@ -13547,7 +13574,7 @@
           <a:noFill/>
         </p:spPr>
         <p:txBody>
-          <a:bodyPr wrap="none" lIns="0" rIns="0" tIns="0" bIns="0">
+          <a:bodyPr wrap="none" lIns="0" tIns="0" rIns="0" bIns="0">
             <a:spAutoFit/>
           </a:bodyPr>
           <a:lstStyle/>
@@ -13650,6 +13677,7 @@
           <a:lstStyle/>
           <a:p>
             <a:pPr algn="ctr"/>
+            <a:endParaRPr/>
           </a:p>
         </p:txBody>
       </p:sp>
@@ -13695,6 +13723,7 @@
           <a:lstStyle/>
           <a:p>
             <a:pPr algn="ctr"/>
+            <a:endParaRPr/>
           </a:p>
         </p:txBody>
       </p:sp>
@@ -13715,7 +13744,7 @@
           <a:noFill/>
         </p:spPr>
         <p:txBody>
-          <a:bodyPr wrap="none" lIns="0" rIns="0" tIns="0" bIns="0">
+          <a:bodyPr wrap="none" lIns="0" tIns="0" rIns="0" bIns="0">
             <a:spAutoFit/>
           </a:bodyPr>
           <a:lstStyle/>
@@ -13818,6 +13847,7 @@
           <a:lstStyle/>
           <a:p>
             <a:pPr algn="ctr"/>
+            <a:endParaRPr/>
           </a:p>
         </p:txBody>
       </p:sp>
@@ -13863,6 +13893,7 @@
           <a:lstStyle/>
           <a:p>
             <a:pPr algn="ctr"/>
+            <a:endParaRPr/>
           </a:p>
         </p:txBody>
       </p:sp>
@@ -13883,7 +13914,7 @@
           <a:noFill/>
         </p:spPr>
         <p:txBody>
-          <a:bodyPr wrap="none" lIns="0" rIns="0" tIns="0" bIns="0">
+          <a:bodyPr wrap="none" lIns="0" tIns="0" rIns="0" bIns="0">
             <a:spAutoFit/>
           </a:bodyPr>
           <a:lstStyle/>
@@ -13986,6 +14017,7 @@
           <a:lstStyle/>
           <a:p>
             <a:pPr algn="ctr"/>
+            <a:endParaRPr/>
           </a:p>
         </p:txBody>
       </p:sp>
@@ -14031,6 +14063,7 @@
           <a:lstStyle/>
           <a:p>
             <a:pPr algn="ctr"/>
+            <a:endParaRPr/>
           </a:p>
         </p:txBody>
       </p:sp>
@@ -14051,7 +14084,7 @@
           <a:noFill/>
         </p:spPr>
         <p:txBody>
-          <a:bodyPr wrap="none" lIns="0" rIns="0" tIns="0" bIns="0">
+          <a:bodyPr wrap="none" lIns="0" tIns="0" rIns="0" bIns="0">
             <a:spAutoFit/>
           </a:bodyPr>
           <a:lstStyle/>
@@ -14154,6 +14187,7 @@
           <a:lstStyle/>
           <a:p>
             <a:pPr algn="ctr"/>
+            <a:endParaRPr/>
           </a:p>
         </p:txBody>
       </p:sp>
@@ -14199,6 +14233,7 @@
           <a:lstStyle/>
           <a:p>
             <a:pPr algn="ctr"/>
+            <a:endParaRPr/>
           </a:p>
         </p:txBody>
       </p:sp>
@@ -14219,7 +14254,7 @@
           <a:noFill/>
         </p:spPr>
         <p:txBody>
-          <a:bodyPr wrap="none" lIns="0" rIns="0" tIns="0" bIns="0">
+          <a:bodyPr wrap="none" lIns="0" tIns="0" rIns="0" bIns="0">
             <a:spAutoFit/>
           </a:bodyPr>
           <a:lstStyle/>
@@ -14322,6 +14357,7 @@
           <a:lstStyle/>
           <a:p>
             <a:pPr algn="ctr"/>
+            <a:endParaRPr/>
           </a:p>
         </p:txBody>
       </p:sp>
@@ -14367,6 +14403,7 @@
           <a:lstStyle/>
           <a:p>
             <a:pPr algn="ctr"/>
+            <a:endParaRPr/>
           </a:p>
         </p:txBody>
       </p:sp>
@@ -14387,7 +14424,7 @@
           <a:noFill/>
         </p:spPr>
         <p:txBody>
-          <a:bodyPr wrap="none" lIns="0" rIns="0" tIns="0" bIns="0">
+          <a:bodyPr wrap="none" lIns="0" tIns="0" rIns="0" bIns="0">
             <a:spAutoFit/>
           </a:bodyPr>
           <a:lstStyle/>
@@ -14490,6 +14527,7 @@
           <a:lstStyle/>
           <a:p>
             <a:pPr algn="ctr"/>
+            <a:endParaRPr/>
           </a:p>
         </p:txBody>
       </p:sp>
@@ -14535,6 +14573,7 @@
           <a:lstStyle/>
           <a:p>
             <a:pPr algn="ctr"/>
+            <a:endParaRPr/>
           </a:p>
         </p:txBody>
       </p:sp>
@@ -14555,7 +14594,7 @@
           <a:noFill/>
         </p:spPr>
         <p:txBody>
-          <a:bodyPr wrap="none" lIns="0" rIns="0" tIns="0" bIns="0">
+          <a:bodyPr wrap="none" lIns="0" tIns="0" rIns="0" bIns="0">
             <a:spAutoFit/>
           </a:bodyPr>
           <a:lstStyle/>
@@ -14728,6 +14767,7 @@
           <a:lstStyle/>
           <a:p>
             <a:pPr algn="ctr"/>
+            <a:endParaRPr/>
           </a:p>
         </p:txBody>
       </p:sp>
@@ -14876,6 +14916,7 @@
           <a:lstStyle/>
           <a:p>
             <a:pPr algn="ctr"/>
+            <a:endParaRPr/>
           </a:p>
         </p:txBody>
       </p:sp>
@@ -14896,7 +14937,7 @@
           <a:noFill/>
         </p:spPr>
         <p:txBody>
-          <a:bodyPr wrap="none" lIns="0" rIns="0" tIns="0" bIns="0">
+          <a:bodyPr wrap="none" lIns="0" tIns="0" rIns="0" bIns="0">
             <a:spAutoFit/>
           </a:bodyPr>
           <a:lstStyle/>
@@ -14966,6 +15007,7 @@
           <a:lstStyle/>
           <a:p>
             <a:pPr algn="ctr"/>
+            <a:endParaRPr/>
           </a:p>
         </p:txBody>
       </p:sp>
@@ -14986,7 +15028,7 @@
           <a:noFill/>
         </p:spPr>
         <p:txBody>
-          <a:bodyPr wrap="none" lIns="0" rIns="0" tIns="0" bIns="0">
+          <a:bodyPr wrap="none" lIns="0" tIns="0" rIns="0" bIns="0">
             <a:spAutoFit/>
           </a:bodyPr>
           <a:lstStyle/>
@@ -15031,7 +15073,7 @@
           <a:noFill/>
         </p:spPr>
         <p:txBody>
-          <a:bodyPr wrap="none" lIns="0" rIns="0" tIns="0" bIns="0">
+          <a:bodyPr wrap="none" lIns="0" tIns="0" rIns="0" bIns="0">
             <a:spAutoFit/>
           </a:bodyPr>
           <a:lstStyle/>
@@ -15076,7 +15118,7 @@
           <a:noFill/>
         </p:spPr>
         <p:txBody>
-          <a:bodyPr wrap="none" lIns="0" rIns="0" tIns="0" bIns="0">
+          <a:bodyPr wrap="none" lIns="0" tIns="0" rIns="0" bIns="0">
             <a:spAutoFit/>
           </a:bodyPr>
           <a:lstStyle/>
@@ -15113,7 +15155,7 @@
 </file>
 
 <file path=ppt/slides/slide15.xml><?xml version="1.0" encoding="utf-8"?>
-<p:sld xmlns:a="http://schemas.openxmlformats.org/drawingml/2006/main" xmlns:p="http://schemas.openxmlformats.org/presentationml/2006/main" xmlns:r="http://schemas.openxmlformats.org/officeDocument/2006/relationships">
+<p:sld xmlns:a="http://schemas.openxmlformats.org/drawingml/2006/main" xmlns:r="http://schemas.openxmlformats.org/officeDocument/2006/relationships" xmlns:p="http://schemas.openxmlformats.org/presentationml/2006/main">
   <p:cSld>
     <p:bg>
       <p:bgPr>
@@ -15129,7 +15171,14 @@
         <p:cNvGrpSpPr/>
         <p:nvPr/>
       </p:nvGrpSpPr>
-      <p:grpSpPr/>
+      <p:grpSpPr>
+        <a:xfrm>
+          <a:off x="0" y="0"/>
+          <a:ext cx="0" cy="0"/>
+          <a:chOff x="0" y="0"/>
+          <a:chExt cx="0" cy="0"/>
+        </a:xfrm>
+      </p:grpSpPr>
       <p:sp>
         <p:nvSpPr>
           <p:cNvPr id="2" name="Rectangle 1"/>
@@ -15170,6 +15219,7 @@
           <a:lstStyle/>
           <a:p>
             <a:pPr algn="ctr"/>
+            <a:endParaRPr/>
           </a:p>
         </p:txBody>
       </p:sp>
@@ -15190,7 +15240,7 @@
           <a:noFill/>
         </p:spPr>
         <p:txBody>
-          <a:bodyPr wrap="none" lIns="0" rIns="0" tIns="0" bIns="0">
+          <a:bodyPr wrap="none" lIns="0" tIns="0" rIns="0" bIns="0">
             <a:spAutoFit/>
           </a:bodyPr>
           <a:lstStyle/>
@@ -15235,7 +15285,7 @@
           <a:noFill/>
         </p:spPr>
         <p:txBody>
-          <a:bodyPr wrap="none" lIns="0" rIns="0" tIns="0" bIns="0">
+          <a:bodyPr wrap="none" lIns="0" tIns="0" rIns="0" bIns="0">
             <a:spAutoFit/>
           </a:bodyPr>
           <a:lstStyle/>
@@ -15280,7 +15330,7 @@
           <a:noFill/>
         </p:spPr>
         <p:txBody>
-          <a:bodyPr wrap="none" lIns="0" rIns="0" tIns="0" bIns="0">
+          <a:bodyPr wrap="none" lIns="0" tIns="0" rIns="0" bIns="0">
             <a:spAutoFit/>
           </a:bodyPr>
           <a:lstStyle/>
@@ -15350,6 +15400,7 @@
           <a:lstStyle/>
           <a:p>
             <a:pPr algn="ctr"/>
+            <a:endParaRPr/>
           </a:p>
         </p:txBody>
       </p:sp>
@@ -15395,6 +15446,7 @@
           <a:lstStyle/>
           <a:p>
             <a:pPr algn="ctr"/>
+            <a:endParaRPr/>
           </a:p>
         </p:txBody>
       </p:sp>
@@ -15415,7 +15467,7 @@
           <a:noFill/>
         </p:spPr>
         <p:txBody>
-          <a:bodyPr wrap="none" lIns="0" rIns="0" tIns="0" bIns="0">
+          <a:bodyPr wrap="none" lIns="0" tIns="0" rIns="0" bIns="0">
             <a:spAutoFit/>
           </a:bodyPr>
           <a:lstStyle/>
@@ -15460,7 +15512,7 @@
           <a:noFill/>
         </p:spPr>
         <p:txBody>
-          <a:bodyPr wrap="none" lIns="0" rIns="0" tIns="0" bIns="0">
+          <a:bodyPr wrap="none" lIns="0" tIns="0" rIns="0" bIns="0">
             <a:spAutoFit/>
           </a:bodyPr>
           <a:lstStyle/>
@@ -15552,6 +15604,7 @@
           <a:lstStyle/>
           <a:p>
             <a:pPr algn="ctr"/>
+            <a:endParaRPr/>
           </a:p>
         </p:txBody>
       </p:sp>
@@ -15572,7 +15625,7 @@
           <a:noFill/>
         </p:spPr>
         <p:txBody>
-          <a:bodyPr wrap="none" lIns="0" rIns="0" tIns="0" bIns="0">
+          <a:bodyPr wrap="none" lIns="0" tIns="0" rIns="0" bIns="0">
             <a:spAutoFit/>
           </a:bodyPr>
           <a:lstStyle/>
@@ -15617,7 +15670,7 @@
           <a:noFill/>
         </p:spPr>
         <p:txBody>
-          <a:bodyPr wrap="none" lIns="0" rIns="0" tIns="0" bIns="0">
+          <a:bodyPr wrap="none" lIns="0" tIns="0" rIns="0" bIns="0">
             <a:spAutoFit/>
           </a:bodyPr>
           <a:lstStyle/>
@@ -15687,6 +15740,7 @@
           <a:lstStyle/>
           <a:p>
             <a:pPr algn="ctr"/>
+            <a:endParaRPr/>
           </a:p>
         </p:txBody>
       </p:sp>
@@ -15707,7 +15761,7 @@
           <a:noFill/>
         </p:spPr>
         <p:txBody>
-          <a:bodyPr wrap="none" lIns="0" rIns="0" tIns="0" bIns="0">
+          <a:bodyPr wrap="none" lIns="0" tIns="0" rIns="0" bIns="0">
             <a:spAutoFit/>
           </a:bodyPr>
           <a:lstStyle/>
@@ -15752,7 +15806,7 @@
           <a:noFill/>
         </p:spPr>
         <p:txBody>
-          <a:bodyPr wrap="none" lIns="0" rIns="0" tIns="0" bIns="0">
+          <a:bodyPr wrap="none" lIns="0" tIns="0" rIns="0" bIns="0">
             <a:spAutoFit/>
           </a:bodyPr>
           <a:lstStyle/>
@@ -15844,6 +15898,7 @@
           <a:lstStyle/>
           <a:p>
             <a:pPr algn="ctr"/>
+            <a:endParaRPr/>
           </a:p>
         </p:txBody>
       </p:sp>
@@ -15864,7 +15919,7 @@
           <a:noFill/>
         </p:spPr>
         <p:txBody>
-          <a:bodyPr wrap="none" lIns="0" rIns="0" tIns="0" bIns="0">
+          <a:bodyPr wrap="none" lIns="0" tIns="0" rIns="0" bIns="0">
             <a:spAutoFit/>
           </a:bodyPr>
           <a:lstStyle/>
@@ -15967,6 +16022,7 @@
           <a:lstStyle/>
           <a:p>
             <a:pPr algn="ctr"/>
+            <a:endParaRPr/>
           </a:p>
         </p:txBody>
       </p:sp>
@@ -16012,6 +16068,7 @@
           <a:lstStyle/>
           <a:p>
             <a:pPr algn="ctr"/>
+            <a:endParaRPr/>
           </a:p>
         </p:txBody>
       </p:sp>
@@ -16032,7 +16089,7 @@
           <a:noFill/>
         </p:spPr>
         <p:txBody>
-          <a:bodyPr wrap="none" lIns="0" rIns="0" tIns="0" bIns="0">
+          <a:bodyPr wrap="none" lIns="0" tIns="0" rIns="0" bIns="0">
             <a:spAutoFit/>
           </a:bodyPr>
           <a:lstStyle/>
@@ -16135,6 +16192,7 @@
           <a:lstStyle/>
           <a:p>
             <a:pPr algn="ctr"/>
+            <a:endParaRPr/>
           </a:p>
         </p:txBody>
       </p:sp>
@@ -16180,6 +16238,7 @@
           <a:lstStyle/>
           <a:p>
             <a:pPr algn="ctr"/>
+            <a:endParaRPr/>
           </a:p>
         </p:txBody>
       </p:sp>
@@ -16200,7 +16259,7 @@
           <a:noFill/>
         </p:spPr>
         <p:txBody>
-          <a:bodyPr wrap="none" lIns="0" rIns="0" tIns="0" bIns="0">
+          <a:bodyPr wrap="none" lIns="0" tIns="0" rIns="0" bIns="0">
             <a:spAutoFit/>
           </a:bodyPr>
           <a:lstStyle/>
@@ -16303,6 +16362,7 @@
           <a:lstStyle/>
           <a:p>
             <a:pPr algn="ctr"/>
+            <a:endParaRPr/>
           </a:p>
         </p:txBody>
       </p:sp>
@@ -16348,6 +16408,7 @@
           <a:lstStyle/>
           <a:p>
             <a:pPr algn="ctr"/>
+            <a:endParaRPr/>
           </a:p>
         </p:txBody>
       </p:sp>
@@ -16368,7 +16429,7 @@
           <a:noFill/>
         </p:spPr>
         <p:txBody>
-          <a:bodyPr wrap="none" lIns="0" rIns="0" tIns="0" bIns="0">
+          <a:bodyPr wrap="none" lIns="0" tIns="0" rIns="0" bIns="0">
             <a:spAutoFit/>
           </a:bodyPr>
           <a:lstStyle/>
@@ -16471,6 +16532,7 @@
           <a:lstStyle/>
           <a:p>
             <a:pPr algn="ctr"/>
+            <a:endParaRPr/>
           </a:p>
         </p:txBody>
       </p:sp>
@@ -16516,6 +16578,7 @@
           <a:lstStyle/>
           <a:p>
             <a:pPr algn="ctr"/>
+            <a:endParaRPr/>
           </a:p>
         </p:txBody>
       </p:sp>
@@ -16536,7 +16599,7 @@
           <a:noFill/>
         </p:spPr>
         <p:txBody>
-          <a:bodyPr wrap="none" lIns="0" rIns="0" tIns="0" bIns="0">
+          <a:bodyPr wrap="none" lIns="0" tIns="0" rIns="0" bIns="0">
             <a:spAutoFit/>
           </a:bodyPr>
           <a:lstStyle/>
@@ -16581,7 +16644,7 @@
           <a:noFill/>
         </p:spPr>
         <p:txBody>
-          <a:bodyPr wrap="none" lIns="0" rIns="0" tIns="0" bIns="0">
+          <a:bodyPr wrap="none" lIns="0" tIns="0" rIns="0" bIns="0">
             <a:spAutoFit/>
           </a:bodyPr>
           <a:lstStyle/>
@@ -16651,6 +16714,7 @@
           <a:lstStyle/>
           <a:p>
             <a:pPr algn="ctr"/>
+            <a:endParaRPr/>
           </a:p>
         </p:txBody>
       </p:sp>
@@ -16671,7 +16735,7 @@
           <a:noFill/>
         </p:spPr>
         <p:txBody>
-          <a:bodyPr wrap="none" lIns="0" rIns="0" tIns="0" bIns="0">
+          <a:bodyPr wrap="none" lIns="0" tIns="0" rIns="0" bIns="0">
             <a:spAutoFit/>
           </a:bodyPr>
           <a:lstStyle/>
@@ -16716,7 +16780,7 @@
           <a:noFill/>
         </p:spPr>
         <p:txBody>
-          <a:bodyPr wrap="none" lIns="0" rIns="0" tIns="0" bIns="0">
+          <a:bodyPr wrap="none" lIns="0" tIns="0" rIns="0" bIns="0">
             <a:spAutoFit/>
           </a:bodyPr>
           <a:lstStyle/>
@@ -16761,7 +16825,7 @@
           <a:noFill/>
         </p:spPr>
         <p:txBody>
-          <a:bodyPr wrap="none" lIns="0" rIns="0" tIns="0" bIns="0">
+          <a:bodyPr wrap="none" lIns="0" tIns="0" rIns="0" bIns="0">
             <a:spAutoFit/>
           </a:bodyPr>
           <a:lstStyle/>
@@ -16798,7 +16862,7 @@
 </file>
 
 <file path=ppt/slides/slide16.xml><?xml version="1.0" encoding="utf-8"?>
-<p:sld xmlns:a="http://schemas.openxmlformats.org/drawingml/2006/main" xmlns:p="http://schemas.openxmlformats.org/presentationml/2006/main" xmlns:r="http://schemas.openxmlformats.org/officeDocument/2006/relationships">
+<p:sld xmlns:a="http://schemas.openxmlformats.org/drawingml/2006/main" xmlns:r="http://schemas.openxmlformats.org/officeDocument/2006/relationships" xmlns:p="http://schemas.openxmlformats.org/presentationml/2006/main">
   <p:cSld>
     <p:bg>
       <p:bgPr>
@@ -16814,7 +16878,14 @@
         <p:cNvGrpSpPr/>
         <p:nvPr/>
       </p:nvGrpSpPr>
-      <p:grpSpPr/>
+      <p:grpSpPr>
+        <a:xfrm>
+          <a:off x="0" y="0"/>
+          <a:ext cx="0" cy="0"/>
+          <a:chOff x="0" y="0"/>
+          <a:chExt cx="0" cy="0"/>
+        </a:xfrm>
+      </p:grpSpPr>
       <p:sp>
         <p:nvSpPr>
           <p:cNvPr id="2" name="Rectangle 1"/>
@@ -16855,6 +16926,7 @@
           <a:lstStyle/>
           <a:p>
             <a:pPr algn="ctr"/>
+            <a:endParaRPr/>
           </a:p>
         </p:txBody>
       </p:sp>
@@ -16875,7 +16947,7 @@
           <a:noFill/>
         </p:spPr>
         <p:txBody>
-          <a:bodyPr wrap="none" lIns="0" rIns="0" tIns="0" bIns="0">
+          <a:bodyPr wrap="none" lIns="0" tIns="0" rIns="0" bIns="0">
             <a:spAutoFit/>
           </a:bodyPr>
           <a:lstStyle/>
@@ -16920,7 +16992,7 @@
           <a:noFill/>
         </p:spPr>
         <p:txBody>
-          <a:bodyPr wrap="none" lIns="0" rIns="0" tIns="0" bIns="0">
+          <a:bodyPr wrap="none" lIns="0" tIns="0" rIns="0" bIns="0">
             <a:spAutoFit/>
           </a:bodyPr>
           <a:lstStyle/>
@@ -16965,7 +17037,7 @@
           <a:noFill/>
         </p:spPr>
         <p:txBody>
-          <a:bodyPr wrap="none" lIns="0" rIns="0" tIns="0" bIns="0">
+          <a:bodyPr wrap="none" lIns="0" tIns="0" rIns="0" bIns="0">
             <a:spAutoFit/>
           </a:bodyPr>
           <a:lstStyle/>
@@ -17035,6 +17107,7 @@
           <a:lstStyle/>
           <a:p>
             <a:pPr algn="ctr"/>
+            <a:endParaRPr/>
           </a:p>
         </p:txBody>
       </p:sp>
@@ -17080,6 +17153,7 @@
           <a:lstStyle/>
           <a:p>
             <a:pPr algn="ctr"/>
+            <a:endParaRPr/>
           </a:p>
         </p:txBody>
       </p:sp>
@@ -17100,7 +17174,7 @@
           <a:noFill/>
         </p:spPr>
         <p:txBody>
-          <a:bodyPr wrap="none" lIns="0" rIns="0" tIns="0" bIns="0">
+          <a:bodyPr wrap="none" lIns="0" tIns="0" rIns="0" bIns="0">
             <a:spAutoFit/>
           </a:bodyPr>
           <a:lstStyle/>
@@ -17145,7 +17219,7 @@
           <a:noFill/>
         </p:spPr>
         <p:txBody>
-          <a:bodyPr wrap="none" lIns="0" rIns="0" tIns="0" bIns="0">
+          <a:bodyPr wrap="none" lIns="0" tIns="0" rIns="0" bIns="0">
             <a:spAutoFit/>
           </a:bodyPr>
           <a:lstStyle/>
@@ -17215,6 +17289,7 @@
           <a:lstStyle/>
           <a:p>
             <a:pPr algn="ctr"/>
+            <a:endParaRPr/>
           </a:p>
         </p:txBody>
       </p:sp>
@@ -17235,7 +17310,7 @@
           <a:noFill/>
         </p:spPr>
         <p:txBody>
-          <a:bodyPr wrap="none" lIns="0" rIns="0" tIns="0" bIns="0">
+          <a:bodyPr wrap="none" lIns="0" tIns="0" rIns="0" bIns="0">
             <a:spAutoFit/>
           </a:bodyPr>
           <a:lstStyle/>
@@ -17280,7 +17355,7 @@
           <a:noFill/>
         </p:spPr>
         <p:txBody>
-          <a:bodyPr wrap="none" lIns="0" rIns="0" tIns="0" bIns="0">
+          <a:bodyPr wrap="none" lIns="0" tIns="0" rIns="0" bIns="0">
             <a:spAutoFit/>
           </a:bodyPr>
           <a:lstStyle/>
@@ -17350,6 +17425,7 @@
           <a:lstStyle/>
           <a:p>
             <a:pPr algn="ctr"/>
+            <a:endParaRPr/>
           </a:p>
         </p:txBody>
       </p:sp>
@@ -17370,7 +17446,7 @@
           <a:noFill/>
         </p:spPr>
         <p:txBody>
-          <a:bodyPr wrap="none" lIns="0" rIns="0" tIns="0" bIns="0">
+          <a:bodyPr wrap="none" lIns="0" tIns="0" rIns="0" bIns="0">
             <a:spAutoFit/>
           </a:bodyPr>
           <a:lstStyle/>
@@ -17415,7 +17491,7 @@
           <a:noFill/>
         </p:spPr>
         <p:txBody>
-          <a:bodyPr wrap="none" lIns="0" rIns="0" tIns="0" bIns="0">
+          <a:bodyPr wrap="none" lIns="0" tIns="0" rIns="0" bIns="0">
             <a:spAutoFit/>
           </a:bodyPr>
           <a:lstStyle/>
@@ -17485,6 +17561,7 @@
           <a:lstStyle/>
           <a:p>
             <a:pPr algn="ctr"/>
+            <a:endParaRPr/>
           </a:p>
         </p:txBody>
       </p:sp>
@@ -17505,7 +17582,7 @@
           <a:noFill/>
         </p:spPr>
         <p:txBody>
-          <a:bodyPr wrap="none" lIns="0" rIns="0" tIns="0" bIns="0">
+          <a:bodyPr wrap="none" lIns="0" tIns="0" rIns="0" bIns="0">
             <a:spAutoFit/>
           </a:bodyPr>
           <a:lstStyle/>
@@ -17549,6 +17626,7 @@
                 <a:latin typeface="Microsoft YaHei"/>
               </a:defRPr>
             </a:pPr>
+            <a:endParaRPr/>
           </a:p>
           <a:p>
             <a:pPr>
@@ -17616,6 +17694,7 @@
           <a:lstStyle/>
           <a:p>
             <a:pPr algn="ctr"/>
+            <a:endParaRPr/>
           </a:p>
         </p:txBody>
       </p:sp>
@@ -17636,7 +17715,7 @@
           <a:noFill/>
         </p:spPr>
         <p:txBody>
-          <a:bodyPr wrap="none" lIns="0" rIns="0" tIns="0" bIns="0">
+          <a:bodyPr wrap="none" lIns="0" tIns="0" rIns="0" bIns="0">
             <a:spAutoFit/>
           </a:bodyPr>
           <a:lstStyle/>
@@ -17739,6 +17818,7 @@
           <a:lstStyle/>
           <a:p>
             <a:pPr algn="ctr"/>
+            <a:endParaRPr/>
           </a:p>
         </p:txBody>
       </p:sp>
@@ -17784,6 +17864,7 @@
           <a:lstStyle/>
           <a:p>
             <a:pPr algn="ctr"/>
+            <a:endParaRPr/>
           </a:p>
         </p:txBody>
       </p:sp>
@@ -17804,7 +17885,7 @@
           <a:noFill/>
         </p:spPr>
         <p:txBody>
-          <a:bodyPr wrap="none" lIns="0" rIns="0" tIns="0" bIns="0">
+          <a:bodyPr wrap="none" lIns="0" tIns="0" rIns="0" bIns="0">
             <a:spAutoFit/>
           </a:bodyPr>
           <a:lstStyle/>
@@ -17907,6 +17988,7 @@
           <a:lstStyle/>
           <a:p>
             <a:pPr algn="ctr"/>
+            <a:endParaRPr/>
           </a:p>
         </p:txBody>
       </p:sp>
@@ -17952,6 +18034,7 @@
           <a:lstStyle/>
           <a:p>
             <a:pPr algn="ctr"/>
+            <a:endParaRPr/>
           </a:p>
         </p:txBody>
       </p:sp>
@@ -17972,7 +18055,7 @@
           <a:noFill/>
         </p:spPr>
         <p:txBody>
-          <a:bodyPr wrap="none" lIns="0" rIns="0" tIns="0" bIns="0">
+          <a:bodyPr wrap="none" lIns="0" tIns="0" rIns="0" bIns="0">
             <a:spAutoFit/>
           </a:bodyPr>
           <a:lstStyle/>
@@ -18075,6 +18158,7 @@
           <a:lstStyle/>
           <a:p>
             <a:pPr algn="ctr"/>
+            <a:endParaRPr/>
           </a:p>
         </p:txBody>
       </p:sp>
@@ -18120,6 +18204,7 @@
           <a:lstStyle/>
           <a:p>
             <a:pPr algn="ctr"/>
+            <a:endParaRPr/>
           </a:p>
         </p:txBody>
       </p:sp>
@@ -18140,7 +18225,7 @@
           <a:noFill/>
         </p:spPr>
         <p:txBody>
-          <a:bodyPr wrap="none" lIns="0" rIns="0" tIns="0" bIns="0">
+          <a:bodyPr wrap="none" lIns="0" tIns="0" rIns="0" bIns="0">
             <a:spAutoFit/>
           </a:bodyPr>
           <a:lstStyle/>
@@ -18210,6 +18295,7 @@
           <a:lstStyle/>
           <a:p>
             <a:pPr algn="ctr"/>
+            <a:endParaRPr/>
           </a:p>
         </p:txBody>
       </p:sp>
@@ -18230,7 +18316,7 @@
           <a:noFill/>
         </p:spPr>
         <p:txBody>
-          <a:bodyPr wrap="none" lIns="0" rIns="0" tIns="0" bIns="0">
+          <a:bodyPr wrap="none" lIns="0" tIns="0" rIns="0" bIns="0">
             <a:spAutoFit/>
           </a:bodyPr>
           <a:lstStyle/>
@@ -18275,7 +18361,7 @@
           <a:noFill/>
         </p:spPr>
         <p:txBody>
-          <a:bodyPr wrap="none" lIns="0" rIns="0" tIns="0" bIns="0">
+          <a:bodyPr wrap="none" lIns="0" tIns="0" rIns="0" bIns="0">
             <a:spAutoFit/>
           </a:bodyPr>
           <a:lstStyle/>
@@ -18320,7 +18406,7 @@
           <a:noFill/>
         </p:spPr>
         <p:txBody>
-          <a:bodyPr wrap="none" lIns="0" rIns="0" tIns="0" bIns="0">
+          <a:bodyPr wrap="none" lIns="0" tIns="0" rIns="0" bIns="0">
             <a:spAutoFit/>
           </a:bodyPr>
           <a:lstStyle/>
@@ -18357,7 +18443,7 @@
 </file>
 
 <file path=ppt/slides/slide17.xml><?xml version="1.0" encoding="utf-8"?>
-<p:sld xmlns:a="http://schemas.openxmlformats.org/drawingml/2006/main" xmlns:p="http://schemas.openxmlformats.org/presentationml/2006/main" xmlns:r="http://schemas.openxmlformats.org/officeDocument/2006/relationships">
+<p:sld xmlns:a="http://schemas.openxmlformats.org/drawingml/2006/main" xmlns:r="http://schemas.openxmlformats.org/officeDocument/2006/relationships" xmlns:p="http://schemas.openxmlformats.org/presentationml/2006/main">
   <p:cSld>
     <p:bg>
       <p:bgPr>
@@ -18373,7 +18459,14 @@
         <p:cNvGrpSpPr/>
         <p:nvPr/>
       </p:nvGrpSpPr>
-      <p:grpSpPr/>
+      <p:grpSpPr>
+        <a:xfrm>
+          <a:off x="0" y="0"/>
+          <a:ext cx="0" cy="0"/>
+          <a:chOff x="0" y="0"/>
+          <a:chExt cx="0" cy="0"/>
+        </a:xfrm>
+      </p:grpSpPr>
       <p:sp>
         <p:nvSpPr>
           <p:cNvPr id="2" name="Rectangle 1"/>
@@ -18414,6 +18507,7 @@
           <a:lstStyle/>
           <a:p>
             <a:pPr algn="ctr"/>
+            <a:endParaRPr/>
           </a:p>
         </p:txBody>
       </p:sp>
@@ -18434,7 +18528,7 @@
           <a:noFill/>
         </p:spPr>
         <p:txBody>
-          <a:bodyPr wrap="none" lIns="0" rIns="0" tIns="0" bIns="0">
+          <a:bodyPr wrap="none" lIns="0" tIns="0" rIns="0" bIns="0">
             <a:spAutoFit/>
           </a:bodyPr>
           <a:lstStyle/>
@@ -18479,7 +18573,7 @@
           <a:noFill/>
         </p:spPr>
         <p:txBody>
-          <a:bodyPr wrap="none" lIns="0" rIns="0" tIns="0" bIns="0">
+          <a:bodyPr wrap="none" lIns="0" tIns="0" rIns="0" bIns="0">
             <a:spAutoFit/>
           </a:bodyPr>
           <a:lstStyle/>
@@ -18524,7 +18618,7 @@
           <a:noFill/>
         </p:spPr>
         <p:txBody>
-          <a:bodyPr wrap="none" lIns="0" rIns="0" tIns="0" bIns="0">
+          <a:bodyPr wrap="none" lIns="0" tIns="0" rIns="0" bIns="0">
             <a:spAutoFit/>
           </a:bodyPr>
           <a:lstStyle/>
@@ -18594,6 +18688,7 @@
           <a:lstStyle/>
           <a:p>
             <a:pPr algn="ctr"/>
+            <a:endParaRPr/>
           </a:p>
         </p:txBody>
       </p:sp>
@@ -18639,6 +18734,7 @@
           <a:lstStyle/>
           <a:p>
             <a:pPr algn="ctr"/>
+            <a:endParaRPr/>
           </a:p>
         </p:txBody>
       </p:sp>
@@ -18659,7 +18755,7 @@
           <a:noFill/>
         </p:spPr>
         <p:txBody>
-          <a:bodyPr wrap="none" lIns="0" rIns="0" tIns="0" bIns="0">
+          <a:bodyPr wrap="none" lIns="0" tIns="0" rIns="0" bIns="0">
             <a:spAutoFit/>
           </a:bodyPr>
           <a:lstStyle/>
@@ -18704,7 +18800,7 @@
           <a:noFill/>
         </p:spPr>
         <p:txBody>
-          <a:bodyPr wrap="none" lIns="0" rIns="0" tIns="0" bIns="0">
+          <a:bodyPr wrap="none" lIns="0" tIns="0" rIns="0" bIns="0">
             <a:spAutoFit/>
           </a:bodyPr>
           <a:lstStyle/>
@@ -18774,6 +18870,7 @@
           <a:lstStyle/>
           <a:p>
             <a:pPr algn="ctr"/>
+            <a:endParaRPr/>
           </a:p>
         </p:txBody>
       </p:sp>
@@ -18794,7 +18891,7 @@
           <a:noFill/>
         </p:spPr>
         <p:txBody>
-          <a:bodyPr wrap="none" lIns="0" rIns="0" tIns="0" bIns="0">
+          <a:bodyPr wrap="none" lIns="0" tIns="0" rIns="0" bIns="0">
             <a:spAutoFit/>
           </a:bodyPr>
           <a:lstStyle/>
@@ -18839,7 +18936,7 @@
           <a:noFill/>
         </p:spPr>
         <p:txBody>
-          <a:bodyPr wrap="none" lIns="0" rIns="0" tIns="0" bIns="0">
+          <a:bodyPr wrap="none" lIns="0" tIns="0" rIns="0" bIns="0">
             <a:spAutoFit/>
           </a:bodyPr>
           <a:lstStyle/>
@@ -18909,6 +19006,7 @@
           <a:lstStyle/>
           <a:p>
             <a:pPr algn="ctr"/>
+            <a:endParaRPr/>
           </a:p>
         </p:txBody>
       </p:sp>
@@ -18929,7 +19027,7 @@
           <a:noFill/>
         </p:spPr>
         <p:txBody>
-          <a:bodyPr wrap="none" lIns="0" rIns="0" tIns="0" bIns="0">
+          <a:bodyPr wrap="none" lIns="0" tIns="0" rIns="0" bIns="0">
             <a:spAutoFit/>
           </a:bodyPr>
           <a:lstStyle/>
@@ -18974,7 +19072,7 @@
           <a:noFill/>
         </p:spPr>
         <p:txBody>
-          <a:bodyPr wrap="none" lIns="0" rIns="0" tIns="0" bIns="0">
+          <a:bodyPr wrap="none" lIns="0" tIns="0" rIns="0" bIns="0">
             <a:spAutoFit/>
           </a:bodyPr>
           <a:lstStyle/>
@@ -19041,7 +19139,7 @@
           <a:noFill/>
         </p:spPr>
         <p:txBody>
-          <a:bodyPr wrap="none" lIns="0" rIns="0" tIns="0" bIns="0">
+          <a:bodyPr wrap="none" lIns="0" tIns="0" rIns="0" bIns="0">
             <a:spAutoFit/>
           </a:bodyPr>
           <a:lstStyle/>
@@ -19471,7 +19569,7 @@
           <a:noFill/>
         </p:spPr>
         <p:txBody>
-          <a:bodyPr wrap="none" lIns="0" rIns="0" tIns="0" bIns="0">
+          <a:bodyPr wrap="none" lIns="0" tIns="0" rIns="0" bIns="0">
             <a:spAutoFit/>
           </a:bodyPr>
           <a:lstStyle/>
@@ -19516,7 +19614,7 @@
           <a:noFill/>
         </p:spPr>
         <p:txBody>
-          <a:bodyPr wrap="none" lIns="0" rIns="0" tIns="0" bIns="0">
+          <a:bodyPr wrap="none" lIns="0" tIns="0" rIns="0" bIns="0">
             <a:spAutoFit/>
           </a:bodyPr>
           <a:lstStyle/>
@@ -19586,6 +19684,7 @@
           <a:lstStyle/>
           <a:p>
             <a:pPr algn="ctr"/>
+            <a:endParaRPr/>
           </a:p>
         </p:txBody>
       </p:sp>
@@ -19606,7 +19705,7 @@
           <a:noFill/>
         </p:spPr>
         <p:txBody>
-          <a:bodyPr wrap="none" lIns="0" rIns="0" tIns="0" bIns="0">
+          <a:bodyPr wrap="none" lIns="0" tIns="0" rIns="0" bIns="0">
             <a:spAutoFit/>
           </a:bodyPr>
           <a:lstStyle/>
@@ -19651,7 +19750,7 @@
           <a:noFill/>
         </p:spPr>
         <p:txBody>
-          <a:bodyPr wrap="none" lIns="0" rIns="0" tIns="0" bIns="0">
+          <a:bodyPr wrap="none" lIns="0" tIns="0" rIns="0" bIns="0">
             <a:spAutoFit/>
           </a:bodyPr>
           <a:lstStyle/>
@@ -19696,7 +19795,7 @@
           <a:noFill/>
         </p:spPr>
         <p:txBody>
-          <a:bodyPr wrap="none" lIns="0" rIns="0" tIns="0" bIns="0">
+          <a:bodyPr wrap="none" lIns="0" tIns="0" rIns="0" bIns="0">
             <a:spAutoFit/>
           </a:bodyPr>
           <a:lstStyle/>
@@ -19733,7 +19832,7 @@
 </file>
 
 <file path=ppt/slides/slide18.xml><?xml version="1.0" encoding="utf-8"?>
-<p:sld xmlns:a="http://schemas.openxmlformats.org/drawingml/2006/main" xmlns:p="http://schemas.openxmlformats.org/presentationml/2006/main" xmlns:r="http://schemas.openxmlformats.org/officeDocument/2006/relationships">
+<p:sld xmlns:a="http://schemas.openxmlformats.org/drawingml/2006/main" xmlns:r="http://schemas.openxmlformats.org/officeDocument/2006/relationships" xmlns:p="http://schemas.openxmlformats.org/presentationml/2006/main">
   <p:cSld>
     <p:bg>
       <p:bgPr>
@@ -19749,7 +19848,14 @@
         <p:cNvGrpSpPr/>
         <p:nvPr/>
       </p:nvGrpSpPr>
-      <p:grpSpPr/>
+      <p:grpSpPr>
+        <a:xfrm>
+          <a:off x="0" y="0"/>
+          <a:ext cx="0" cy="0"/>
+          <a:chOff x="0" y="0"/>
+          <a:chExt cx="0" cy="0"/>
+        </a:xfrm>
+      </p:grpSpPr>
       <p:sp>
         <p:nvSpPr>
           <p:cNvPr id="2" name="Rectangle 1"/>
@@ -19790,6 +19896,7 @@
           <a:lstStyle/>
           <a:p>
             <a:pPr algn="ctr"/>
+            <a:endParaRPr/>
           </a:p>
         </p:txBody>
       </p:sp>
@@ -19810,7 +19917,7 @@
           <a:noFill/>
         </p:spPr>
         <p:txBody>
-          <a:bodyPr wrap="none" lIns="0" rIns="0" tIns="0" bIns="0">
+          <a:bodyPr wrap="none" lIns="0" tIns="0" rIns="0" bIns="0">
             <a:spAutoFit/>
           </a:bodyPr>
           <a:lstStyle/>
@@ -19855,7 +19962,7 @@
           <a:noFill/>
         </p:spPr>
         <p:txBody>
-          <a:bodyPr wrap="none" lIns="0" rIns="0" tIns="0" bIns="0">
+          <a:bodyPr wrap="none" lIns="0" tIns="0" rIns="0" bIns="0">
             <a:spAutoFit/>
           </a:bodyPr>
           <a:lstStyle/>
@@ -19900,7 +20007,7 @@
           <a:noFill/>
         </p:spPr>
         <p:txBody>
-          <a:bodyPr wrap="none" lIns="0" rIns="0" tIns="0" bIns="0">
+          <a:bodyPr wrap="none" lIns="0" tIns="0" rIns="0" bIns="0">
             <a:spAutoFit/>
           </a:bodyPr>
           <a:lstStyle/>
@@ -19970,6 +20077,7 @@
           <a:lstStyle/>
           <a:p>
             <a:pPr algn="ctr"/>
+            <a:endParaRPr/>
           </a:p>
         </p:txBody>
       </p:sp>
@@ -20015,6 +20123,7 @@
           <a:lstStyle/>
           <a:p>
             <a:pPr algn="ctr"/>
+            <a:endParaRPr/>
           </a:p>
         </p:txBody>
       </p:sp>
@@ -20035,7 +20144,7 @@
           <a:noFill/>
         </p:spPr>
         <p:txBody>
-          <a:bodyPr wrap="none" lIns="0" rIns="0" tIns="0" bIns="0">
+          <a:bodyPr wrap="none" lIns="0" tIns="0" rIns="0" bIns="0">
             <a:spAutoFit/>
           </a:bodyPr>
           <a:lstStyle/>
@@ -20080,7 +20189,7 @@
           <a:noFill/>
         </p:spPr>
         <p:txBody>
-          <a:bodyPr wrap="none" lIns="0" rIns="0" tIns="0" bIns="0">
+          <a:bodyPr wrap="none" lIns="0" tIns="0" rIns="0" bIns="0">
             <a:spAutoFit/>
           </a:bodyPr>
           <a:lstStyle/>
@@ -20150,6 +20259,7 @@
           <a:lstStyle/>
           <a:p>
             <a:pPr algn="ctr"/>
+            <a:endParaRPr/>
           </a:p>
         </p:txBody>
       </p:sp>
@@ -20170,7 +20280,7 @@
           <a:noFill/>
         </p:spPr>
         <p:txBody>
-          <a:bodyPr wrap="none" lIns="0" rIns="0" tIns="0" bIns="0">
+          <a:bodyPr wrap="none" lIns="0" tIns="0" rIns="0" bIns="0">
             <a:spAutoFit/>
           </a:bodyPr>
           <a:lstStyle/>
@@ -20215,7 +20325,7 @@
           <a:noFill/>
         </p:spPr>
         <p:txBody>
-          <a:bodyPr wrap="none" lIns="0" rIns="0" tIns="0" bIns="0">
+          <a:bodyPr wrap="none" lIns="0" tIns="0" rIns="0" bIns="0">
             <a:spAutoFit/>
           </a:bodyPr>
           <a:lstStyle/>
@@ -20285,6 +20395,7 @@
           <a:lstStyle/>
           <a:p>
             <a:pPr algn="ctr"/>
+            <a:endParaRPr/>
           </a:p>
         </p:txBody>
       </p:sp>
@@ -20305,7 +20416,7 @@
           <a:noFill/>
         </p:spPr>
         <p:txBody>
-          <a:bodyPr wrap="none" lIns="0" rIns="0" tIns="0" bIns="0">
+          <a:bodyPr wrap="none" lIns="0" tIns="0" rIns="0" bIns="0">
             <a:spAutoFit/>
           </a:bodyPr>
           <a:lstStyle/>
@@ -20350,7 +20461,7 @@
           <a:noFill/>
         </p:spPr>
         <p:txBody>
-          <a:bodyPr wrap="none" lIns="0" rIns="0" tIns="0" bIns="0">
+          <a:bodyPr wrap="none" lIns="0" tIns="0" rIns="0" bIns="0">
             <a:spAutoFit/>
           </a:bodyPr>
           <a:lstStyle/>
@@ -20420,6 +20531,7 @@
           <a:lstStyle/>
           <a:p>
             <a:pPr algn="ctr"/>
+            <a:endParaRPr/>
           </a:p>
         </p:txBody>
       </p:sp>
@@ -20440,7 +20552,7 @@
           <a:noFill/>
         </p:spPr>
         <p:txBody>
-          <a:bodyPr wrap="none" lIns="0" rIns="0" tIns="0" bIns="0">
+          <a:bodyPr wrap="none" lIns="0" tIns="0" rIns="0" bIns="0">
             <a:spAutoFit/>
           </a:bodyPr>
           <a:lstStyle/>
@@ -20543,6 +20655,7 @@
           <a:lstStyle/>
           <a:p>
             <a:pPr algn="ctr"/>
+            <a:endParaRPr/>
           </a:p>
         </p:txBody>
       </p:sp>
@@ -20588,6 +20701,7 @@
           <a:lstStyle/>
           <a:p>
             <a:pPr algn="ctr"/>
+            <a:endParaRPr/>
           </a:p>
         </p:txBody>
       </p:sp>
@@ -20608,7 +20722,7 @@
           <a:noFill/>
         </p:spPr>
         <p:txBody>
-          <a:bodyPr wrap="none" lIns="0" rIns="0" tIns="0" bIns="0">
+          <a:bodyPr wrap="none" lIns="0" tIns="0" rIns="0" bIns="0">
             <a:spAutoFit/>
           </a:bodyPr>
           <a:lstStyle/>
@@ -20711,6 +20825,7 @@
           <a:lstStyle/>
           <a:p>
             <a:pPr algn="ctr"/>
+            <a:endParaRPr/>
           </a:p>
         </p:txBody>
       </p:sp>
@@ -20756,6 +20871,7 @@
           <a:lstStyle/>
           <a:p>
             <a:pPr algn="ctr"/>
+            <a:endParaRPr/>
           </a:p>
         </p:txBody>
       </p:sp>
@@ -20776,7 +20892,7 @@
           <a:noFill/>
         </p:spPr>
         <p:txBody>
-          <a:bodyPr wrap="none" lIns="0" rIns="0" tIns="0" bIns="0">
+          <a:bodyPr wrap="none" lIns="0" tIns="0" rIns="0" bIns="0">
             <a:spAutoFit/>
           </a:bodyPr>
           <a:lstStyle/>
@@ -20879,6 +20995,7 @@
           <a:lstStyle/>
           <a:p>
             <a:pPr algn="ctr"/>
+            <a:endParaRPr/>
           </a:p>
         </p:txBody>
       </p:sp>
@@ -20924,6 +21041,7 @@
           <a:lstStyle/>
           <a:p>
             <a:pPr algn="ctr"/>
+            <a:endParaRPr/>
           </a:p>
         </p:txBody>
       </p:sp>
@@ -20944,7 +21062,7 @@
           <a:noFill/>
         </p:spPr>
         <p:txBody>
-          <a:bodyPr wrap="none" lIns="0" rIns="0" tIns="0" bIns="0">
+          <a:bodyPr wrap="none" lIns="0" tIns="0" rIns="0" bIns="0">
             <a:spAutoFit/>
           </a:bodyPr>
           <a:lstStyle/>
@@ -21014,6 +21132,7 @@
           <a:lstStyle/>
           <a:p>
             <a:pPr algn="ctr"/>
+            <a:endParaRPr/>
           </a:p>
         </p:txBody>
       </p:sp>
@@ -21034,7 +21153,7 @@
           <a:noFill/>
         </p:spPr>
         <p:txBody>
-          <a:bodyPr wrap="none" lIns="0" rIns="0" tIns="0" bIns="0">
+          <a:bodyPr wrap="none" lIns="0" tIns="0" rIns="0" bIns="0">
             <a:spAutoFit/>
           </a:bodyPr>
           <a:lstStyle/>
@@ -21079,7 +21198,7 @@
           <a:noFill/>
         </p:spPr>
         <p:txBody>
-          <a:bodyPr wrap="none" lIns="0" rIns="0" tIns="0" bIns="0">
+          <a:bodyPr wrap="none" lIns="0" tIns="0" rIns="0" bIns="0">
             <a:spAutoFit/>
           </a:bodyPr>
           <a:lstStyle/>
@@ -21124,7 +21243,7 @@
           <a:noFill/>
         </p:spPr>
         <p:txBody>
-          <a:bodyPr wrap="none" lIns="0" rIns="0" tIns="0" bIns="0">
+          <a:bodyPr wrap="none" lIns="0" tIns="0" rIns="0" bIns="0">
             <a:spAutoFit/>
           </a:bodyPr>
           <a:lstStyle/>
@@ -21161,7 +21280,7 @@
 </file>
 
 <file path=ppt/slides/slide19.xml><?xml version="1.0" encoding="utf-8"?>
-<p:sld xmlns:a="http://schemas.openxmlformats.org/drawingml/2006/main" xmlns:p="http://schemas.openxmlformats.org/presentationml/2006/main" xmlns:r="http://schemas.openxmlformats.org/officeDocument/2006/relationships">
+<p:sld xmlns:a="http://schemas.openxmlformats.org/drawingml/2006/main" xmlns:r="http://schemas.openxmlformats.org/officeDocument/2006/relationships" xmlns:p="http://schemas.openxmlformats.org/presentationml/2006/main">
   <p:cSld>
     <p:bg>
       <p:bgPr>
@@ -21177,7 +21296,14 @@
         <p:cNvGrpSpPr/>
         <p:nvPr/>
       </p:nvGrpSpPr>
-      <p:grpSpPr/>
+      <p:grpSpPr>
+        <a:xfrm>
+          <a:off x="0" y="0"/>
+          <a:ext cx="0" cy="0"/>
+          <a:chOff x="0" y="0"/>
+          <a:chExt cx="0" cy="0"/>
+        </a:xfrm>
+      </p:grpSpPr>
       <p:sp>
         <p:nvSpPr>
           <p:cNvPr id="2" name="Rectangle 1"/>
@@ -21218,6 +21344,7 @@
           <a:lstStyle/>
           <a:p>
             <a:pPr algn="ctr"/>
+            <a:endParaRPr/>
           </a:p>
         </p:txBody>
       </p:sp>
@@ -21238,7 +21365,7 @@
           <a:noFill/>
         </p:spPr>
         <p:txBody>
-          <a:bodyPr wrap="none" lIns="0" rIns="0" tIns="0" bIns="0">
+          <a:bodyPr wrap="none" lIns="0" tIns="0" rIns="0" bIns="0">
             <a:spAutoFit/>
           </a:bodyPr>
           <a:lstStyle/>
@@ -21283,7 +21410,7 @@
           <a:noFill/>
         </p:spPr>
         <p:txBody>
-          <a:bodyPr wrap="none" lIns="0" rIns="0" tIns="0" bIns="0">
+          <a:bodyPr wrap="none" lIns="0" tIns="0" rIns="0" bIns="0">
             <a:spAutoFit/>
           </a:bodyPr>
           <a:lstStyle/>
@@ -21328,7 +21455,7 @@
           <a:noFill/>
         </p:spPr>
         <p:txBody>
-          <a:bodyPr wrap="none" lIns="0" rIns="0" tIns="0" bIns="0">
+          <a:bodyPr wrap="none" lIns="0" tIns="0" rIns="0" bIns="0">
             <a:spAutoFit/>
           </a:bodyPr>
           <a:lstStyle/>
@@ -21398,6 +21525,7 @@
           <a:lstStyle/>
           <a:p>
             <a:pPr algn="ctr"/>
+            <a:endParaRPr/>
           </a:p>
         </p:txBody>
       </p:sp>
@@ -21443,6 +21571,7 @@
           <a:lstStyle/>
           <a:p>
             <a:pPr algn="ctr"/>
+            <a:endParaRPr/>
           </a:p>
         </p:txBody>
       </p:sp>
@@ -21463,7 +21592,7 @@
           <a:noFill/>
         </p:spPr>
         <p:txBody>
-          <a:bodyPr wrap="none" lIns="0" rIns="0" tIns="0" bIns="0">
+          <a:bodyPr wrap="none" lIns="0" tIns="0" rIns="0" bIns="0">
             <a:spAutoFit/>
           </a:bodyPr>
           <a:lstStyle/>
@@ -21508,7 +21637,7 @@
           <a:noFill/>
         </p:spPr>
         <p:txBody>
-          <a:bodyPr wrap="none" lIns="0" rIns="0" tIns="0" bIns="0">
+          <a:bodyPr wrap="none" lIns="0" tIns="0" rIns="0" bIns="0">
             <a:spAutoFit/>
           </a:bodyPr>
           <a:lstStyle/>
@@ -21578,6 +21707,7 @@
           <a:lstStyle/>
           <a:p>
             <a:pPr algn="ctr"/>
+            <a:endParaRPr/>
           </a:p>
         </p:txBody>
       </p:sp>
@@ -21598,7 +21728,7 @@
           <a:noFill/>
         </p:spPr>
         <p:txBody>
-          <a:bodyPr wrap="none" lIns="0" rIns="0" tIns="0" bIns="0">
+          <a:bodyPr wrap="none" lIns="0" tIns="0" rIns="0" bIns="0">
             <a:spAutoFit/>
           </a:bodyPr>
           <a:lstStyle/>
@@ -21643,7 +21773,7 @@
           <a:noFill/>
         </p:spPr>
         <p:txBody>
-          <a:bodyPr wrap="none" lIns="0" rIns="0" tIns="0" bIns="0">
+          <a:bodyPr wrap="none" lIns="0" tIns="0" rIns="0" bIns="0">
             <a:spAutoFit/>
           </a:bodyPr>
           <a:lstStyle/>
@@ -21713,6 +21843,7 @@
           <a:lstStyle/>
           <a:p>
             <a:pPr algn="ctr"/>
+            <a:endParaRPr/>
           </a:p>
         </p:txBody>
       </p:sp>
@@ -21733,7 +21864,7 @@
           <a:noFill/>
         </p:spPr>
         <p:txBody>
-          <a:bodyPr wrap="none" lIns="0" rIns="0" tIns="0" bIns="0">
+          <a:bodyPr wrap="none" lIns="0" tIns="0" rIns="0" bIns="0">
             <a:spAutoFit/>
           </a:bodyPr>
           <a:lstStyle/>
@@ -21778,7 +21909,7 @@
           <a:noFill/>
         </p:spPr>
         <p:txBody>
-          <a:bodyPr wrap="none" lIns="0" rIns="0" tIns="0" bIns="0">
+          <a:bodyPr wrap="none" lIns="0" tIns="0" rIns="0" bIns="0">
             <a:spAutoFit/>
           </a:bodyPr>
           <a:lstStyle/>
@@ -21823,7 +21954,7 @@
           <a:noFill/>
         </p:spPr>
         <p:txBody>
-          <a:bodyPr wrap="none" lIns="0" rIns="0" tIns="0" bIns="0">
+          <a:bodyPr wrap="none" lIns="0" tIns="0" rIns="0" bIns="0">
             <a:spAutoFit/>
           </a:bodyPr>
           <a:lstStyle/>
@@ -21868,7 +21999,7 @@
           <a:noFill/>
         </p:spPr>
         <p:txBody>
-          <a:bodyPr wrap="none" lIns="0" rIns="0" tIns="0" bIns="0">
+          <a:bodyPr wrap="none" lIns="0" tIns="0" rIns="0" bIns="0">
             <a:spAutoFit/>
           </a:bodyPr>
           <a:lstStyle/>
@@ -21913,7 +22044,7 @@
           <a:noFill/>
         </p:spPr>
         <p:txBody>
-          <a:bodyPr wrap="none" lIns="0" rIns="0" tIns="0" bIns="0">
+          <a:bodyPr wrap="none" lIns="0" tIns="0" rIns="0" bIns="0">
             <a:spAutoFit/>
           </a:bodyPr>
           <a:lstStyle/>
@@ -21958,7 +22089,7 @@
           <a:noFill/>
         </p:spPr>
         <p:txBody>
-          <a:bodyPr wrap="none" lIns="0" rIns="0" tIns="0" bIns="0">
+          <a:bodyPr wrap="none" lIns="0" tIns="0" rIns="0" bIns="0">
             <a:spAutoFit/>
           </a:bodyPr>
           <a:lstStyle/>
@@ -22003,7 +22134,7 @@
           <a:noFill/>
         </p:spPr>
         <p:txBody>
-          <a:bodyPr wrap="none" lIns="0" rIns="0" tIns="0" bIns="0">
+          <a:bodyPr wrap="none" lIns="0" tIns="0" rIns="0" bIns="0">
             <a:spAutoFit/>
           </a:bodyPr>
           <a:lstStyle/>
@@ -22073,6 +22204,7 @@
           <a:lstStyle/>
           <a:p>
             <a:pPr algn="ctr"/>
+            <a:endParaRPr/>
           </a:p>
         </p:txBody>
       </p:sp>
@@ -22093,7 +22225,7 @@
           <a:noFill/>
         </p:spPr>
         <p:txBody>
-          <a:bodyPr wrap="none" lIns="0" rIns="0" tIns="0" bIns="0">
+          <a:bodyPr wrap="none" lIns="0" tIns="0" rIns="0" bIns="0">
             <a:spAutoFit/>
           </a:bodyPr>
           <a:lstStyle/>
@@ -22138,7 +22270,7 @@
           <a:noFill/>
         </p:spPr>
         <p:txBody>
-          <a:bodyPr wrap="none" lIns="0" rIns="0" tIns="0" bIns="0">
+          <a:bodyPr wrap="none" lIns="0" tIns="0" rIns="0" bIns="0">
             <a:spAutoFit/>
           </a:bodyPr>
           <a:lstStyle/>
@@ -22183,7 +22315,7 @@
           <a:noFill/>
         </p:spPr>
         <p:txBody>
-          <a:bodyPr wrap="none" lIns="0" rIns="0" tIns="0" bIns="0">
+          <a:bodyPr wrap="none" lIns="0" tIns="0" rIns="0" bIns="0">
             <a:spAutoFit/>
           </a:bodyPr>
           <a:lstStyle/>
@@ -22220,7 +22352,7 @@
 </file>
 
 <file path=ppt/slides/slide2.xml><?xml version="1.0" encoding="utf-8"?>
-<p:sld xmlns:a="http://schemas.openxmlformats.org/drawingml/2006/main" xmlns:p="http://schemas.openxmlformats.org/presentationml/2006/main" xmlns:r="http://schemas.openxmlformats.org/officeDocument/2006/relationships">
+<p:sld xmlns:a="http://schemas.openxmlformats.org/drawingml/2006/main" xmlns:r="http://schemas.openxmlformats.org/officeDocument/2006/relationships" xmlns:p="http://schemas.openxmlformats.org/presentationml/2006/main">
   <p:cSld>
     <p:bg>
       <p:bgPr>
@@ -22236,7 +22368,14 @@
         <p:cNvGrpSpPr/>
         <p:nvPr/>
       </p:nvGrpSpPr>
-      <p:grpSpPr/>
+      <p:grpSpPr>
+        <a:xfrm>
+          <a:off x="0" y="0"/>
+          <a:ext cx="0" cy="0"/>
+          <a:chOff x="0" y="0"/>
+          <a:chExt cx="0" cy="0"/>
+        </a:xfrm>
+      </p:grpSpPr>
       <p:sp>
         <p:nvSpPr>
           <p:cNvPr id="2" name="Rectangle 1"/>
@@ -22277,6 +22416,7 @@
           <a:lstStyle/>
           <a:p>
             <a:pPr algn="ctr"/>
+            <a:endParaRPr/>
           </a:p>
         </p:txBody>
       </p:sp>
@@ -22297,7 +22437,7 @@
           <a:noFill/>
         </p:spPr>
         <p:txBody>
-          <a:bodyPr wrap="none" lIns="0" rIns="0" tIns="0" bIns="0">
+          <a:bodyPr wrap="none" lIns="0" tIns="0" rIns="0" bIns="0">
             <a:spAutoFit/>
           </a:bodyPr>
           <a:lstStyle/>
@@ -22342,7 +22482,7 @@
           <a:noFill/>
         </p:spPr>
         <p:txBody>
-          <a:bodyPr wrap="none" lIns="0" rIns="0" tIns="0" bIns="0">
+          <a:bodyPr wrap="none" lIns="0" tIns="0" rIns="0" bIns="0">
             <a:spAutoFit/>
           </a:bodyPr>
           <a:lstStyle/>
@@ -22387,7 +22527,7 @@
           <a:noFill/>
         </p:spPr>
         <p:txBody>
-          <a:bodyPr wrap="none" lIns="0" rIns="0" tIns="0" bIns="0">
+          <a:bodyPr wrap="none" lIns="0" tIns="0" rIns="0" bIns="0">
             <a:spAutoFit/>
           </a:bodyPr>
           <a:lstStyle/>
@@ -22457,6 +22597,7 @@
           <a:lstStyle/>
           <a:p>
             <a:pPr algn="ctr"/>
+            <a:endParaRPr/>
           </a:p>
         </p:txBody>
       </p:sp>
@@ -22502,6 +22643,7 @@
           <a:lstStyle/>
           <a:p>
             <a:pPr algn="ctr"/>
+            <a:endParaRPr/>
           </a:p>
         </p:txBody>
       </p:sp>
@@ -22522,7 +22664,7 @@
           <a:noFill/>
         </p:spPr>
         <p:txBody>
-          <a:bodyPr wrap="none" lIns="0" rIns="0" tIns="0" bIns="0">
+          <a:bodyPr wrap="none" lIns="0" tIns="0" rIns="0" bIns="0">
             <a:spAutoFit/>
           </a:bodyPr>
           <a:lstStyle/>
@@ -22567,7 +22709,7 @@
           <a:noFill/>
         </p:spPr>
         <p:txBody>
-          <a:bodyPr wrap="none" lIns="0" rIns="0" tIns="0" bIns="0">
+          <a:bodyPr wrap="none" lIns="0" tIns="0" rIns="0" bIns="0">
             <a:spAutoFit/>
           </a:bodyPr>
           <a:lstStyle/>
@@ -22637,6 +22779,7 @@
           <a:lstStyle/>
           <a:p>
             <a:pPr algn="ctr"/>
+            <a:endParaRPr/>
           </a:p>
         </p:txBody>
       </p:sp>
@@ -22657,7 +22800,7 @@
           <a:noFill/>
         </p:spPr>
         <p:txBody>
-          <a:bodyPr wrap="none" lIns="0" rIns="0" tIns="0" bIns="0">
+          <a:bodyPr wrap="none" lIns="0" tIns="0" rIns="0" bIns="0">
             <a:spAutoFit/>
           </a:bodyPr>
           <a:lstStyle/>
@@ -22702,7 +22845,7 @@
           <a:noFill/>
         </p:spPr>
         <p:txBody>
-          <a:bodyPr wrap="none" lIns="0" rIns="0" tIns="0" bIns="0">
+          <a:bodyPr wrap="none" lIns="0" tIns="0" rIns="0" bIns="0">
             <a:spAutoFit/>
           </a:bodyPr>
           <a:lstStyle/>
@@ -22772,6 +22915,7 @@
           <a:lstStyle/>
           <a:p>
             <a:pPr algn="ctr"/>
+            <a:endParaRPr/>
           </a:p>
         </p:txBody>
       </p:sp>
@@ -22792,7 +22936,7 @@
           <a:noFill/>
         </p:spPr>
         <p:txBody>
-          <a:bodyPr wrap="none" lIns="0" rIns="0" tIns="0" bIns="0">
+          <a:bodyPr wrap="none" lIns="0" tIns="0" rIns="0" bIns="0">
             <a:spAutoFit/>
           </a:bodyPr>
           <a:lstStyle/>
@@ -22837,7 +22981,7 @@
           <a:noFill/>
         </p:spPr>
         <p:txBody>
-          <a:bodyPr wrap="none" lIns="0" rIns="0" tIns="0" bIns="0">
+          <a:bodyPr wrap="none" lIns="0" tIns="0" rIns="0" bIns="0">
             <a:spAutoFit/>
           </a:bodyPr>
           <a:lstStyle/>
@@ -22907,6 +23051,7 @@
           <a:lstStyle/>
           <a:p>
             <a:pPr algn="ctr"/>
+            <a:endParaRPr/>
           </a:p>
         </p:txBody>
       </p:sp>
@@ -22927,7 +23072,7 @@
           <a:noFill/>
         </p:spPr>
         <p:txBody>
-          <a:bodyPr wrap="none" lIns="0" rIns="0" tIns="0" bIns="0">
+          <a:bodyPr wrap="none" lIns="0" tIns="0" rIns="0" bIns="0">
             <a:spAutoFit/>
           </a:bodyPr>
           <a:lstStyle/>
@@ -23030,6 +23175,7 @@
           <a:lstStyle/>
           <a:p>
             <a:pPr algn="ctr"/>
+            <a:endParaRPr/>
           </a:p>
         </p:txBody>
       </p:sp>
@@ -23075,6 +23221,7 @@
           <a:lstStyle/>
           <a:p>
             <a:pPr algn="ctr"/>
+            <a:endParaRPr/>
           </a:p>
         </p:txBody>
       </p:sp>
@@ -23095,7 +23242,7 @@
           <a:noFill/>
         </p:spPr>
         <p:txBody>
-          <a:bodyPr wrap="none" lIns="0" rIns="0" tIns="0" bIns="0">
+          <a:bodyPr wrap="none" lIns="0" tIns="0" rIns="0" bIns="0">
             <a:spAutoFit/>
           </a:bodyPr>
           <a:lstStyle/>
@@ -23198,6 +23345,7 @@
           <a:lstStyle/>
           <a:p>
             <a:pPr algn="ctr"/>
+            <a:endParaRPr/>
           </a:p>
         </p:txBody>
       </p:sp>
@@ -23243,6 +23391,7 @@
           <a:lstStyle/>
           <a:p>
             <a:pPr algn="ctr"/>
+            <a:endParaRPr/>
           </a:p>
         </p:txBody>
       </p:sp>
@@ -23263,7 +23412,7 @@
           <a:noFill/>
         </p:spPr>
         <p:txBody>
-          <a:bodyPr wrap="none" lIns="0" rIns="0" tIns="0" bIns="0">
+          <a:bodyPr wrap="none" lIns="0" tIns="0" rIns="0" bIns="0">
             <a:spAutoFit/>
           </a:bodyPr>
           <a:lstStyle/>
@@ -23333,6 +23482,7 @@
           <a:lstStyle/>
           <a:p>
             <a:pPr algn="ctr"/>
+            <a:endParaRPr/>
           </a:p>
         </p:txBody>
       </p:sp>
@@ -23353,7 +23503,7 @@
           <a:noFill/>
         </p:spPr>
         <p:txBody>
-          <a:bodyPr wrap="none" lIns="0" rIns="0" tIns="0" bIns="0">
+          <a:bodyPr wrap="none" lIns="0" tIns="0" rIns="0" bIns="0">
             <a:spAutoFit/>
           </a:bodyPr>
           <a:lstStyle/>
@@ -23398,7 +23548,7 @@
           <a:noFill/>
         </p:spPr>
         <p:txBody>
-          <a:bodyPr wrap="none" lIns="0" rIns="0" tIns="0" bIns="0">
+          <a:bodyPr wrap="none" lIns="0" tIns="0" rIns="0" bIns="0">
             <a:spAutoFit/>
           </a:bodyPr>
           <a:lstStyle/>
@@ -23443,7 +23593,7 @@
           <a:noFill/>
         </p:spPr>
         <p:txBody>
-          <a:bodyPr wrap="none" lIns="0" rIns="0" tIns="0" bIns="0">
+          <a:bodyPr wrap="none" lIns="0" tIns="0" rIns="0" bIns="0">
             <a:spAutoFit/>
           </a:bodyPr>
           <a:lstStyle/>
@@ -23480,7 +23630,7 @@
 </file>
 
 <file path=ppt/slides/slide20.xml><?xml version="1.0" encoding="utf-8"?>
-<p:sld xmlns:a="http://schemas.openxmlformats.org/drawingml/2006/main" xmlns:p="http://schemas.openxmlformats.org/presentationml/2006/main" xmlns:r="http://schemas.openxmlformats.org/officeDocument/2006/relationships">
+<p:sld xmlns:a="http://schemas.openxmlformats.org/drawingml/2006/main" xmlns:r="http://schemas.openxmlformats.org/officeDocument/2006/relationships" xmlns:p="http://schemas.openxmlformats.org/presentationml/2006/main">
   <p:cSld>
     <p:bg>
       <p:bgPr>
@@ -23496,7 +23646,14 @@
         <p:cNvGrpSpPr/>
         <p:nvPr/>
       </p:nvGrpSpPr>
-      <p:grpSpPr/>
+      <p:grpSpPr>
+        <a:xfrm>
+          <a:off x="0" y="0"/>
+          <a:ext cx="0" cy="0"/>
+          <a:chOff x="0" y="0"/>
+          <a:chExt cx="0" cy="0"/>
+        </a:xfrm>
+      </p:grpSpPr>
       <p:sp>
         <p:nvSpPr>
           <p:cNvPr id="2" name="Rectangle 1"/>
@@ -23537,6 +23694,7 @@
           <a:lstStyle/>
           <a:p>
             <a:pPr algn="ctr"/>
+            <a:endParaRPr/>
           </a:p>
         </p:txBody>
       </p:sp>
@@ -23557,7 +23715,7 @@
           <a:noFill/>
         </p:spPr>
         <p:txBody>
-          <a:bodyPr wrap="none" lIns="0" rIns="0" tIns="0" bIns="0">
+          <a:bodyPr wrap="none" lIns="0" tIns="0" rIns="0" bIns="0">
             <a:spAutoFit/>
           </a:bodyPr>
           <a:lstStyle/>
@@ -23602,7 +23760,7 @@
           <a:noFill/>
         </p:spPr>
         <p:txBody>
-          <a:bodyPr wrap="none" lIns="0" rIns="0" tIns="0" bIns="0">
+          <a:bodyPr wrap="none" lIns="0" tIns="0" rIns="0" bIns="0">
             <a:spAutoFit/>
           </a:bodyPr>
           <a:lstStyle/>
@@ -23647,7 +23805,7 @@
           <a:noFill/>
         </p:spPr>
         <p:txBody>
-          <a:bodyPr wrap="none" lIns="0" rIns="0" tIns="0" bIns="0">
+          <a:bodyPr wrap="none" lIns="0" tIns="0" rIns="0" bIns="0">
             <a:spAutoFit/>
           </a:bodyPr>
           <a:lstStyle/>
@@ -23717,6 +23875,7 @@
           <a:lstStyle/>
           <a:p>
             <a:pPr algn="ctr"/>
+            <a:endParaRPr/>
           </a:p>
         </p:txBody>
       </p:sp>
@@ -23762,6 +23921,7 @@
           <a:lstStyle/>
           <a:p>
             <a:pPr algn="ctr"/>
+            <a:endParaRPr/>
           </a:p>
         </p:txBody>
       </p:sp>
@@ -23782,7 +23942,7 @@
           <a:noFill/>
         </p:spPr>
         <p:txBody>
-          <a:bodyPr wrap="none" lIns="0" rIns="0" tIns="0" bIns="0">
+          <a:bodyPr wrap="none" lIns="0" tIns="0" rIns="0" bIns="0">
             <a:spAutoFit/>
           </a:bodyPr>
           <a:lstStyle/>
@@ -23827,7 +23987,7 @@
           <a:noFill/>
         </p:spPr>
         <p:txBody>
-          <a:bodyPr wrap="none" lIns="0" rIns="0" tIns="0" bIns="0">
+          <a:bodyPr wrap="none" lIns="0" tIns="0" rIns="0" bIns="0">
             <a:spAutoFit/>
           </a:bodyPr>
           <a:lstStyle/>
@@ -23897,6 +24057,7 @@
           <a:lstStyle/>
           <a:p>
             <a:pPr algn="ctr"/>
+            <a:endParaRPr/>
           </a:p>
         </p:txBody>
       </p:sp>
@@ -23917,7 +24078,7 @@
           <a:noFill/>
         </p:spPr>
         <p:txBody>
-          <a:bodyPr wrap="none" lIns="0" rIns="0" tIns="0" bIns="0">
+          <a:bodyPr wrap="none" lIns="0" tIns="0" rIns="0" bIns="0">
             <a:spAutoFit/>
           </a:bodyPr>
           <a:lstStyle/>
@@ -23962,7 +24123,7 @@
           <a:noFill/>
         </p:spPr>
         <p:txBody>
-          <a:bodyPr wrap="none" lIns="0" rIns="0" tIns="0" bIns="0">
+          <a:bodyPr wrap="none" lIns="0" tIns="0" rIns="0" bIns="0">
             <a:spAutoFit/>
           </a:bodyPr>
           <a:lstStyle/>
@@ -24032,6 +24193,7 @@
           <a:lstStyle/>
           <a:p>
             <a:pPr algn="ctr"/>
+            <a:endParaRPr/>
           </a:p>
         </p:txBody>
       </p:sp>
@@ -24052,7 +24214,7 @@
           <a:noFill/>
         </p:spPr>
         <p:txBody>
-          <a:bodyPr wrap="none" lIns="0" rIns="0" tIns="0" bIns="0">
+          <a:bodyPr wrap="none" lIns="0" tIns="0" rIns="0" bIns="0">
             <a:spAutoFit/>
           </a:bodyPr>
           <a:lstStyle/>
@@ -24097,7 +24259,7 @@
           <a:noFill/>
         </p:spPr>
         <p:txBody>
-          <a:bodyPr wrap="none" lIns="0" rIns="0" tIns="0" bIns="0">
+          <a:bodyPr wrap="none" lIns="0" tIns="0" rIns="0" bIns="0">
             <a:spAutoFit/>
           </a:bodyPr>
           <a:lstStyle/>
@@ -24167,6 +24329,7 @@
           <a:lstStyle/>
           <a:p>
             <a:pPr algn="ctr"/>
+            <a:endParaRPr/>
           </a:p>
         </p:txBody>
       </p:sp>
@@ -24187,7 +24350,7 @@
           <a:noFill/>
         </p:spPr>
         <p:txBody>
-          <a:bodyPr wrap="none" lIns="0" rIns="0" tIns="0" bIns="0">
+          <a:bodyPr wrap="none" lIns="0" tIns="0" rIns="0" bIns="0">
             <a:spAutoFit/>
           </a:bodyPr>
           <a:lstStyle/>
@@ -24290,6 +24453,7 @@
           <a:lstStyle/>
           <a:p>
             <a:pPr algn="ctr"/>
+            <a:endParaRPr/>
           </a:p>
         </p:txBody>
       </p:sp>
@@ -24335,6 +24499,7 @@
           <a:lstStyle/>
           <a:p>
             <a:pPr algn="ctr"/>
+            <a:endParaRPr/>
           </a:p>
         </p:txBody>
       </p:sp>
@@ -24355,7 +24520,7 @@
           <a:noFill/>
         </p:spPr>
         <p:txBody>
-          <a:bodyPr wrap="none" lIns="0" rIns="0" tIns="0" bIns="0">
+          <a:bodyPr wrap="none" lIns="0" tIns="0" rIns="0" bIns="0">
             <a:spAutoFit/>
           </a:bodyPr>
           <a:lstStyle/>
@@ -24458,6 +24623,7 @@
           <a:lstStyle/>
           <a:p>
             <a:pPr algn="ctr"/>
+            <a:endParaRPr/>
           </a:p>
         </p:txBody>
       </p:sp>
@@ -24503,6 +24669,7 @@
           <a:lstStyle/>
           <a:p>
             <a:pPr algn="ctr"/>
+            <a:endParaRPr/>
           </a:p>
         </p:txBody>
       </p:sp>
@@ -24523,7 +24690,7 @@
           <a:noFill/>
         </p:spPr>
         <p:txBody>
-          <a:bodyPr wrap="none" lIns="0" rIns="0" tIns="0" bIns="0">
+          <a:bodyPr wrap="none" lIns="0" tIns="0" rIns="0" bIns="0">
             <a:spAutoFit/>
           </a:bodyPr>
           <a:lstStyle/>
@@ -24593,6 +24760,7 @@
           <a:lstStyle/>
           <a:p>
             <a:pPr algn="ctr"/>
+            <a:endParaRPr/>
           </a:p>
         </p:txBody>
       </p:sp>
@@ -24613,7 +24781,7 @@
           <a:noFill/>
         </p:spPr>
         <p:txBody>
-          <a:bodyPr wrap="none" lIns="0" rIns="0" tIns="0" bIns="0">
+          <a:bodyPr wrap="none" lIns="0" tIns="0" rIns="0" bIns="0">
             <a:spAutoFit/>
           </a:bodyPr>
           <a:lstStyle/>
@@ -24658,7 +24826,7 @@
           <a:noFill/>
         </p:spPr>
         <p:txBody>
-          <a:bodyPr wrap="none" lIns="0" rIns="0" tIns="0" bIns="0">
+          <a:bodyPr wrap="none" lIns="0" tIns="0" rIns="0" bIns="0">
             <a:spAutoFit/>
           </a:bodyPr>
           <a:lstStyle/>
@@ -24703,7 +24871,7 @@
           <a:noFill/>
         </p:spPr>
         <p:txBody>
-          <a:bodyPr wrap="none" lIns="0" rIns="0" tIns="0" bIns="0">
+          <a:bodyPr wrap="none" lIns="0" tIns="0" rIns="0" bIns="0">
             <a:spAutoFit/>
           </a:bodyPr>
           <a:lstStyle/>
@@ -24740,7 +24908,7 @@
 </file>
 
 <file path=ppt/slides/slide21.xml><?xml version="1.0" encoding="utf-8"?>
-<p:sld xmlns:a="http://schemas.openxmlformats.org/drawingml/2006/main" xmlns:p="http://schemas.openxmlformats.org/presentationml/2006/main" xmlns:r="http://schemas.openxmlformats.org/officeDocument/2006/relationships">
+<p:sld xmlns:a="http://schemas.openxmlformats.org/drawingml/2006/main" xmlns:r="http://schemas.openxmlformats.org/officeDocument/2006/relationships" xmlns:p="http://schemas.openxmlformats.org/presentationml/2006/main">
   <p:cSld>
     <p:bg>
       <p:bgPr>
@@ -24756,7 +24924,14 @@
         <p:cNvGrpSpPr/>
         <p:nvPr/>
       </p:nvGrpSpPr>
-      <p:grpSpPr/>
+      <p:grpSpPr>
+        <a:xfrm>
+          <a:off x="0" y="0"/>
+          <a:ext cx="0" cy="0"/>
+          <a:chOff x="0" y="0"/>
+          <a:chExt cx="0" cy="0"/>
+        </a:xfrm>
+      </p:grpSpPr>
       <p:sp>
         <p:nvSpPr>
           <p:cNvPr id="2" name="Rectangle 1"/>
@@ -24797,6 +24972,7 @@
           <a:lstStyle/>
           <a:p>
             <a:pPr algn="ctr"/>
+            <a:endParaRPr/>
           </a:p>
         </p:txBody>
       </p:sp>
@@ -24817,7 +24993,7 @@
           <a:noFill/>
         </p:spPr>
         <p:txBody>
-          <a:bodyPr wrap="none" lIns="0" rIns="0" tIns="0" bIns="0">
+          <a:bodyPr wrap="none" lIns="0" tIns="0" rIns="0" bIns="0">
             <a:spAutoFit/>
           </a:bodyPr>
           <a:lstStyle/>
@@ -24862,7 +25038,7 @@
           <a:noFill/>
         </p:spPr>
         <p:txBody>
-          <a:bodyPr wrap="none" lIns="0" rIns="0" tIns="0" bIns="0">
+          <a:bodyPr wrap="none" lIns="0" tIns="0" rIns="0" bIns="0">
             <a:spAutoFit/>
           </a:bodyPr>
           <a:lstStyle/>
@@ -24907,7 +25083,7 @@
           <a:noFill/>
         </p:spPr>
         <p:txBody>
-          <a:bodyPr wrap="none" lIns="0" rIns="0" tIns="0" bIns="0">
+          <a:bodyPr wrap="none" lIns="0" tIns="0" rIns="0" bIns="0">
             <a:spAutoFit/>
           </a:bodyPr>
           <a:lstStyle/>
@@ -24977,6 +25153,7 @@
           <a:lstStyle/>
           <a:p>
             <a:pPr algn="ctr"/>
+            <a:endParaRPr/>
           </a:p>
         </p:txBody>
       </p:sp>
@@ -25022,6 +25199,7 @@
           <a:lstStyle/>
           <a:p>
             <a:pPr algn="ctr"/>
+            <a:endParaRPr/>
           </a:p>
         </p:txBody>
       </p:sp>
@@ -25042,7 +25220,7 @@
           <a:noFill/>
         </p:spPr>
         <p:txBody>
-          <a:bodyPr wrap="none" lIns="0" rIns="0" tIns="0" bIns="0">
+          <a:bodyPr wrap="none" lIns="0" tIns="0" rIns="0" bIns="0">
             <a:spAutoFit/>
           </a:bodyPr>
           <a:lstStyle/>
@@ -25087,7 +25265,7 @@
           <a:noFill/>
         </p:spPr>
         <p:txBody>
-          <a:bodyPr wrap="none" lIns="0" rIns="0" tIns="0" bIns="0">
+          <a:bodyPr wrap="none" lIns="0" tIns="0" rIns="0" bIns="0">
             <a:spAutoFit/>
           </a:bodyPr>
           <a:lstStyle/>
@@ -25157,6 +25335,7 @@
           <a:lstStyle/>
           <a:p>
             <a:pPr algn="ctr"/>
+            <a:endParaRPr/>
           </a:p>
         </p:txBody>
       </p:sp>
@@ -25177,7 +25356,7 @@
           <a:noFill/>
         </p:spPr>
         <p:txBody>
-          <a:bodyPr wrap="none" lIns="0" rIns="0" tIns="0" bIns="0">
+          <a:bodyPr wrap="none" lIns="0" tIns="0" rIns="0" bIns="0">
             <a:spAutoFit/>
           </a:bodyPr>
           <a:lstStyle/>
@@ -25222,7 +25401,7 @@
           <a:noFill/>
         </p:spPr>
         <p:txBody>
-          <a:bodyPr wrap="none" lIns="0" rIns="0" tIns="0" bIns="0">
+          <a:bodyPr wrap="none" lIns="0" tIns="0" rIns="0" bIns="0">
             <a:spAutoFit/>
           </a:bodyPr>
           <a:lstStyle/>
@@ -25292,6 +25471,7 @@
           <a:lstStyle/>
           <a:p>
             <a:pPr algn="ctr"/>
+            <a:endParaRPr/>
           </a:p>
         </p:txBody>
       </p:sp>
@@ -25312,7 +25492,7 @@
           <a:noFill/>
         </p:spPr>
         <p:txBody>
-          <a:bodyPr wrap="none" lIns="0" rIns="0" tIns="0" bIns="0">
+          <a:bodyPr wrap="none" lIns="0" tIns="0" rIns="0" bIns="0">
             <a:spAutoFit/>
           </a:bodyPr>
           <a:lstStyle/>
@@ -25357,7 +25537,7 @@
           <a:noFill/>
         </p:spPr>
         <p:txBody>
-          <a:bodyPr wrap="none" lIns="0" rIns="0" tIns="0" bIns="0">
+          <a:bodyPr wrap="none" lIns="0" tIns="0" rIns="0" bIns="0">
             <a:spAutoFit/>
           </a:bodyPr>
           <a:lstStyle/>
@@ -25427,6 +25607,7 @@
           <a:lstStyle/>
           <a:p>
             <a:pPr algn="ctr"/>
+            <a:endParaRPr/>
           </a:p>
         </p:txBody>
       </p:sp>
@@ -25447,7 +25628,7 @@
           <a:noFill/>
         </p:spPr>
         <p:txBody>
-          <a:bodyPr wrap="none" lIns="0" rIns="0" tIns="0" bIns="0">
+          <a:bodyPr wrap="none" lIns="0" tIns="0" rIns="0" bIns="0">
             <a:spAutoFit/>
           </a:bodyPr>
           <a:lstStyle/>
@@ -25550,6 +25731,7 @@
           <a:lstStyle/>
           <a:p>
             <a:pPr algn="ctr"/>
+            <a:endParaRPr/>
           </a:p>
         </p:txBody>
       </p:sp>
@@ -25595,6 +25777,7 @@
           <a:lstStyle/>
           <a:p>
             <a:pPr algn="ctr"/>
+            <a:endParaRPr/>
           </a:p>
         </p:txBody>
       </p:sp>
@@ -25615,7 +25798,7 @@
           <a:noFill/>
         </p:spPr>
         <p:txBody>
-          <a:bodyPr wrap="none" lIns="0" rIns="0" tIns="0" bIns="0">
+          <a:bodyPr wrap="none" lIns="0" tIns="0" rIns="0" bIns="0">
             <a:spAutoFit/>
           </a:bodyPr>
           <a:lstStyle/>
@@ -25718,6 +25901,7 @@
           <a:lstStyle/>
           <a:p>
             <a:pPr algn="ctr"/>
+            <a:endParaRPr/>
           </a:p>
         </p:txBody>
       </p:sp>
@@ -25763,6 +25947,7 @@
           <a:lstStyle/>
           <a:p>
             <a:pPr algn="ctr"/>
+            <a:endParaRPr/>
           </a:p>
         </p:txBody>
       </p:sp>
@@ -25783,7 +25968,7 @@
           <a:noFill/>
         </p:spPr>
         <p:txBody>
-          <a:bodyPr wrap="none" lIns="0" rIns="0" tIns="0" bIns="0">
+          <a:bodyPr wrap="none" lIns="0" tIns="0" rIns="0" bIns="0">
             <a:spAutoFit/>
           </a:bodyPr>
           <a:lstStyle/>
@@ -25853,6 +26038,7 @@
           <a:lstStyle/>
           <a:p>
             <a:pPr algn="ctr"/>
+            <a:endParaRPr/>
           </a:p>
         </p:txBody>
       </p:sp>
@@ -25873,7 +26059,7 @@
           <a:noFill/>
         </p:spPr>
         <p:txBody>
-          <a:bodyPr wrap="none" lIns="0" rIns="0" tIns="0" bIns="0">
+          <a:bodyPr wrap="none" lIns="0" tIns="0" rIns="0" bIns="0">
             <a:spAutoFit/>
           </a:bodyPr>
           <a:lstStyle/>
@@ -25918,7 +26104,7 @@
           <a:noFill/>
         </p:spPr>
         <p:txBody>
-          <a:bodyPr wrap="none" lIns="0" rIns="0" tIns="0" bIns="0">
+          <a:bodyPr wrap="none" lIns="0" tIns="0" rIns="0" bIns="0">
             <a:spAutoFit/>
           </a:bodyPr>
           <a:lstStyle/>
@@ -25963,7 +26149,7 @@
           <a:noFill/>
         </p:spPr>
         <p:txBody>
-          <a:bodyPr wrap="none" lIns="0" rIns="0" tIns="0" bIns="0">
+          <a:bodyPr wrap="none" lIns="0" tIns="0" rIns="0" bIns="0">
             <a:spAutoFit/>
           </a:bodyPr>
           <a:lstStyle/>
@@ -26000,7 +26186,7 @@
 </file>
 
 <file path=ppt/slides/slide3.xml><?xml version="1.0" encoding="utf-8"?>
-<p:sld xmlns:a="http://schemas.openxmlformats.org/drawingml/2006/main" xmlns:p="http://schemas.openxmlformats.org/presentationml/2006/main" xmlns:r="http://schemas.openxmlformats.org/officeDocument/2006/relationships">
+<p:sld xmlns:a="http://schemas.openxmlformats.org/drawingml/2006/main" xmlns:r="http://schemas.openxmlformats.org/officeDocument/2006/relationships" xmlns:p="http://schemas.openxmlformats.org/presentationml/2006/main">
   <p:cSld>
     <p:bg>
       <p:bgPr>
@@ -26016,7 +26202,14 @@
         <p:cNvGrpSpPr/>
         <p:nvPr/>
       </p:nvGrpSpPr>
-      <p:grpSpPr/>
+      <p:grpSpPr>
+        <a:xfrm>
+          <a:off x="0" y="0"/>
+          <a:ext cx="0" cy="0"/>
+          <a:chOff x="0" y="0"/>
+          <a:chExt cx="0" cy="0"/>
+        </a:xfrm>
+      </p:grpSpPr>
       <p:sp>
         <p:nvSpPr>
           <p:cNvPr id="2" name="Rectangle 1"/>
@@ -26057,6 +26250,7 @@
           <a:lstStyle/>
           <a:p>
             <a:pPr algn="ctr"/>
+            <a:endParaRPr/>
           </a:p>
         </p:txBody>
       </p:sp>
@@ -26077,7 +26271,7 @@
           <a:noFill/>
         </p:spPr>
         <p:txBody>
-          <a:bodyPr wrap="none" lIns="0" rIns="0" tIns="0" bIns="0">
+          <a:bodyPr wrap="none" lIns="0" tIns="0" rIns="0" bIns="0">
             <a:spAutoFit/>
           </a:bodyPr>
           <a:lstStyle/>
@@ -26122,7 +26316,7 @@
           <a:noFill/>
         </p:spPr>
         <p:txBody>
-          <a:bodyPr wrap="none" lIns="0" rIns="0" tIns="0" bIns="0">
+          <a:bodyPr wrap="none" lIns="0" tIns="0" rIns="0" bIns="0">
             <a:spAutoFit/>
           </a:bodyPr>
           <a:lstStyle/>
@@ -26167,7 +26361,7 @@
           <a:noFill/>
         </p:spPr>
         <p:txBody>
-          <a:bodyPr wrap="none" lIns="0" rIns="0" tIns="0" bIns="0">
+          <a:bodyPr wrap="none" lIns="0" tIns="0" rIns="0" bIns="0">
             <a:spAutoFit/>
           </a:bodyPr>
           <a:lstStyle/>
@@ -26237,6 +26431,7 @@
           <a:lstStyle/>
           <a:p>
             <a:pPr algn="ctr"/>
+            <a:endParaRPr/>
           </a:p>
         </p:txBody>
       </p:sp>
@@ -26282,6 +26477,7 @@
           <a:lstStyle/>
           <a:p>
             <a:pPr algn="ctr"/>
+            <a:endParaRPr/>
           </a:p>
         </p:txBody>
       </p:sp>
@@ -26302,7 +26498,7 @@
           <a:noFill/>
         </p:spPr>
         <p:txBody>
-          <a:bodyPr wrap="none" lIns="0" rIns="0" tIns="0" bIns="0">
+          <a:bodyPr wrap="none" lIns="0" tIns="0" rIns="0" bIns="0">
             <a:spAutoFit/>
           </a:bodyPr>
           <a:lstStyle/>
@@ -26347,7 +26543,7 @@
           <a:noFill/>
         </p:spPr>
         <p:txBody>
-          <a:bodyPr wrap="none" lIns="0" rIns="0" tIns="0" bIns="0">
+          <a:bodyPr wrap="none" lIns="0" tIns="0" rIns="0" bIns="0">
             <a:spAutoFit/>
           </a:bodyPr>
           <a:lstStyle/>
@@ -26417,6 +26613,7 @@
           <a:lstStyle/>
           <a:p>
             <a:pPr algn="ctr"/>
+            <a:endParaRPr/>
           </a:p>
         </p:txBody>
       </p:sp>
@@ -26437,7 +26634,7 @@
           <a:noFill/>
         </p:spPr>
         <p:txBody>
-          <a:bodyPr wrap="none" lIns="0" rIns="0" tIns="0" bIns="0">
+          <a:bodyPr wrap="none" lIns="0" tIns="0" rIns="0" bIns="0">
             <a:spAutoFit/>
           </a:bodyPr>
           <a:lstStyle/>
@@ -26482,7 +26679,7 @@
           <a:noFill/>
         </p:spPr>
         <p:txBody>
-          <a:bodyPr wrap="none" lIns="0" rIns="0" tIns="0" bIns="0">
+          <a:bodyPr wrap="none" lIns="0" tIns="0" rIns="0" bIns="0">
             <a:spAutoFit/>
           </a:bodyPr>
           <a:lstStyle/>
@@ -26552,6 +26749,7 @@
           <a:lstStyle/>
           <a:p>
             <a:pPr algn="ctr"/>
+            <a:endParaRPr/>
           </a:p>
         </p:txBody>
       </p:sp>
@@ -26572,7 +26770,7 @@
           <a:noFill/>
         </p:spPr>
         <p:txBody>
-          <a:bodyPr wrap="none" lIns="0" rIns="0" tIns="0" bIns="0">
+          <a:bodyPr wrap="none" lIns="0" tIns="0" rIns="0" bIns="0">
             <a:spAutoFit/>
           </a:bodyPr>
           <a:lstStyle/>
@@ -26617,7 +26815,7 @@
           <a:noFill/>
         </p:spPr>
         <p:txBody>
-          <a:bodyPr wrap="none" lIns="0" rIns="0" tIns="0" bIns="0">
+          <a:bodyPr wrap="none" lIns="0" tIns="0" rIns="0" bIns="0">
             <a:spAutoFit/>
           </a:bodyPr>
           <a:lstStyle/>
@@ -26662,7 +26860,7 @@
           <a:noFill/>
         </p:spPr>
         <p:txBody>
-          <a:bodyPr wrap="none" lIns="0" rIns="0" tIns="0" bIns="0">
+          <a:bodyPr wrap="none" lIns="0" tIns="0" rIns="0" bIns="0">
             <a:spAutoFit/>
           </a:bodyPr>
           <a:lstStyle/>
@@ -26699,15 +26897,15 @@
         <p:spPr>
           <a:xfrm>
             <a:off x="6858000" y="2697480"/>
-            <a:ext cx="960120" cy="365760"/>
-          </a:xfrm>
-          <a:prstGeom prst="rect">
-            <a:avLst/>
-          </a:prstGeom>
-          <a:noFill/>
-        </p:spPr>
-        <p:txBody>
-          <a:bodyPr wrap="none" lIns="0" rIns="0" tIns="0" bIns="0">
+            <a:ext cx="243656" cy="298415"/>
+          </a:xfrm>
+          <a:prstGeom prst="rect">
+            <a:avLst/>
+          </a:prstGeom>
+          <a:noFill/>
+        </p:spPr>
+        <p:txBody>
+          <a:bodyPr wrap="none" lIns="0" tIns="0" rIns="0" bIns="0">
             <a:spAutoFit/>
           </a:bodyPr>
           <a:lstStyle/>
@@ -26730,8 +26928,10 @@
               </a:defRPr>
             </a:pPr>
             <a:r>
-              <a:t>茶</a:t>
-            </a:r>
+              <a:rPr lang="en-US" dirty="0" err="1"/>
+              <a:t>酒</a:t>
+            </a:r>
+            <a:endParaRPr dirty="0"/>
           </a:p>
         </p:txBody>
       </p:sp>
@@ -26777,6 +26977,7 @@
           <a:lstStyle/>
           <a:p>
             <a:pPr algn="ctr"/>
+            <a:endParaRPr/>
           </a:p>
         </p:txBody>
       </p:sp>
@@ -26797,7 +26998,7 @@
           <a:noFill/>
         </p:spPr>
         <p:txBody>
-          <a:bodyPr wrap="none" lIns="0" rIns="0" tIns="0" bIns="0">
+          <a:bodyPr wrap="none" lIns="0" tIns="0" rIns="0" bIns="0">
             <a:spAutoFit/>
           </a:bodyPr>
           <a:lstStyle/>
@@ -26842,7 +27043,7 @@
           <a:noFill/>
         </p:spPr>
         <p:txBody>
-          <a:bodyPr wrap="none" lIns="0" rIns="0" tIns="0" bIns="0">
+          <a:bodyPr wrap="none" lIns="0" tIns="0" rIns="0" bIns="0">
             <a:spAutoFit/>
           </a:bodyPr>
           <a:lstStyle/>
@@ -26912,6 +27113,7 @@
           <a:lstStyle/>
           <a:p>
             <a:pPr algn="ctr"/>
+            <a:endParaRPr/>
           </a:p>
         </p:txBody>
       </p:sp>
@@ -26932,7 +27134,7 @@
           <a:noFill/>
         </p:spPr>
         <p:txBody>
-          <a:bodyPr wrap="none" lIns="0" rIns="0" tIns="0" bIns="0">
+          <a:bodyPr wrap="none" lIns="0" tIns="0" rIns="0" bIns="0">
             <a:spAutoFit/>
           </a:bodyPr>
           <a:lstStyle/>
@@ -26977,7 +27179,7 @@
           <a:noFill/>
         </p:spPr>
         <p:txBody>
-          <a:bodyPr wrap="none" lIns="0" rIns="0" tIns="0" bIns="0">
+          <a:bodyPr wrap="none" lIns="0" tIns="0" rIns="0" bIns="0">
             <a:spAutoFit/>
           </a:bodyPr>
           <a:lstStyle/>
@@ -27047,6 +27249,7 @@
           <a:lstStyle/>
           <a:p>
             <a:pPr algn="ctr"/>
+            <a:endParaRPr/>
           </a:p>
         </p:txBody>
       </p:sp>
@@ -27067,7 +27270,7 @@
           <a:noFill/>
         </p:spPr>
         <p:txBody>
-          <a:bodyPr wrap="none" lIns="0" rIns="0" tIns="0" bIns="0">
+          <a:bodyPr wrap="none" lIns="0" tIns="0" rIns="0" bIns="0">
             <a:spAutoFit/>
           </a:bodyPr>
           <a:lstStyle/>
@@ -27112,7 +27315,7 @@
           <a:noFill/>
         </p:spPr>
         <p:txBody>
-          <a:bodyPr wrap="none" lIns="0" rIns="0" tIns="0" bIns="0">
+          <a:bodyPr wrap="none" lIns="0" tIns="0" rIns="0" bIns="0">
             <a:spAutoFit/>
           </a:bodyPr>
           <a:lstStyle/>
@@ -27182,6 +27385,7 @@
           <a:lstStyle/>
           <a:p>
             <a:pPr algn="ctr"/>
+            <a:endParaRPr/>
           </a:p>
         </p:txBody>
       </p:sp>
@@ -27194,15 +27398,15 @@
         <p:spPr>
           <a:xfrm>
             <a:off x="795528" y="5742432"/>
-            <a:ext cx="10579608" cy="411480"/>
-          </a:xfrm>
-          <a:prstGeom prst="rect">
-            <a:avLst/>
-          </a:prstGeom>
-          <a:noFill/>
-        </p:spPr>
-        <p:txBody>
-          <a:bodyPr wrap="none" lIns="0" rIns="0" tIns="0" bIns="0">
+            <a:ext cx="4475584" cy="273152"/>
+          </a:xfrm>
+          <a:prstGeom prst="rect">
+            <a:avLst/>
+          </a:prstGeom>
+          <a:noFill/>
+        </p:spPr>
+        <p:txBody>
+          <a:bodyPr wrap="none" lIns="0" tIns="0" rIns="0" bIns="0">
             <a:spAutoFit/>
           </a:bodyPr>
           <a:lstStyle/>
@@ -27225,7 +27429,36 @@
               </a:defRPr>
             </a:pPr>
             <a:r>
-              <a:t>示意概率：茶 0.60 · 牛奶 0.30 · 其他 0.10</a:t>
+              <a:rPr dirty="0" err="1"/>
+              <a:t>示意概率</a:t>
+            </a:r>
+            <a:r>
+              <a:rPr dirty="0"/>
+              <a:t>：</a:t>
+            </a:r>
+            <a:r>
+              <a:rPr lang="zh-CN" altLang="en-US" dirty="0"/>
+              <a:t>酒</a:t>
+            </a:r>
+            <a:r>
+              <a:rPr dirty="0"/>
+              <a:t> 0.60 · </a:t>
+            </a:r>
+            <a:r>
+              <a:rPr dirty="0" err="1"/>
+              <a:t>牛奶</a:t>
+            </a:r>
+            <a:r>
+              <a:rPr dirty="0"/>
+              <a:t> 0.30 · </a:t>
+            </a:r>
+            <a:r>
+              <a:rPr dirty="0" err="1"/>
+              <a:t>其他</a:t>
+            </a:r>
+            <a:r>
+              <a:rPr dirty="0"/>
+              <a:t> 0.10</a:t>
             </a:r>
           </a:p>
         </p:txBody>
@@ -27247,7 +27480,7 @@
           <a:noFill/>
         </p:spPr>
         <p:txBody>
-          <a:bodyPr wrap="none" lIns="0" rIns="0" tIns="0" bIns="0">
+          <a:bodyPr wrap="none" lIns="0" tIns="0" rIns="0" bIns="0">
             <a:spAutoFit/>
           </a:bodyPr>
           <a:lstStyle/>
@@ -27292,7 +27525,7 @@
           <a:noFill/>
         </p:spPr>
         <p:txBody>
-          <a:bodyPr wrap="none" lIns="0" rIns="0" tIns="0" bIns="0">
+          <a:bodyPr wrap="none" lIns="0" tIns="0" rIns="0" bIns="0">
             <a:spAutoFit/>
           </a:bodyPr>
           <a:lstStyle/>
@@ -27329,7 +27562,7 @@
 </file>
 
 <file path=ppt/slides/slide4.xml><?xml version="1.0" encoding="utf-8"?>
-<p:sld xmlns:a="http://schemas.openxmlformats.org/drawingml/2006/main" xmlns:p="http://schemas.openxmlformats.org/presentationml/2006/main" xmlns:r="http://schemas.openxmlformats.org/officeDocument/2006/relationships">
+<p:sld xmlns:a="http://schemas.openxmlformats.org/drawingml/2006/main" xmlns:r="http://schemas.openxmlformats.org/officeDocument/2006/relationships" xmlns:p="http://schemas.openxmlformats.org/presentationml/2006/main">
   <p:cSld>
     <p:bg>
       <p:bgPr>
@@ -27345,7 +27578,14 @@
         <p:cNvGrpSpPr/>
         <p:nvPr/>
       </p:nvGrpSpPr>
-      <p:grpSpPr/>
+      <p:grpSpPr>
+        <a:xfrm>
+          <a:off x="0" y="0"/>
+          <a:ext cx="0" cy="0"/>
+          <a:chOff x="0" y="0"/>
+          <a:chExt cx="0" cy="0"/>
+        </a:xfrm>
+      </p:grpSpPr>
       <p:sp>
         <p:nvSpPr>
           <p:cNvPr id="2" name="Rectangle 1"/>
@@ -27386,6 +27626,7 @@
           <a:lstStyle/>
           <a:p>
             <a:pPr algn="ctr"/>
+            <a:endParaRPr/>
           </a:p>
         </p:txBody>
       </p:sp>
@@ -27406,7 +27647,7 @@
           <a:noFill/>
         </p:spPr>
         <p:txBody>
-          <a:bodyPr wrap="none" lIns="0" rIns="0" tIns="0" bIns="0">
+          <a:bodyPr wrap="none" lIns="0" tIns="0" rIns="0" bIns="0">
             <a:spAutoFit/>
           </a:bodyPr>
           <a:lstStyle/>
@@ -27451,7 +27692,7 @@
           <a:noFill/>
         </p:spPr>
         <p:txBody>
-          <a:bodyPr wrap="none" lIns="0" rIns="0" tIns="0" bIns="0">
+          <a:bodyPr wrap="none" lIns="0" tIns="0" rIns="0" bIns="0">
             <a:spAutoFit/>
           </a:bodyPr>
           <a:lstStyle/>
@@ -27496,7 +27737,7 @@
           <a:noFill/>
         </p:spPr>
         <p:txBody>
-          <a:bodyPr wrap="none" lIns="0" rIns="0" tIns="0" bIns="0">
+          <a:bodyPr wrap="none" lIns="0" tIns="0" rIns="0" bIns="0">
             <a:spAutoFit/>
           </a:bodyPr>
           <a:lstStyle/>
@@ -27519,8 +27760,10 @@
               </a:defRPr>
             </a:pPr>
             <a:r>
+              <a:rPr dirty="0" err="1"/>
               <a:t>训练有答案，生成要自己接着写</a:t>
             </a:r>
+            <a:endParaRPr dirty="0"/>
           </a:p>
         </p:txBody>
       </p:sp>
@@ -27566,6 +27809,7 @@
           <a:lstStyle/>
           <a:p>
             <a:pPr algn="ctr"/>
+            <a:endParaRPr/>
           </a:p>
         </p:txBody>
       </p:sp>
@@ -27611,6 +27855,7 @@
           <a:lstStyle/>
           <a:p>
             <a:pPr algn="ctr"/>
+            <a:endParaRPr/>
           </a:p>
         </p:txBody>
       </p:sp>
@@ -27631,7 +27876,7 @@
           <a:noFill/>
         </p:spPr>
         <p:txBody>
-          <a:bodyPr wrap="none" lIns="0" rIns="0" tIns="0" bIns="0">
+          <a:bodyPr wrap="none" lIns="0" tIns="0" rIns="0" bIns="0">
             <a:spAutoFit/>
           </a:bodyPr>
           <a:lstStyle/>
@@ -27676,7 +27921,7 @@
           <a:noFill/>
         </p:spPr>
         <p:txBody>
-          <a:bodyPr wrap="none" lIns="0" rIns="0" tIns="0" bIns="0">
+          <a:bodyPr wrap="none" lIns="0" tIns="0" rIns="0" bIns="0">
             <a:spAutoFit/>
           </a:bodyPr>
           <a:lstStyle/>
@@ -27699,8 +27944,10 @@
               </a:defRPr>
             </a:pPr>
             <a:r>
+              <a:rPr dirty="0" err="1"/>
               <a:t>训练：用完整句子构造错开一位的输入和标签</a:t>
             </a:r>
+            <a:endParaRPr dirty="0"/>
           </a:p>
         </p:txBody>
       </p:sp>
@@ -27746,6 +27993,7 @@
           <a:lstStyle/>
           <a:p>
             <a:pPr algn="ctr"/>
+            <a:endParaRPr/>
           </a:p>
         </p:txBody>
       </p:sp>
@@ -27766,7 +28014,7 @@
           <a:noFill/>
         </p:spPr>
         <p:txBody>
-          <a:bodyPr wrap="none" lIns="0" rIns="0" tIns="0" bIns="0">
+          <a:bodyPr wrap="none" lIns="0" tIns="0" rIns="0" bIns="0">
             <a:spAutoFit/>
           </a:bodyPr>
           <a:lstStyle/>
@@ -27811,7 +28059,7 @@
           <a:noFill/>
         </p:spPr>
         <p:txBody>
-          <a:bodyPr wrap="none" lIns="0" rIns="0" tIns="0" bIns="0">
+          <a:bodyPr wrap="none" lIns="0" tIns="0" rIns="0" bIns="0">
             <a:spAutoFit/>
           </a:bodyPr>
           <a:lstStyle/>
@@ -27834,8 +28082,17 @@
               </a:defRPr>
             </a:pPr>
             <a:r>
-              <a:t>每个位置预测右边的 token，统计误差</a:t>
-            </a:r>
+              <a:t>每个位置预测右边的</a:t>
+            </a:r>
+            <a:r>
+              <a:rPr dirty="0"/>
+              <a:t> </a:t>
+            </a:r>
+            <a:r>
+              <a:rPr dirty="0" err="1"/>
+              <a:t>token，统计误差</a:t>
+            </a:r>
+            <a:endParaRPr dirty="0"/>
           </a:p>
         </p:txBody>
       </p:sp>
@@ -27881,6 +28138,7 @@
           <a:lstStyle/>
           <a:p>
             <a:pPr algn="ctr"/>
+            <a:endParaRPr/>
           </a:p>
         </p:txBody>
       </p:sp>
@@ -27901,7 +28159,7 @@
           <a:noFill/>
         </p:spPr>
         <p:txBody>
-          <a:bodyPr wrap="none" lIns="0" rIns="0" tIns="0" bIns="0">
+          <a:bodyPr wrap="none" lIns="0" tIns="0" rIns="0" bIns="0">
             <a:spAutoFit/>
           </a:bodyPr>
           <a:lstStyle/>
@@ -27946,7 +28204,7 @@
           <a:noFill/>
         </p:spPr>
         <p:txBody>
-          <a:bodyPr wrap="none" lIns="0" rIns="0" tIns="0" bIns="0">
+          <a:bodyPr wrap="none" lIns="0" tIns="0" rIns="0" bIns="0">
             <a:spAutoFit/>
           </a:bodyPr>
           <a:lstStyle/>
@@ -27969,7 +28227,11 @@
               </a:defRPr>
             </a:pPr>
             <a:r>
-              <a:t>生成：只有当前前文，逐步增加一个 token</a:t>
+              <a:t>生成：只有当前前文，逐步增加一个</a:t>
+            </a:r>
+            <a:r>
+              <a:rPr dirty="0"/>
+              <a:t> token</a:t>
             </a:r>
           </a:p>
         </p:txBody>
@@ -27991,7 +28253,7 @@
           <a:noFill/>
         </p:spPr>
         <p:txBody>
-          <a:bodyPr wrap="none" lIns="0" rIns="0" tIns="0" bIns="0">
+          <a:bodyPr wrap="none" lIns="0" tIns="0" rIns="0" bIns="0">
             <a:spAutoFit/>
           </a:bodyPr>
           <a:lstStyle/>
@@ -28036,7 +28298,7 @@
           <a:noFill/>
         </p:spPr>
         <p:txBody>
-          <a:bodyPr wrap="none" lIns="0" rIns="0" tIns="0" bIns="0">
+          <a:bodyPr wrap="none" lIns="0" tIns="0" rIns="0" bIns="0">
             <a:spAutoFit/>
           </a:bodyPr>
           <a:lstStyle/>
@@ -28161,6 +28423,7 @@
           <a:lstStyle/>
           <a:p>
             <a:pPr algn="ctr"/>
+            <a:endParaRPr/>
           </a:p>
         </p:txBody>
       </p:sp>
@@ -28206,6 +28469,7 @@
           <a:lstStyle/>
           <a:p>
             <a:pPr algn="ctr"/>
+            <a:endParaRPr/>
           </a:p>
         </p:txBody>
       </p:sp>
@@ -28226,7 +28490,7 @@
           <a:noFill/>
         </p:spPr>
         <p:txBody>
-          <a:bodyPr wrap="none" lIns="0" rIns="0" tIns="0" bIns="0">
+          <a:bodyPr wrap="none" lIns="0" tIns="0" rIns="0" bIns="0">
             <a:spAutoFit/>
           </a:bodyPr>
           <a:lstStyle/>
@@ -28296,6 +28560,7 @@
           <a:lstStyle/>
           <a:p>
             <a:pPr algn="ctr"/>
+            <a:endParaRPr/>
           </a:p>
         </p:txBody>
       </p:sp>
@@ -28316,7 +28581,7 @@
           <a:noFill/>
         </p:spPr>
         <p:txBody>
-          <a:bodyPr wrap="none" lIns="0" rIns="0" tIns="0" bIns="0">
+          <a:bodyPr wrap="none" lIns="0" tIns="0" rIns="0" bIns="0">
             <a:spAutoFit/>
           </a:bodyPr>
           <a:lstStyle/>
@@ -28361,7 +28626,7 @@
           <a:noFill/>
         </p:spPr>
         <p:txBody>
-          <a:bodyPr wrap="none" lIns="0" rIns="0" tIns="0" bIns="0">
+          <a:bodyPr wrap="none" lIns="0" tIns="0" rIns="0" bIns="0">
             <a:spAutoFit/>
           </a:bodyPr>
           <a:lstStyle/>
@@ -28406,7 +28671,7 @@
           <a:noFill/>
         </p:spPr>
         <p:txBody>
-          <a:bodyPr wrap="none" lIns="0" rIns="0" tIns="0" bIns="0">
+          <a:bodyPr wrap="none" lIns="0" tIns="0" rIns="0" bIns="0">
             <a:spAutoFit/>
           </a:bodyPr>
           <a:lstStyle/>
@@ -28443,7 +28708,7 @@
 </file>
 
 <file path=ppt/slides/slide5.xml><?xml version="1.0" encoding="utf-8"?>
-<p:sld xmlns:a="http://schemas.openxmlformats.org/drawingml/2006/main" xmlns:p="http://schemas.openxmlformats.org/presentationml/2006/main" xmlns:r="http://schemas.openxmlformats.org/officeDocument/2006/relationships">
+<p:sld xmlns:a="http://schemas.openxmlformats.org/drawingml/2006/main" xmlns:r="http://schemas.openxmlformats.org/officeDocument/2006/relationships" xmlns:p="http://schemas.openxmlformats.org/presentationml/2006/main">
   <p:cSld>
     <p:bg>
       <p:bgPr>
@@ -28459,7 +28724,14 @@
         <p:cNvGrpSpPr/>
         <p:nvPr/>
       </p:nvGrpSpPr>
-      <p:grpSpPr/>
+      <p:grpSpPr>
+        <a:xfrm>
+          <a:off x="0" y="0"/>
+          <a:ext cx="0" cy="0"/>
+          <a:chOff x="0" y="0"/>
+          <a:chExt cx="0" cy="0"/>
+        </a:xfrm>
+      </p:grpSpPr>
       <p:sp>
         <p:nvSpPr>
           <p:cNvPr id="2" name="Rectangle 1"/>
@@ -28500,6 +28772,7 @@
           <a:lstStyle/>
           <a:p>
             <a:pPr algn="ctr"/>
+            <a:endParaRPr/>
           </a:p>
         </p:txBody>
       </p:sp>
@@ -28520,7 +28793,7 @@
           <a:noFill/>
         </p:spPr>
         <p:txBody>
-          <a:bodyPr wrap="none" lIns="0" rIns="0" tIns="0" bIns="0">
+          <a:bodyPr wrap="none" lIns="0" tIns="0" rIns="0" bIns="0">
             <a:spAutoFit/>
           </a:bodyPr>
           <a:lstStyle/>
@@ -28565,7 +28838,7 @@
           <a:noFill/>
         </p:spPr>
         <p:txBody>
-          <a:bodyPr wrap="none" lIns="0" rIns="0" tIns="0" bIns="0">
+          <a:bodyPr wrap="none" lIns="0" tIns="0" rIns="0" bIns="0">
             <a:spAutoFit/>
           </a:bodyPr>
           <a:lstStyle/>
@@ -28610,7 +28883,7 @@
           <a:noFill/>
         </p:spPr>
         <p:txBody>
-          <a:bodyPr wrap="none" lIns="0" rIns="0" tIns="0" bIns="0">
+          <a:bodyPr wrap="none" lIns="0" tIns="0" rIns="0" bIns="0">
             <a:spAutoFit/>
           </a:bodyPr>
           <a:lstStyle/>
@@ -28680,6 +28953,7 @@
           <a:lstStyle/>
           <a:p>
             <a:pPr algn="ctr"/>
+            <a:endParaRPr/>
           </a:p>
         </p:txBody>
       </p:sp>
@@ -28725,6 +28999,7 @@
           <a:lstStyle/>
           <a:p>
             <a:pPr algn="ctr"/>
+            <a:endParaRPr/>
           </a:p>
         </p:txBody>
       </p:sp>
@@ -28745,7 +29020,7 @@
           <a:noFill/>
         </p:spPr>
         <p:txBody>
-          <a:bodyPr wrap="none" lIns="0" rIns="0" tIns="0" bIns="0">
+          <a:bodyPr wrap="none" lIns="0" tIns="0" rIns="0" bIns="0">
             <a:spAutoFit/>
           </a:bodyPr>
           <a:lstStyle/>
@@ -28790,7 +29065,7 @@
           <a:noFill/>
         </p:spPr>
         <p:txBody>
-          <a:bodyPr wrap="none" lIns="0" rIns="0" tIns="0" bIns="0">
+          <a:bodyPr wrap="none" lIns="0" tIns="0" rIns="0" bIns="0">
             <a:spAutoFit/>
           </a:bodyPr>
           <a:lstStyle/>
@@ -28813,8 +29088,14 @@
               </a:defRPr>
             </a:pPr>
             <a:r>
-              <a:t>token 是切分后的单位，不保证等于一个字或</a:t>
-            </a:r>
+              <a:rPr dirty="0"/>
+              <a:t>token </a:t>
+            </a:r>
+            <a:r>
+              <a:rPr dirty="0" err="1"/>
+              <a:t>是切分后的单位，不保证等于一个字或</a:t>
+            </a:r>
+            <a:endParaRPr dirty="0"/>
           </a:p>
           <a:p>
             <a:pPr>
@@ -28835,8 +29116,10 @@
               </a:defRPr>
             </a:pPr>
             <a:r>
+              <a:rPr dirty="0" err="1"/>
               <a:t>一个词</a:t>
             </a:r>
+            <a:endParaRPr dirty="0"/>
           </a:p>
         </p:txBody>
       </p:sp>
@@ -28882,6 +29165,7 @@
           <a:lstStyle/>
           <a:p>
             <a:pPr algn="ctr"/>
+            <a:endParaRPr/>
           </a:p>
         </p:txBody>
       </p:sp>
@@ -28902,7 +29186,7 @@
           <a:noFill/>
         </p:spPr>
         <p:txBody>
-          <a:bodyPr wrap="none" lIns="0" rIns="0" tIns="0" bIns="0">
+          <a:bodyPr wrap="none" lIns="0" tIns="0" rIns="0" bIns="0">
             <a:spAutoFit/>
           </a:bodyPr>
           <a:lstStyle/>
@@ -28947,7 +29231,7 @@
           <a:noFill/>
         </p:spPr>
         <p:txBody>
-          <a:bodyPr wrap="none" lIns="0" rIns="0" tIns="0" bIns="0">
+          <a:bodyPr wrap="none" lIns="0" tIns="0" rIns="0" bIns="0">
             <a:spAutoFit/>
           </a:bodyPr>
           <a:lstStyle/>
@@ -29017,6 +29301,7 @@
           <a:lstStyle/>
           <a:p>
             <a:pPr algn="ctr"/>
+            <a:endParaRPr/>
           </a:p>
         </p:txBody>
       </p:sp>
@@ -29037,7 +29322,7 @@
           <a:noFill/>
         </p:spPr>
         <p:txBody>
-          <a:bodyPr wrap="none" lIns="0" rIns="0" tIns="0" bIns="0">
+          <a:bodyPr wrap="none" lIns="0" tIns="0" rIns="0" bIns="0">
             <a:spAutoFit/>
           </a:bodyPr>
           <a:lstStyle/>
@@ -29082,7 +29367,7 @@
           <a:noFill/>
         </p:spPr>
         <p:txBody>
-          <a:bodyPr wrap="none" lIns="0" rIns="0" tIns="0" bIns="0">
+          <a:bodyPr wrap="none" lIns="0" tIns="0" rIns="0" bIns="0">
             <a:spAutoFit/>
           </a:bodyPr>
           <a:lstStyle/>
@@ -29174,6 +29459,7 @@
           <a:lstStyle/>
           <a:p>
             <a:pPr algn="ctr"/>
+            <a:endParaRPr/>
           </a:p>
         </p:txBody>
       </p:sp>
@@ -29194,7 +29480,7 @@
           <a:noFill/>
         </p:spPr>
         <p:txBody>
-          <a:bodyPr wrap="none" lIns="0" rIns="0" tIns="0" bIns="0">
+          <a:bodyPr wrap="none" lIns="0" tIns="0" rIns="0" bIns="0">
             <a:spAutoFit/>
           </a:bodyPr>
           <a:lstStyle/>
@@ -29297,6 +29583,7 @@
           <a:lstStyle/>
           <a:p>
             <a:pPr algn="ctr"/>
+            <a:endParaRPr/>
           </a:p>
         </p:txBody>
       </p:sp>
@@ -29342,6 +29629,7 @@
           <a:lstStyle/>
           <a:p>
             <a:pPr algn="ctr"/>
+            <a:endParaRPr/>
           </a:p>
         </p:txBody>
       </p:sp>
@@ -29362,7 +29650,7 @@
           <a:noFill/>
         </p:spPr>
         <p:txBody>
-          <a:bodyPr wrap="none" lIns="0" rIns="0" tIns="0" bIns="0">
+          <a:bodyPr wrap="none" lIns="0" tIns="0" rIns="0" bIns="0">
             <a:spAutoFit/>
           </a:bodyPr>
           <a:lstStyle/>
@@ -29465,6 +29753,7 @@
           <a:lstStyle/>
           <a:p>
             <a:pPr algn="ctr"/>
+            <a:endParaRPr/>
           </a:p>
         </p:txBody>
       </p:sp>
@@ -29510,6 +29799,7 @@
           <a:lstStyle/>
           <a:p>
             <a:pPr algn="ctr"/>
+            <a:endParaRPr/>
           </a:p>
         </p:txBody>
       </p:sp>
@@ -29530,7 +29820,7 @@
           <a:noFill/>
         </p:spPr>
         <p:txBody>
-          <a:bodyPr wrap="none" lIns="0" rIns="0" tIns="0" bIns="0">
+          <a:bodyPr wrap="none" lIns="0" tIns="0" rIns="0" bIns="0">
             <a:spAutoFit/>
           </a:bodyPr>
           <a:lstStyle/>
@@ -29633,6 +29923,7 @@
           <a:lstStyle/>
           <a:p>
             <a:pPr algn="ctr"/>
+            <a:endParaRPr/>
           </a:p>
         </p:txBody>
       </p:sp>
@@ -29678,6 +29969,7 @@
           <a:lstStyle/>
           <a:p>
             <a:pPr algn="ctr"/>
+            <a:endParaRPr/>
           </a:p>
         </p:txBody>
       </p:sp>
@@ -29698,7 +29990,7 @@
           <a:noFill/>
         </p:spPr>
         <p:txBody>
-          <a:bodyPr wrap="none" lIns="0" rIns="0" tIns="0" bIns="0">
+          <a:bodyPr wrap="none" lIns="0" tIns="0" rIns="0" bIns="0">
             <a:spAutoFit/>
           </a:bodyPr>
           <a:lstStyle/>
@@ -29768,6 +30060,7 @@
           <a:lstStyle/>
           <a:p>
             <a:pPr algn="ctr"/>
+            <a:endParaRPr/>
           </a:p>
         </p:txBody>
       </p:sp>
@@ -29788,7 +30081,7 @@
           <a:noFill/>
         </p:spPr>
         <p:txBody>
-          <a:bodyPr wrap="none" lIns="0" rIns="0" tIns="0" bIns="0">
+          <a:bodyPr wrap="none" lIns="0" tIns="0" rIns="0" bIns="0">
             <a:spAutoFit/>
           </a:bodyPr>
           <a:lstStyle/>
@@ -29833,7 +30126,7 @@
           <a:noFill/>
         </p:spPr>
         <p:txBody>
-          <a:bodyPr wrap="none" lIns="0" rIns="0" tIns="0" bIns="0">
+          <a:bodyPr wrap="none" lIns="0" tIns="0" rIns="0" bIns="0">
             <a:spAutoFit/>
           </a:bodyPr>
           <a:lstStyle/>
@@ -29878,7 +30171,7 @@
           <a:noFill/>
         </p:spPr>
         <p:txBody>
-          <a:bodyPr wrap="none" lIns="0" rIns="0" tIns="0" bIns="0">
+          <a:bodyPr wrap="none" lIns="0" tIns="0" rIns="0" bIns="0">
             <a:spAutoFit/>
           </a:bodyPr>
           <a:lstStyle/>
@@ -29915,7 +30208,7 @@
 </file>
 
 <file path=ppt/slides/slide6.xml><?xml version="1.0" encoding="utf-8"?>
-<p:sld xmlns:a="http://schemas.openxmlformats.org/drawingml/2006/main" xmlns:p="http://schemas.openxmlformats.org/presentationml/2006/main" xmlns:r="http://schemas.openxmlformats.org/officeDocument/2006/relationships">
+<p:sld xmlns:a="http://schemas.openxmlformats.org/drawingml/2006/main" xmlns:r="http://schemas.openxmlformats.org/officeDocument/2006/relationships" xmlns:p="http://schemas.openxmlformats.org/presentationml/2006/main">
   <p:cSld>
     <p:bg>
       <p:bgPr>
@@ -29931,7 +30224,14 @@
         <p:cNvGrpSpPr/>
         <p:nvPr/>
       </p:nvGrpSpPr>
-      <p:grpSpPr/>
+      <p:grpSpPr>
+        <a:xfrm>
+          <a:off x="0" y="0"/>
+          <a:ext cx="0" cy="0"/>
+          <a:chOff x="0" y="0"/>
+          <a:chExt cx="0" cy="0"/>
+        </a:xfrm>
+      </p:grpSpPr>
       <p:sp>
         <p:nvSpPr>
           <p:cNvPr id="2" name="Rectangle 1"/>
@@ -29972,6 +30272,7 @@
           <a:lstStyle/>
           <a:p>
             <a:pPr algn="ctr"/>
+            <a:endParaRPr/>
           </a:p>
         </p:txBody>
       </p:sp>
@@ -29992,7 +30293,7 @@
           <a:noFill/>
         </p:spPr>
         <p:txBody>
-          <a:bodyPr wrap="none" lIns="0" rIns="0" tIns="0" bIns="0">
+          <a:bodyPr wrap="none" lIns="0" tIns="0" rIns="0" bIns="0">
             <a:spAutoFit/>
           </a:bodyPr>
           <a:lstStyle/>
@@ -30037,7 +30338,7 @@
           <a:noFill/>
         </p:spPr>
         <p:txBody>
-          <a:bodyPr wrap="none" lIns="0" rIns="0" tIns="0" bIns="0">
+          <a:bodyPr wrap="none" lIns="0" tIns="0" rIns="0" bIns="0">
             <a:spAutoFit/>
           </a:bodyPr>
           <a:lstStyle/>
@@ -30082,7 +30383,7 @@
           <a:noFill/>
         </p:spPr>
         <p:txBody>
-          <a:bodyPr wrap="none" lIns="0" rIns="0" tIns="0" bIns="0">
+          <a:bodyPr wrap="none" lIns="0" tIns="0" rIns="0" bIns="0">
             <a:spAutoFit/>
           </a:bodyPr>
           <a:lstStyle/>
@@ -30152,6 +30453,7 @@
           <a:lstStyle/>
           <a:p>
             <a:pPr algn="ctr"/>
+            <a:endParaRPr/>
           </a:p>
         </p:txBody>
       </p:sp>
@@ -30197,6 +30499,7 @@
           <a:lstStyle/>
           <a:p>
             <a:pPr algn="ctr"/>
+            <a:endParaRPr/>
           </a:p>
         </p:txBody>
       </p:sp>
@@ -30217,7 +30520,7 @@
           <a:noFill/>
         </p:spPr>
         <p:txBody>
-          <a:bodyPr wrap="none" lIns="0" rIns="0" tIns="0" bIns="0">
+          <a:bodyPr wrap="none" lIns="0" tIns="0" rIns="0" bIns="0">
             <a:spAutoFit/>
           </a:bodyPr>
           <a:lstStyle/>
@@ -30262,7 +30565,7 @@
           <a:noFill/>
         </p:spPr>
         <p:txBody>
-          <a:bodyPr wrap="none" lIns="0" rIns="0" tIns="0" bIns="0">
+          <a:bodyPr wrap="none" lIns="0" tIns="0" rIns="0" bIns="0">
             <a:spAutoFit/>
           </a:bodyPr>
           <a:lstStyle/>
@@ -30332,6 +30635,7 @@
           <a:lstStyle/>
           <a:p>
             <a:pPr algn="ctr"/>
+            <a:endParaRPr/>
           </a:p>
         </p:txBody>
       </p:sp>
@@ -30352,7 +30656,7 @@
           <a:noFill/>
         </p:spPr>
         <p:txBody>
-          <a:bodyPr wrap="none" lIns="0" rIns="0" tIns="0" bIns="0">
+          <a:bodyPr wrap="none" lIns="0" tIns="0" rIns="0" bIns="0">
             <a:spAutoFit/>
           </a:bodyPr>
           <a:lstStyle/>
@@ -30397,7 +30701,7 @@
           <a:noFill/>
         </p:spPr>
         <p:txBody>
-          <a:bodyPr wrap="none" lIns="0" rIns="0" tIns="0" bIns="0">
+          <a:bodyPr wrap="none" lIns="0" tIns="0" rIns="0" bIns="0">
             <a:spAutoFit/>
           </a:bodyPr>
           <a:lstStyle/>
@@ -30467,6 +30771,7 @@
           <a:lstStyle/>
           <a:p>
             <a:pPr algn="ctr"/>
+            <a:endParaRPr/>
           </a:p>
         </p:txBody>
       </p:sp>
@@ -30487,7 +30792,7 @@
           <a:noFill/>
         </p:spPr>
         <p:txBody>
-          <a:bodyPr wrap="none" lIns="0" rIns="0" tIns="0" bIns="0">
+          <a:bodyPr wrap="none" lIns="0" tIns="0" rIns="0" bIns="0">
             <a:spAutoFit/>
           </a:bodyPr>
           <a:lstStyle/>
@@ -30532,7 +30837,7 @@
           <a:noFill/>
         </p:spPr>
         <p:txBody>
-          <a:bodyPr wrap="none" lIns="0" rIns="0" tIns="0" bIns="0">
+          <a:bodyPr wrap="none" lIns="0" tIns="0" rIns="0" bIns="0">
             <a:spAutoFit/>
           </a:bodyPr>
           <a:lstStyle/>
@@ -30577,7 +30882,7 @@
           <a:noFill/>
         </p:spPr>
         <p:txBody>
-          <a:bodyPr wrap="none" lIns="0" rIns="0" tIns="0" bIns="0">
+          <a:bodyPr wrap="none" lIns="0" tIns="0" rIns="0" bIns="0">
             <a:spAutoFit/>
           </a:bodyPr>
           <a:lstStyle/>
@@ -30622,7 +30927,7 @@
           <a:noFill/>
         </p:spPr>
         <p:txBody>
-          <a:bodyPr wrap="none" lIns="0" rIns="0" tIns="0" bIns="0">
+          <a:bodyPr wrap="none" lIns="0" tIns="0" rIns="0" bIns="0">
             <a:spAutoFit/>
           </a:bodyPr>
           <a:lstStyle/>
@@ -30692,6 +30997,7 @@
           <a:lstStyle/>
           <a:p>
             <a:pPr algn="ctr"/>
+            <a:endParaRPr/>
           </a:p>
         </p:txBody>
       </p:sp>
@@ -30712,7 +31018,7 @@
           <a:noFill/>
         </p:spPr>
         <p:txBody>
-          <a:bodyPr wrap="none" lIns="0" rIns="0" tIns="0" bIns="0">
+          <a:bodyPr wrap="none" lIns="0" tIns="0" rIns="0" bIns="0">
             <a:spAutoFit/>
           </a:bodyPr>
           <a:lstStyle/>
@@ -30782,6 +31088,7 @@
           <a:lstStyle/>
           <a:p>
             <a:pPr algn="ctr"/>
+            <a:endParaRPr/>
           </a:p>
         </p:txBody>
       </p:sp>
@@ -30802,7 +31109,7 @@
           <a:noFill/>
         </p:spPr>
         <p:txBody>
-          <a:bodyPr wrap="none" lIns="0" rIns="0" tIns="0" bIns="0">
+          <a:bodyPr wrap="none" lIns="0" tIns="0" rIns="0" bIns="0">
             <a:spAutoFit/>
           </a:bodyPr>
           <a:lstStyle/>
@@ -30872,6 +31179,7 @@
           <a:lstStyle/>
           <a:p>
             <a:pPr algn="ctr"/>
+            <a:endParaRPr/>
           </a:p>
         </p:txBody>
       </p:sp>
@@ -30892,7 +31200,7 @@
           <a:noFill/>
         </p:spPr>
         <p:txBody>
-          <a:bodyPr wrap="none" lIns="0" rIns="0" tIns="0" bIns="0">
+          <a:bodyPr wrap="none" lIns="0" tIns="0" rIns="0" bIns="0">
             <a:spAutoFit/>
           </a:bodyPr>
           <a:lstStyle/>
@@ -30937,7 +31245,7 @@
           <a:noFill/>
         </p:spPr>
         <p:txBody>
-          <a:bodyPr wrap="none" lIns="0" rIns="0" tIns="0" bIns="0">
+          <a:bodyPr wrap="none" lIns="0" tIns="0" rIns="0" bIns="0">
             <a:spAutoFit/>
           </a:bodyPr>
           <a:lstStyle/>
@@ -31007,6 +31315,7 @@
           <a:lstStyle/>
           <a:p>
             <a:pPr algn="ctr"/>
+            <a:endParaRPr/>
           </a:p>
         </p:txBody>
       </p:sp>
@@ -31027,7 +31336,7 @@
           <a:noFill/>
         </p:spPr>
         <p:txBody>
-          <a:bodyPr wrap="none" lIns="0" rIns="0" tIns="0" bIns="0">
+          <a:bodyPr wrap="none" lIns="0" tIns="0" rIns="0" bIns="0">
             <a:spAutoFit/>
           </a:bodyPr>
           <a:lstStyle/>
@@ -31097,6 +31406,7 @@
           <a:lstStyle/>
           <a:p>
             <a:pPr algn="ctr"/>
+            <a:endParaRPr/>
           </a:p>
         </p:txBody>
       </p:sp>
@@ -31117,7 +31427,7 @@
           <a:noFill/>
         </p:spPr>
         <p:txBody>
-          <a:bodyPr wrap="none" lIns="0" rIns="0" tIns="0" bIns="0">
+          <a:bodyPr wrap="none" lIns="0" tIns="0" rIns="0" bIns="0">
             <a:spAutoFit/>
           </a:bodyPr>
           <a:lstStyle/>
@@ -31187,6 +31497,7 @@
           <a:lstStyle/>
           <a:p>
             <a:pPr algn="ctr"/>
+            <a:endParaRPr/>
           </a:p>
         </p:txBody>
       </p:sp>
@@ -31207,7 +31518,7 @@
           <a:noFill/>
         </p:spPr>
         <p:txBody>
-          <a:bodyPr wrap="none" lIns="0" rIns="0" tIns="0" bIns="0">
+          <a:bodyPr wrap="none" lIns="0" tIns="0" rIns="0" bIns="0">
             <a:spAutoFit/>
           </a:bodyPr>
           <a:lstStyle/>
@@ -31252,7 +31563,7 @@
           <a:noFill/>
         </p:spPr>
         <p:txBody>
-          <a:bodyPr wrap="none" lIns="0" rIns="0" tIns="0" bIns="0">
+          <a:bodyPr wrap="none" lIns="0" tIns="0" rIns="0" bIns="0">
             <a:spAutoFit/>
           </a:bodyPr>
           <a:lstStyle/>
@@ -31322,6 +31633,7 @@
           <a:lstStyle/>
           <a:p>
             <a:pPr algn="ctr"/>
+            <a:endParaRPr/>
           </a:p>
         </p:txBody>
       </p:sp>
@@ -31342,7 +31654,7 @@
           <a:noFill/>
         </p:spPr>
         <p:txBody>
-          <a:bodyPr wrap="none" lIns="0" rIns="0" tIns="0" bIns="0">
+          <a:bodyPr wrap="none" lIns="0" tIns="0" rIns="0" bIns="0">
             <a:spAutoFit/>
           </a:bodyPr>
           <a:lstStyle/>
@@ -31412,6 +31724,7 @@
           <a:lstStyle/>
           <a:p>
             <a:pPr algn="ctr"/>
+            <a:endParaRPr/>
           </a:p>
         </p:txBody>
       </p:sp>
@@ -31432,7 +31745,7 @@
           <a:noFill/>
         </p:spPr>
         <p:txBody>
-          <a:bodyPr wrap="none" lIns="0" rIns="0" tIns="0" bIns="0">
+          <a:bodyPr wrap="none" lIns="0" tIns="0" rIns="0" bIns="0">
             <a:spAutoFit/>
           </a:bodyPr>
           <a:lstStyle/>
@@ -31502,6 +31815,7 @@
           <a:lstStyle/>
           <a:p>
             <a:pPr algn="ctr"/>
+            <a:endParaRPr/>
           </a:p>
         </p:txBody>
       </p:sp>
@@ -31522,7 +31836,7 @@
           <a:noFill/>
         </p:spPr>
         <p:txBody>
-          <a:bodyPr wrap="none" lIns="0" rIns="0" tIns="0" bIns="0">
+          <a:bodyPr wrap="none" lIns="0" tIns="0" rIns="0" bIns="0">
             <a:spAutoFit/>
           </a:bodyPr>
           <a:lstStyle/>
@@ -31567,7 +31881,7 @@
           <a:noFill/>
         </p:spPr>
         <p:txBody>
-          <a:bodyPr wrap="none" lIns="0" rIns="0" tIns="0" bIns="0">
+          <a:bodyPr wrap="none" lIns="0" tIns="0" rIns="0" bIns="0">
             <a:spAutoFit/>
           </a:bodyPr>
           <a:lstStyle/>
@@ -31637,6 +31951,7 @@
           <a:lstStyle/>
           <a:p>
             <a:pPr algn="ctr"/>
+            <a:endParaRPr/>
           </a:p>
         </p:txBody>
       </p:sp>
@@ -31657,7 +31972,7 @@
           <a:noFill/>
         </p:spPr>
         <p:txBody>
-          <a:bodyPr wrap="none" lIns="0" rIns="0" tIns="0" bIns="0">
+          <a:bodyPr wrap="none" lIns="0" tIns="0" rIns="0" bIns="0">
             <a:spAutoFit/>
           </a:bodyPr>
           <a:lstStyle/>
@@ -31702,7 +32017,7 @@
           <a:noFill/>
         </p:spPr>
         <p:txBody>
-          <a:bodyPr wrap="none" lIns="0" rIns="0" tIns="0" bIns="0">
+          <a:bodyPr wrap="none" lIns="0" tIns="0" rIns="0" bIns="0">
             <a:spAutoFit/>
           </a:bodyPr>
           <a:lstStyle/>
@@ -31747,7 +32062,7 @@
           <a:noFill/>
         </p:spPr>
         <p:txBody>
-          <a:bodyPr wrap="none" lIns="0" rIns="0" tIns="0" bIns="0">
+          <a:bodyPr wrap="none" lIns="0" tIns="0" rIns="0" bIns="0">
             <a:spAutoFit/>
           </a:bodyPr>
           <a:lstStyle/>
@@ -31784,7 +32099,7 @@
 </file>
 
 <file path=ppt/slides/slide7.xml><?xml version="1.0" encoding="utf-8"?>
-<p:sld xmlns:a="http://schemas.openxmlformats.org/drawingml/2006/main" xmlns:p="http://schemas.openxmlformats.org/presentationml/2006/main" xmlns:r="http://schemas.openxmlformats.org/officeDocument/2006/relationships">
+<p:sld xmlns:a="http://schemas.openxmlformats.org/drawingml/2006/main" xmlns:r="http://schemas.openxmlformats.org/officeDocument/2006/relationships" xmlns:p="http://schemas.openxmlformats.org/presentationml/2006/main">
   <p:cSld>
     <p:bg>
       <p:bgPr>
@@ -31800,7 +32115,14 @@
         <p:cNvGrpSpPr/>
         <p:nvPr/>
       </p:nvGrpSpPr>
-      <p:grpSpPr/>
+      <p:grpSpPr>
+        <a:xfrm>
+          <a:off x="0" y="0"/>
+          <a:ext cx="0" cy="0"/>
+          <a:chOff x="0" y="0"/>
+          <a:chExt cx="0" cy="0"/>
+        </a:xfrm>
+      </p:grpSpPr>
       <p:sp>
         <p:nvSpPr>
           <p:cNvPr id="2" name="Rectangle 1"/>
@@ -31841,6 +32163,7 @@
           <a:lstStyle/>
           <a:p>
             <a:pPr algn="ctr"/>
+            <a:endParaRPr/>
           </a:p>
         </p:txBody>
       </p:sp>
@@ -31861,7 +32184,7 @@
           <a:noFill/>
         </p:spPr>
         <p:txBody>
-          <a:bodyPr wrap="none" lIns="0" rIns="0" tIns="0" bIns="0">
+          <a:bodyPr wrap="none" lIns="0" tIns="0" rIns="0" bIns="0">
             <a:spAutoFit/>
           </a:bodyPr>
           <a:lstStyle/>
@@ -31906,7 +32229,7 @@
           <a:noFill/>
         </p:spPr>
         <p:txBody>
-          <a:bodyPr wrap="none" lIns="0" rIns="0" tIns="0" bIns="0">
+          <a:bodyPr wrap="none" lIns="0" tIns="0" rIns="0" bIns="0">
             <a:spAutoFit/>
           </a:bodyPr>
           <a:lstStyle/>
@@ -31951,7 +32274,7 @@
           <a:noFill/>
         </p:spPr>
         <p:txBody>
-          <a:bodyPr wrap="none" lIns="0" rIns="0" tIns="0" bIns="0">
+          <a:bodyPr wrap="none" lIns="0" tIns="0" rIns="0" bIns="0">
             <a:spAutoFit/>
           </a:bodyPr>
           <a:lstStyle/>
@@ -32021,6 +32344,7 @@
           <a:lstStyle/>
           <a:p>
             <a:pPr algn="ctr"/>
+            <a:endParaRPr/>
           </a:p>
         </p:txBody>
       </p:sp>
@@ -32066,6 +32390,7 @@
           <a:lstStyle/>
           <a:p>
             <a:pPr algn="ctr"/>
+            <a:endParaRPr/>
           </a:p>
         </p:txBody>
       </p:sp>
@@ -32086,7 +32411,7 @@
           <a:noFill/>
         </p:spPr>
         <p:txBody>
-          <a:bodyPr wrap="none" lIns="0" rIns="0" tIns="0" bIns="0">
+          <a:bodyPr wrap="none" lIns="0" tIns="0" rIns="0" bIns="0">
             <a:spAutoFit/>
           </a:bodyPr>
           <a:lstStyle/>
@@ -32131,7 +32456,7 @@
           <a:noFill/>
         </p:spPr>
         <p:txBody>
-          <a:bodyPr wrap="none" lIns="0" rIns="0" tIns="0" bIns="0">
+          <a:bodyPr wrap="none" lIns="0" tIns="0" rIns="0" bIns="0">
             <a:spAutoFit/>
           </a:bodyPr>
           <a:lstStyle/>
@@ -32201,6 +32526,7 @@
           <a:lstStyle/>
           <a:p>
             <a:pPr algn="ctr"/>
+            <a:endParaRPr/>
           </a:p>
         </p:txBody>
       </p:sp>
@@ -32221,7 +32547,7 @@
           <a:noFill/>
         </p:spPr>
         <p:txBody>
-          <a:bodyPr wrap="none" lIns="0" rIns="0" tIns="0" bIns="0">
+          <a:bodyPr wrap="none" lIns="0" tIns="0" rIns="0" bIns="0">
             <a:spAutoFit/>
           </a:bodyPr>
           <a:lstStyle/>
@@ -32266,7 +32592,7 @@
           <a:noFill/>
         </p:spPr>
         <p:txBody>
-          <a:bodyPr wrap="none" lIns="0" rIns="0" tIns="0" bIns="0">
+          <a:bodyPr wrap="none" lIns="0" tIns="0" rIns="0" bIns="0">
             <a:spAutoFit/>
           </a:bodyPr>
           <a:lstStyle/>
@@ -32336,6 +32662,7 @@
           <a:lstStyle/>
           <a:p>
             <a:pPr algn="ctr"/>
+            <a:endParaRPr/>
           </a:p>
         </p:txBody>
       </p:sp>
@@ -32356,7 +32683,7 @@
           <a:noFill/>
         </p:spPr>
         <p:txBody>
-          <a:bodyPr wrap="none" lIns="0" rIns="0" tIns="0" bIns="0">
+          <a:bodyPr wrap="none" lIns="0" tIns="0" rIns="0" bIns="0">
             <a:spAutoFit/>
           </a:bodyPr>
           <a:lstStyle/>
@@ -32401,7 +32728,7 @@
           <a:noFill/>
         </p:spPr>
         <p:txBody>
-          <a:bodyPr wrap="none" lIns="0" rIns="0" tIns="0" bIns="0">
+          <a:bodyPr wrap="none" lIns="0" tIns="0" rIns="0" bIns="0">
             <a:spAutoFit/>
           </a:bodyPr>
           <a:lstStyle/>
@@ -32471,6 +32798,7 @@
           <a:lstStyle/>
           <a:p>
             <a:pPr algn="ctr"/>
+            <a:endParaRPr/>
           </a:p>
         </p:txBody>
       </p:sp>
@@ -32491,7 +32819,7 @@
           <a:noFill/>
         </p:spPr>
         <p:txBody>
-          <a:bodyPr wrap="none" lIns="0" rIns="0" tIns="0" bIns="0">
+          <a:bodyPr wrap="none" lIns="0" tIns="0" rIns="0" bIns="0">
             <a:spAutoFit/>
           </a:bodyPr>
           <a:lstStyle/>
@@ -32594,6 +32922,7 @@
           <a:lstStyle/>
           <a:p>
             <a:pPr algn="ctr"/>
+            <a:endParaRPr/>
           </a:p>
         </p:txBody>
       </p:sp>
@@ -32639,6 +32968,7 @@
           <a:lstStyle/>
           <a:p>
             <a:pPr algn="ctr"/>
+            <a:endParaRPr/>
           </a:p>
         </p:txBody>
       </p:sp>
@@ -32659,7 +32989,7 @@
           <a:noFill/>
         </p:spPr>
         <p:txBody>
-          <a:bodyPr wrap="none" lIns="0" rIns="0" tIns="0" bIns="0">
+          <a:bodyPr wrap="none" lIns="0" tIns="0" rIns="0" bIns="0">
             <a:spAutoFit/>
           </a:bodyPr>
           <a:lstStyle/>
@@ -32762,6 +33092,7 @@
           <a:lstStyle/>
           <a:p>
             <a:pPr algn="ctr"/>
+            <a:endParaRPr/>
           </a:p>
         </p:txBody>
       </p:sp>
@@ -32807,6 +33138,7 @@
           <a:lstStyle/>
           <a:p>
             <a:pPr algn="ctr"/>
+            <a:endParaRPr/>
           </a:p>
         </p:txBody>
       </p:sp>
@@ -32827,7 +33159,7 @@
           <a:noFill/>
         </p:spPr>
         <p:txBody>
-          <a:bodyPr wrap="none" lIns="0" rIns="0" tIns="0" bIns="0">
+          <a:bodyPr wrap="none" lIns="0" tIns="0" rIns="0" bIns="0">
             <a:spAutoFit/>
           </a:bodyPr>
           <a:lstStyle/>
@@ -32897,6 +33229,7 @@
           <a:lstStyle/>
           <a:p>
             <a:pPr algn="ctr"/>
+            <a:endParaRPr/>
           </a:p>
         </p:txBody>
       </p:sp>
@@ -32917,7 +33250,7 @@
           <a:noFill/>
         </p:spPr>
         <p:txBody>
-          <a:bodyPr wrap="none" lIns="0" rIns="0" tIns="0" bIns="0">
+          <a:bodyPr wrap="none" lIns="0" tIns="0" rIns="0" bIns="0">
             <a:spAutoFit/>
           </a:bodyPr>
           <a:lstStyle/>
@@ -32962,7 +33295,7 @@
           <a:noFill/>
         </p:spPr>
         <p:txBody>
-          <a:bodyPr wrap="none" lIns="0" rIns="0" tIns="0" bIns="0">
+          <a:bodyPr wrap="none" lIns="0" tIns="0" rIns="0" bIns="0">
             <a:spAutoFit/>
           </a:bodyPr>
           <a:lstStyle/>
@@ -33007,7 +33340,7 @@
           <a:noFill/>
         </p:spPr>
         <p:txBody>
-          <a:bodyPr wrap="none" lIns="0" rIns="0" tIns="0" bIns="0">
+          <a:bodyPr wrap="none" lIns="0" tIns="0" rIns="0" bIns="0">
             <a:spAutoFit/>
           </a:bodyPr>
           <a:lstStyle/>
@@ -33044,7 +33377,7 @@
 </file>
 
 <file path=ppt/slides/slide8.xml><?xml version="1.0" encoding="utf-8"?>
-<p:sld xmlns:a="http://schemas.openxmlformats.org/drawingml/2006/main" xmlns:p="http://schemas.openxmlformats.org/presentationml/2006/main" xmlns:r="http://schemas.openxmlformats.org/officeDocument/2006/relationships">
+<p:sld xmlns:a="http://schemas.openxmlformats.org/drawingml/2006/main" xmlns:r="http://schemas.openxmlformats.org/officeDocument/2006/relationships" xmlns:p="http://schemas.openxmlformats.org/presentationml/2006/main">
   <p:cSld>
     <p:bg>
       <p:bgPr>
@@ -33060,7 +33393,14 @@
         <p:cNvGrpSpPr/>
         <p:nvPr/>
       </p:nvGrpSpPr>
-      <p:grpSpPr/>
+      <p:grpSpPr>
+        <a:xfrm>
+          <a:off x="0" y="0"/>
+          <a:ext cx="0" cy="0"/>
+          <a:chOff x="0" y="0"/>
+          <a:chExt cx="0" cy="0"/>
+        </a:xfrm>
+      </p:grpSpPr>
       <p:sp>
         <p:nvSpPr>
           <p:cNvPr id="2" name="Rectangle 1"/>
@@ -33101,6 +33441,7 @@
           <a:lstStyle/>
           <a:p>
             <a:pPr algn="ctr"/>
+            <a:endParaRPr/>
           </a:p>
         </p:txBody>
       </p:sp>
@@ -33121,7 +33462,7 @@
           <a:noFill/>
         </p:spPr>
         <p:txBody>
-          <a:bodyPr wrap="none" lIns="0" rIns="0" tIns="0" bIns="0">
+          <a:bodyPr wrap="none" lIns="0" tIns="0" rIns="0" bIns="0">
             <a:spAutoFit/>
           </a:bodyPr>
           <a:lstStyle/>
@@ -33166,7 +33507,7 @@
           <a:noFill/>
         </p:spPr>
         <p:txBody>
-          <a:bodyPr wrap="none" lIns="0" rIns="0" tIns="0" bIns="0">
+          <a:bodyPr wrap="none" lIns="0" tIns="0" rIns="0" bIns="0">
             <a:spAutoFit/>
           </a:bodyPr>
           <a:lstStyle/>
@@ -33211,7 +33552,7 @@
           <a:noFill/>
         </p:spPr>
         <p:txBody>
-          <a:bodyPr wrap="none" lIns="0" rIns="0" tIns="0" bIns="0">
+          <a:bodyPr wrap="none" lIns="0" tIns="0" rIns="0" bIns="0">
             <a:spAutoFit/>
           </a:bodyPr>
           <a:lstStyle/>
@@ -33281,6 +33622,7 @@
           <a:lstStyle/>
           <a:p>
             <a:pPr algn="ctr"/>
+            <a:endParaRPr/>
           </a:p>
         </p:txBody>
       </p:sp>
@@ -33326,6 +33668,7 @@
           <a:lstStyle/>
           <a:p>
             <a:pPr algn="ctr"/>
+            <a:endParaRPr/>
           </a:p>
         </p:txBody>
       </p:sp>
@@ -33346,7 +33689,7 @@
           <a:noFill/>
         </p:spPr>
         <p:txBody>
-          <a:bodyPr wrap="none" lIns="0" rIns="0" tIns="0" bIns="0">
+          <a:bodyPr wrap="none" lIns="0" tIns="0" rIns="0" bIns="0">
             <a:spAutoFit/>
           </a:bodyPr>
           <a:lstStyle/>
@@ -33391,7 +33734,7 @@
           <a:noFill/>
         </p:spPr>
         <p:txBody>
-          <a:bodyPr wrap="none" lIns="0" rIns="0" tIns="0" bIns="0">
+          <a:bodyPr wrap="none" lIns="0" tIns="0" rIns="0" bIns="0">
             <a:spAutoFit/>
           </a:bodyPr>
           <a:lstStyle/>
@@ -33461,6 +33804,7 @@
           <a:lstStyle/>
           <a:p>
             <a:pPr algn="ctr"/>
+            <a:endParaRPr/>
           </a:p>
         </p:txBody>
       </p:sp>
@@ -33481,7 +33825,7 @@
           <a:noFill/>
         </p:spPr>
         <p:txBody>
-          <a:bodyPr wrap="none" lIns="0" rIns="0" tIns="0" bIns="0">
+          <a:bodyPr wrap="none" lIns="0" tIns="0" rIns="0" bIns="0">
             <a:spAutoFit/>
           </a:bodyPr>
           <a:lstStyle/>
@@ -33526,7 +33870,7 @@
           <a:noFill/>
         </p:spPr>
         <p:txBody>
-          <a:bodyPr wrap="none" lIns="0" rIns="0" tIns="0" bIns="0">
+          <a:bodyPr wrap="none" lIns="0" tIns="0" rIns="0" bIns="0">
             <a:spAutoFit/>
           </a:bodyPr>
           <a:lstStyle/>
@@ -33596,6 +33940,7 @@
           <a:lstStyle/>
           <a:p>
             <a:pPr algn="ctr"/>
+            <a:endParaRPr/>
           </a:p>
         </p:txBody>
       </p:sp>
@@ -33616,7 +33961,7 @@
           <a:noFill/>
         </p:spPr>
         <p:txBody>
-          <a:bodyPr wrap="none" lIns="0" rIns="0" tIns="0" bIns="0">
+          <a:bodyPr wrap="none" lIns="0" tIns="0" rIns="0" bIns="0">
             <a:spAutoFit/>
           </a:bodyPr>
           <a:lstStyle/>
@@ -33661,7 +34006,7 @@
           <a:noFill/>
         </p:spPr>
         <p:txBody>
-          <a:bodyPr wrap="none" lIns="0" rIns="0" tIns="0" bIns="0">
+          <a:bodyPr wrap="none" lIns="0" tIns="0" rIns="0" bIns="0">
             <a:spAutoFit/>
           </a:bodyPr>
           <a:lstStyle/>
@@ -33706,7 +34051,7 @@
           <a:noFill/>
         </p:spPr>
         <p:txBody>
-          <a:bodyPr wrap="none" lIns="0" rIns="0" tIns="0" bIns="0">
+          <a:bodyPr wrap="none" lIns="0" tIns="0" rIns="0" bIns="0">
             <a:spAutoFit/>
           </a:bodyPr>
           <a:lstStyle/>
@@ -33751,7 +34096,7 @@
           <a:noFill/>
         </p:spPr>
         <p:txBody>
-          <a:bodyPr wrap="none" lIns="0" rIns="0" tIns="0" bIns="0">
+          <a:bodyPr wrap="none" lIns="0" tIns="0" rIns="0" bIns="0">
             <a:spAutoFit/>
           </a:bodyPr>
           <a:lstStyle/>
@@ -33821,6 +34166,7 @@
           <a:lstStyle/>
           <a:p>
             <a:pPr algn="ctr"/>
+            <a:endParaRPr/>
           </a:p>
         </p:txBody>
       </p:sp>
@@ -33841,7 +34187,7 @@
           <a:noFill/>
         </p:spPr>
         <p:txBody>
-          <a:bodyPr wrap="none" lIns="0" rIns="0" tIns="0" bIns="0">
+          <a:bodyPr wrap="none" lIns="0" tIns="0" rIns="0" bIns="0">
             <a:spAutoFit/>
           </a:bodyPr>
           <a:lstStyle/>
@@ -33911,6 +34257,7 @@
           <a:lstStyle/>
           <a:p>
             <a:pPr algn="ctr"/>
+            <a:endParaRPr/>
           </a:p>
         </p:txBody>
       </p:sp>
@@ -33931,7 +34278,7 @@
           <a:noFill/>
         </p:spPr>
         <p:txBody>
-          <a:bodyPr wrap="none" lIns="0" rIns="0" tIns="0" bIns="0">
+          <a:bodyPr wrap="none" lIns="0" tIns="0" rIns="0" bIns="0">
             <a:spAutoFit/>
           </a:bodyPr>
           <a:lstStyle/>
@@ -34001,6 +34348,7 @@
           <a:lstStyle/>
           <a:p>
             <a:pPr algn="ctr"/>
+            <a:endParaRPr/>
           </a:p>
         </p:txBody>
       </p:sp>
@@ -34021,7 +34369,7 @@
           <a:noFill/>
         </p:spPr>
         <p:txBody>
-          <a:bodyPr wrap="none" lIns="0" rIns="0" tIns="0" bIns="0">
+          <a:bodyPr wrap="none" lIns="0" tIns="0" rIns="0" bIns="0">
             <a:spAutoFit/>
           </a:bodyPr>
           <a:lstStyle/>
@@ -34066,7 +34414,7 @@
           <a:noFill/>
         </p:spPr>
         <p:txBody>
-          <a:bodyPr wrap="none" lIns="0" rIns="0" tIns="0" bIns="0">
+          <a:bodyPr wrap="none" lIns="0" tIns="0" rIns="0" bIns="0">
             <a:spAutoFit/>
           </a:bodyPr>
           <a:lstStyle/>
@@ -34136,6 +34484,7 @@
           <a:lstStyle/>
           <a:p>
             <a:pPr algn="ctr"/>
+            <a:endParaRPr/>
           </a:p>
         </p:txBody>
       </p:sp>
@@ -34156,7 +34505,7 @@
           <a:noFill/>
         </p:spPr>
         <p:txBody>
-          <a:bodyPr wrap="none" lIns="0" rIns="0" tIns="0" bIns="0">
+          <a:bodyPr wrap="none" lIns="0" tIns="0" rIns="0" bIns="0">
             <a:spAutoFit/>
           </a:bodyPr>
           <a:lstStyle/>
@@ -34226,6 +34575,7 @@
           <a:lstStyle/>
           <a:p>
             <a:pPr algn="ctr"/>
+            <a:endParaRPr/>
           </a:p>
         </p:txBody>
       </p:sp>
@@ -34246,7 +34596,7 @@
           <a:noFill/>
         </p:spPr>
         <p:txBody>
-          <a:bodyPr wrap="none" lIns="0" rIns="0" tIns="0" bIns="0">
+          <a:bodyPr wrap="none" lIns="0" tIns="0" rIns="0" bIns="0">
             <a:spAutoFit/>
           </a:bodyPr>
           <a:lstStyle/>
@@ -34316,6 +34666,7 @@
           <a:lstStyle/>
           <a:p>
             <a:pPr algn="ctr"/>
+            <a:endParaRPr/>
           </a:p>
         </p:txBody>
       </p:sp>
@@ -34336,7 +34687,7 @@
           <a:noFill/>
         </p:spPr>
         <p:txBody>
-          <a:bodyPr wrap="none" lIns="0" rIns="0" tIns="0" bIns="0">
+          <a:bodyPr wrap="none" lIns="0" tIns="0" rIns="0" bIns="0">
             <a:spAutoFit/>
           </a:bodyPr>
           <a:lstStyle/>
@@ -34381,7 +34732,7 @@
           <a:noFill/>
         </p:spPr>
         <p:txBody>
-          <a:bodyPr wrap="none" lIns="0" rIns="0" tIns="0" bIns="0">
+          <a:bodyPr wrap="none" lIns="0" tIns="0" rIns="0" bIns="0">
             <a:spAutoFit/>
           </a:bodyPr>
           <a:lstStyle/>
@@ -34451,6 +34802,7 @@
           <a:lstStyle/>
           <a:p>
             <a:pPr algn="ctr"/>
+            <a:endParaRPr/>
           </a:p>
         </p:txBody>
       </p:sp>
@@ -34471,7 +34823,7 @@
           <a:noFill/>
         </p:spPr>
         <p:txBody>
-          <a:bodyPr wrap="none" lIns="0" rIns="0" tIns="0" bIns="0">
+          <a:bodyPr wrap="none" lIns="0" tIns="0" rIns="0" bIns="0">
             <a:spAutoFit/>
           </a:bodyPr>
           <a:lstStyle/>
@@ -34541,6 +34893,7 @@
           <a:lstStyle/>
           <a:p>
             <a:pPr algn="ctr"/>
+            <a:endParaRPr/>
           </a:p>
         </p:txBody>
       </p:sp>
@@ -34561,7 +34914,7 @@
           <a:noFill/>
         </p:spPr>
         <p:txBody>
-          <a:bodyPr wrap="none" lIns="0" rIns="0" tIns="0" bIns="0">
+          <a:bodyPr wrap="none" lIns="0" tIns="0" rIns="0" bIns="0">
             <a:spAutoFit/>
           </a:bodyPr>
           <a:lstStyle/>
@@ -34631,6 +34984,7 @@
           <a:lstStyle/>
           <a:p>
             <a:pPr algn="ctr"/>
+            <a:endParaRPr/>
           </a:p>
         </p:txBody>
       </p:sp>
@@ -34651,7 +35005,7 @@
           <a:noFill/>
         </p:spPr>
         <p:txBody>
-          <a:bodyPr wrap="none" lIns="0" rIns="0" tIns="0" bIns="0">
+          <a:bodyPr wrap="none" lIns="0" tIns="0" rIns="0" bIns="0">
             <a:spAutoFit/>
           </a:bodyPr>
           <a:lstStyle/>
@@ -34696,7 +35050,7 @@
           <a:noFill/>
         </p:spPr>
         <p:txBody>
-          <a:bodyPr wrap="none" lIns="0" rIns="0" tIns="0" bIns="0">
+          <a:bodyPr wrap="none" lIns="0" tIns="0" rIns="0" bIns="0">
             <a:spAutoFit/>
           </a:bodyPr>
           <a:lstStyle/>
@@ -34788,6 +35142,7 @@
           <a:lstStyle/>
           <a:p>
             <a:pPr algn="ctr"/>
+            <a:endParaRPr/>
           </a:p>
         </p:txBody>
       </p:sp>
@@ -34808,7 +35163,7 @@
           <a:noFill/>
         </p:spPr>
         <p:txBody>
-          <a:bodyPr wrap="none" lIns="0" rIns="0" tIns="0" bIns="0">
+          <a:bodyPr wrap="none" lIns="0" tIns="0" rIns="0" bIns="0">
             <a:spAutoFit/>
           </a:bodyPr>
           <a:lstStyle/>
@@ -34853,7 +35208,7 @@
           <a:noFill/>
         </p:spPr>
         <p:txBody>
-          <a:bodyPr wrap="none" lIns="0" rIns="0" tIns="0" bIns="0">
+          <a:bodyPr wrap="none" lIns="0" tIns="0" rIns="0" bIns="0">
             <a:spAutoFit/>
           </a:bodyPr>
           <a:lstStyle/>
@@ -34898,7 +35253,7 @@
           <a:noFill/>
         </p:spPr>
         <p:txBody>
-          <a:bodyPr wrap="none" lIns="0" rIns="0" tIns="0" bIns="0">
+          <a:bodyPr wrap="none" lIns="0" tIns="0" rIns="0" bIns="0">
             <a:spAutoFit/>
           </a:bodyPr>
           <a:lstStyle/>
@@ -34935,7 +35290,7 @@
 </file>
 
 <file path=ppt/slides/slide9.xml><?xml version="1.0" encoding="utf-8"?>
-<p:sld xmlns:a="http://schemas.openxmlformats.org/drawingml/2006/main" xmlns:p="http://schemas.openxmlformats.org/presentationml/2006/main" xmlns:r="http://schemas.openxmlformats.org/officeDocument/2006/relationships">
+<p:sld xmlns:a="http://schemas.openxmlformats.org/drawingml/2006/main" xmlns:r="http://schemas.openxmlformats.org/officeDocument/2006/relationships" xmlns:p="http://schemas.openxmlformats.org/presentationml/2006/main">
   <p:cSld>
     <p:bg>
       <p:bgPr>
@@ -34951,7 +35306,14 @@
         <p:cNvGrpSpPr/>
         <p:nvPr/>
       </p:nvGrpSpPr>
-      <p:grpSpPr/>
+      <p:grpSpPr>
+        <a:xfrm>
+          <a:off x="0" y="0"/>
+          <a:ext cx="0" cy="0"/>
+          <a:chOff x="0" y="0"/>
+          <a:chExt cx="0" cy="0"/>
+        </a:xfrm>
+      </p:grpSpPr>
       <p:sp>
         <p:nvSpPr>
           <p:cNvPr id="2" name="Rectangle 1"/>
@@ -34992,6 +35354,7 @@
           <a:lstStyle/>
           <a:p>
             <a:pPr algn="ctr"/>
+            <a:endParaRPr/>
           </a:p>
         </p:txBody>
       </p:sp>
@@ -35012,7 +35375,7 @@
           <a:noFill/>
         </p:spPr>
         <p:txBody>
-          <a:bodyPr wrap="none" lIns="0" rIns="0" tIns="0" bIns="0">
+          <a:bodyPr wrap="none" lIns="0" tIns="0" rIns="0" bIns="0">
             <a:spAutoFit/>
           </a:bodyPr>
           <a:lstStyle/>
@@ -35057,7 +35420,7 @@
           <a:noFill/>
         </p:spPr>
         <p:txBody>
-          <a:bodyPr wrap="none" lIns="0" rIns="0" tIns="0" bIns="0">
+          <a:bodyPr wrap="none" lIns="0" tIns="0" rIns="0" bIns="0">
             <a:spAutoFit/>
           </a:bodyPr>
           <a:lstStyle/>
@@ -35102,7 +35465,7 @@
           <a:noFill/>
         </p:spPr>
         <p:txBody>
-          <a:bodyPr wrap="none" lIns="0" rIns="0" tIns="0" bIns="0">
+          <a:bodyPr wrap="none" lIns="0" tIns="0" rIns="0" bIns="0">
             <a:spAutoFit/>
           </a:bodyPr>
           <a:lstStyle/>
@@ -35172,6 +35535,7 @@
           <a:lstStyle/>
           <a:p>
             <a:pPr algn="ctr"/>
+            <a:endParaRPr/>
           </a:p>
         </p:txBody>
       </p:sp>
@@ -35217,6 +35581,7 @@
           <a:lstStyle/>
           <a:p>
             <a:pPr algn="ctr"/>
+            <a:endParaRPr/>
           </a:p>
         </p:txBody>
       </p:sp>
@@ -35237,7 +35602,7 @@
           <a:noFill/>
         </p:spPr>
         <p:txBody>
-          <a:bodyPr wrap="none" lIns="0" rIns="0" tIns="0" bIns="0">
+          <a:bodyPr wrap="none" lIns="0" tIns="0" rIns="0" bIns="0">
             <a:spAutoFit/>
           </a:bodyPr>
           <a:lstStyle/>
@@ -35282,7 +35647,7 @@
           <a:noFill/>
         </p:spPr>
         <p:txBody>
-          <a:bodyPr wrap="none" lIns="0" rIns="0" tIns="0" bIns="0">
+          <a:bodyPr wrap="none" lIns="0" tIns="0" rIns="0" bIns="0">
             <a:spAutoFit/>
           </a:bodyPr>
           <a:lstStyle/>
@@ -35352,6 +35717,7 @@
           <a:lstStyle/>
           <a:p>
             <a:pPr algn="ctr"/>
+            <a:endParaRPr/>
           </a:p>
         </p:txBody>
       </p:sp>
@@ -35372,7 +35738,7 @@
           <a:noFill/>
         </p:spPr>
         <p:txBody>
-          <a:bodyPr wrap="none" lIns="0" rIns="0" tIns="0" bIns="0">
+          <a:bodyPr wrap="none" lIns="0" tIns="0" rIns="0" bIns="0">
             <a:spAutoFit/>
           </a:bodyPr>
           <a:lstStyle/>
@@ -35417,7 +35783,7 @@
           <a:noFill/>
         </p:spPr>
         <p:txBody>
-          <a:bodyPr wrap="none" lIns="0" rIns="0" tIns="0" bIns="0">
+          <a:bodyPr wrap="none" lIns="0" tIns="0" rIns="0" bIns="0">
             <a:spAutoFit/>
           </a:bodyPr>
           <a:lstStyle/>
@@ -35487,6 +35853,7 @@
           <a:lstStyle/>
           <a:p>
             <a:pPr algn="ctr"/>
+            <a:endParaRPr/>
           </a:p>
         </p:txBody>
       </p:sp>
@@ -35507,7 +35874,7 @@
           <a:noFill/>
         </p:spPr>
         <p:txBody>
-          <a:bodyPr wrap="none" lIns="0" rIns="0" tIns="0" bIns="0">
+          <a:bodyPr wrap="none" lIns="0" tIns="0" rIns="0" bIns="0">
             <a:spAutoFit/>
           </a:bodyPr>
           <a:lstStyle/>
@@ -35552,7 +35919,7 @@
           <a:noFill/>
         </p:spPr>
         <p:txBody>
-          <a:bodyPr wrap="none" lIns="0" rIns="0" tIns="0" bIns="0">
+          <a:bodyPr wrap="none" lIns="0" tIns="0" rIns="0" bIns="0">
             <a:spAutoFit/>
           </a:bodyPr>
           <a:lstStyle/>
@@ -35622,6 +35989,7 @@
           <a:lstStyle/>
           <a:p>
             <a:pPr algn="ctr"/>
+            <a:endParaRPr/>
           </a:p>
         </p:txBody>
       </p:sp>
@@ -35642,7 +36010,7 @@
           <a:noFill/>
         </p:spPr>
         <p:txBody>
-          <a:bodyPr wrap="none" lIns="0" rIns="0" tIns="0" bIns="0">
+          <a:bodyPr wrap="none" lIns="0" tIns="0" rIns="0" bIns="0">
             <a:spAutoFit/>
           </a:bodyPr>
           <a:lstStyle/>
@@ -35745,6 +36113,7 @@
           <a:lstStyle/>
           <a:p>
             <a:pPr algn="ctr"/>
+            <a:endParaRPr/>
           </a:p>
         </p:txBody>
       </p:sp>
@@ -35790,6 +36159,7 @@
           <a:lstStyle/>
           <a:p>
             <a:pPr algn="ctr"/>
+            <a:endParaRPr/>
           </a:p>
         </p:txBody>
       </p:sp>
@@ -35810,7 +36180,7 @@
           <a:noFill/>
         </p:spPr>
         <p:txBody>
-          <a:bodyPr wrap="none" lIns="0" rIns="0" tIns="0" bIns="0">
+          <a:bodyPr wrap="none" lIns="0" tIns="0" rIns="0" bIns="0">
             <a:spAutoFit/>
           </a:bodyPr>
           <a:lstStyle/>
@@ -35913,6 +36283,7 @@
           <a:lstStyle/>
           <a:p>
             <a:pPr algn="ctr"/>
+            <a:endParaRPr/>
           </a:p>
         </p:txBody>
       </p:sp>
@@ -35958,6 +36329,7 @@
           <a:lstStyle/>
           <a:p>
             <a:pPr algn="ctr"/>
+            <a:endParaRPr/>
           </a:p>
         </p:txBody>
       </p:sp>
@@ -35978,7 +36350,7 @@
           <a:noFill/>
         </p:spPr>
         <p:txBody>
-          <a:bodyPr wrap="none" lIns="0" rIns="0" tIns="0" bIns="0">
+          <a:bodyPr wrap="none" lIns="0" tIns="0" rIns="0" bIns="0">
             <a:spAutoFit/>
           </a:bodyPr>
           <a:lstStyle/>
@@ -36081,6 +36453,7 @@
           <a:lstStyle/>
           <a:p>
             <a:pPr algn="ctr"/>
+            <a:endParaRPr/>
           </a:p>
         </p:txBody>
       </p:sp>
@@ -36126,6 +36499,7 @@
           <a:lstStyle/>
           <a:p>
             <a:pPr algn="ctr"/>
+            <a:endParaRPr/>
           </a:p>
         </p:txBody>
       </p:sp>
@@ -36146,7 +36520,7 @@
           <a:noFill/>
         </p:spPr>
         <p:txBody>
-          <a:bodyPr wrap="none" lIns="0" rIns="0" tIns="0" bIns="0">
+          <a:bodyPr wrap="none" lIns="0" tIns="0" rIns="0" bIns="0">
             <a:spAutoFit/>
           </a:bodyPr>
           <a:lstStyle/>
@@ -36191,7 +36565,7 @@
           <a:noFill/>
         </p:spPr>
         <p:txBody>
-          <a:bodyPr wrap="none" lIns="0" rIns="0" tIns="0" bIns="0">
+          <a:bodyPr wrap="none" lIns="0" tIns="0" rIns="0" bIns="0">
             <a:spAutoFit/>
           </a:bodyPr>
           <a:lstStyle/>
@@ -36283,6 +36657,7 @@
           <a:lstStyle/>
           <a:p>
             <a:pPr algn="ctr"/>
+            <a:endParaRPr/>
           </a:p>
         </p:txBody>
       </p:sp>
@@ -36303,7 +36678,7 @@
           <a:noFill/>
         </p:spPr>
         <p:txBody>
-          <a:bodyPr wrap="none" lIns="0" rIns="0" tIns="0" bIns="0">
+          <a:bodyPr wrap="none" lIns="0" tIns="0" rIns="0" bIns="0">
             <a:spAutoFit/>
           </a:bodyPr>
           <a:lstStyle/>
@@ -36348,7 +36723,7 @@
           <a:noFill/>
         </p:spPr>
         <p:txBody>
-          <a:bodyPr wrap="none" lIns="0" rIns="0" tIns="0" bIns="0">
+          <a:bodyPr wrap="none" lIns="0" tIns="0" rIns="0" bIns="0">
             <a:spAutoFit/>
           </a:bodyPr>
           <a:lstStyle/>
@@ -36393,7 +36768,7 @@
           <a:noFill/>
         </p:spPr>
         <p:txBody>
-          <a:bodyPr wrap="none" lIns="0" rIns="0" tIns="0" bIns="0">
+          <a:bodyPr wrap="none" lIns="0" tIns="0" rIns="0" bIns="0">
             <a:spAutoFit/>
           </a:bodyPr>
           <a:lstStyle/>
@@ -36750,7 +37125,7 @@
 </file>
 
 <file path=ppt/theme/theme2.xml><?xml version="1.0" encoding="utf-8"?>
-<a:theme xmlns:a="http://schemas.openxmlformats.org/drawingml/2006/main" name="Office Theme">
+<a:theme xmlns:a="http://schemas.openxmlformats.org/drawingml/2006/main" name="Office 主题​​">
   <a:themeElements>
     <a:clrScheme name="Office">
       <a:dk1>
@@ -36760,44 +37135,44 @@
         <a:sysClr val="window" lastClr="FFFFFF"/>
       </a:lt1>
       <a:dk2>
-        <a:srgbClr val="1F497D"/>
+        <a:srgbClr val="0E2841"/>
       </a:dk2>
       <a:lt2>
-        <a:srgbClr val="EEECE1"/>
+        <a:srgbClr val="E8E8E8"/>
       </a:lt2>
       <a:accent1>
-        <a:srgbClr val="4F81BD"/>
+        <a:srgbClr val="156082"/>
       </a:accent1>
       <a:accent2>
-        <a:srgbClr val="C0504D"/>
+        <a:srgbClr val="E97132"/>
       </a:accent2>
       <a:accent3>
-        <a:srgbClr val="9BBB59"/>
+        <a:srgbClr val="196B24"/>
       </a:accent3>
       <a:accent4>
-        <a:srgbClr val="8064A2"/>
+        <a:srgbClr val="0F9ED5"/>
       </a:accent4>
       <a:accent5>
-        <a:srgbClr val="4BACC6"/>
+        <a:srgbClr val="A02B93"/>
       </a:accent5>
       <a:accent6>
-        <a:srgbClr val="F79646"/>
+        <a:srgbClr val="4EA72E"/>
       </a:accent6>
       <a:hlink>
-        <a:srgbClr val="0000FF"/>
+        <a:srgbClr val="467886"/>
       </a:hlink>
       <a:folHlink>
-        <a:srgbClr val="800080"/>
+        <a:srgbClr val="96607D"/>
       </a:folHlink>
     </a:clrScheme>
     <a:fontScheme name="Office">
       <a:majorFont>
-        <a:latin typeface="Calibri"/>
+        <a:latin typeface="等线 Light" panose="02110004020202020204"/>
         <a:ea typeface=""/>
         <a:cs typeface=""/>
-        <a:font script="Jpan" typeface="ＭＳ Ｐゴシック"/>
+        <a:font script="Jpan" typeface="游ゴシック Light"/>
         <a:font script="Hang" typeface="맑은 고딕"/>
-        <a:font script="Hans" typeface="宋体"/>
+        <a:font script="Hans" typeface="等线 Light"/>
         <a:font script="Hant" typeface="新細明體"/>
         <a:font script="Arab" typeface="Times New Roman"/>
         <a:font script="Hebr" typeface="Times New Roman"/>
@@ -36825,14 +37200,31 @@
         <a:font script="Viet" typeface="Times New Roman"/>
         <a:font script="Uigh" typeface="Microsoft Uighur"/>
         <a:font script="Geor" typeface="Sylfaen"/>
+        <a:font script="Armn" typeface="Arial"/>
+        <a:font script="Bugi" typeface="Leelawadee UI"/>
+        <a:font script="Bopo" typeface="Microsoft JhengHei"/>
+        <a:font script="Java" typeface="Javanese Text"/>
+        <a:font script="Lisu" typeface="Segoe UI"/>
+        <a:font script="Mymr" typeface="Myanmar Text"/>
+        <a:font script="Nkoo" typeface="Ebrima"/>
+        <a:font script="Olck" typeface="Nirmala UI"/>
+        <a:font script="Osma" typeface="Ebrima"/>
+        <a:font script="Phag" typeface="Phagspa"/>
+        <a:font script="Syrn" typeface="Estrangelo Edessa"/>
+        <a:font script="Syrj" typeface="Estrangelo Edessa"/>
+        <a:font script="Syre" typeface="Estrangelo Edessa"/>
+        <a:font script="Sora" typeface="Nirmala UI"/>
+        <a:font script="Tale" typeface="Microsoft Tai Le"/>
+        <a:font script="Talu" typeface="Microsoft New Tai Lue"/>
+        <a:font script="Tfng" typeface="Ebrima"/>
       </a:majorFont>
       <a:minorFont>
-        <a:latin typeface="Calibri"/>
+        <a:latin typeface="等线" panose="02110004020202020204"/>
         <a:ea typeface=""/>
         <a:cs typeface=""/>
-        <a:font script="Jpan" typeface="ＭＳ Ｐゴシック"/>
+        <a:font script="Jpan" typeface="游ゴシック"/>
         <a:font script="Hang" typeface="맑은 고딕"/>
-        <a:font script="Hans" typeface="宋体"/>
+        <a:font script="Hans" typeface="等线"/>
         <a:font script="Hant" typeface="新細明體"/>
         <a:font script="Arab" typeface="Arial"/>
         <a:font script="Hebr" typeface="Arial"/>
@@ -36860,6 +37252,23 @@
         <a:font script="Viet" typeface="Arial"/>
         <a:font script="Uigh" typeface="Microsoft Uighur"/>
         <a:font script="Geor" typeface="Sylfaen"/>
+        <a:font script="Armn" typeface="Arial"/>
+        <a:font script="Bugi" typeface="Leelawadee UI"/>
+        <a:font script="Bopo" typeface="Microsoft JhengHei"/>
+        <a:font script="Java" typeface="Javanese Text"/>
+        <a:font script="Lisu" typeface="Segoe UI"/>
+        <a:font script="Mymr" typeface="Myanmar Text"/>
+        <a:font script="Nkoo" typeface="Ebrima"/>
+        <a:font script="Olck" typeface="Nirmala UI"/>
+        <a:font script="Osma" typeface="Ebrima"/>
+        <a:font script="Phag" typeface="Phagspa"/>
+        <a:font script="Syrn" typeface="Estrangelo Edessa"/>
+        <a:font script="Syrj" typeface="Estrangelo Edessa"/>
+        <a:font script="Syre" typeface="Estrangelo Edessa"/>
+        <a:font script="Sora" typeface="Nirmala UI"/>
+        <a:font script="Tale" typeface="Microsoft Tai Le"/>
+        <a:font script="Talu" typeface="Microsoft New Tai Lue"/>
+        <a:font script="Tfng" typeface="Ebrima"/>
       </a:minorFont>
     </a:fontScheme>
     <a:fmtScheme name="Office">
@@ -36871,180 +37280,136 @@
           <a:gsLst>
             <a:gs pos="0">
               <a:schemeClr val="phClr">
-                <a:tint val="50000"/>
-                <a:satMod val="300000"/>
+                <a:lumMod val="110000"/>
+                <a:satMod val="105000"/>
+                <a:tint val="67000"/>
               </a:schemeClr>
             </a:gs>
-            <a:gs pos="35000">
+            <a:gs pos="50000">
               <a:schemeClr val="phClr">
-                <a:tint val="37000"/>
-                <a:satMod val="300000"/>
+                <a:lumMod val="105000"/>
+                <a:satMod val="103000"/>
+                <a:tint val="73000"/>
               </a:schemeClr>
             </a:gs>
             <a:gs pos="100000">
               <a:schemeClr val="phClr">
-                <a:tint val="15000"/>
-                <a:satMod val="350000"/>
+                <a:lumMod val="105000"/>
+                <a:satMod val="109000"/>
+                <a:tint val="81000"/>
               </a:schemeClr>
             </a:gs>
           </a:gsLst>
-          <a:lin ang="16200000" scaled="1"/>
+          <a:lin ang="5400000" scaled="0"/>
         </a:gradFill>
         <a:gradFill rotWithShape="1">
           <a:gsLst>
             <a:gs pos="0">
               <a:schemeClr val="phClr">
-                <a:tint val="100000"/>
+                <a:satMod val="103000"/>
+                <a:lumMod val="102000"/>
+                <a:tint val="94000"/>
+              </a:schemeClr>
+            </a:gs>
+            <a:gs pos="50000">
+              <a:schemeClr val="phClr">
+                <a:satMod val="110000"/>
+                <a:lumMod val="100000"/>
                 <a:shade val="100000"/>
-                <a:satMod val="130000"/>
               </a:schemeClr>
             </a:gs>
             <a:gs pos="100000">
               <a:schemeClr val="phClr">
-                <a:tint val="50000"/>
-                <a:shade val="100000"/>
-                <a:satMod val="350000"/>
+                <a:lumMod val="99000"/>
+                <a:satMod val="120000"/>
+                <a:shade val="78000"/>
               </a:schemeClr>
             </a:gs>
           </a:gsLst>
-          <a:lin ang="16200000" scaled="0"/>
+          <a:lin ang="5400000" scaled="0"/>
         </a:gradFill>
       </a:fillStyleLst>
       <a:lnStyleLst>
-        <a:ln w="9525" cap="flat" cmpd="sng" algn="ctr">
+        <a:ln w="12700" cap="flat" cmpd="sng" algn="ctr">
           <a:solidFill>
-            <a:schemeClr val="phClr">
-              <a:shade val="95000"/>
-              <a:satMod val="105000"/>
-            </a:schemeClr>
+            <a:schemeClr val="phClr"/>
           </a:solidFill>
           <a:prstDash val="solid"/>
+          <a:miter lim="800000"/>
+        </a:ln>
+        <a:ln w="19050" cap="flat" cmpd="sng" algn="ctr">
+          <a:solidFill>
+            <a:schemeClr val="phClr"/>
+          </a:solidFill>
+          <a:prstDash val="solid"/>
+          <a:miter lim="800000"/>
         </a:ln>
         <a:ln w="25400" cap="flat" cmpd="sng" algn="ctr">
           <a:solidFill>
             <a:schemeClr val="phClr"/>
           </a:solidFill>
           <a:prstDash val="solid"/>
-        </a:ln>
-        <a:ln w="38100" cap="flat" cmpd="sng" algn="ctr">
-          <a:solidFill>
-            <a:schemeClr val="phClr"/>
-          </a:solidFill>
-          <a:prstDash val="solid"/>
+          <a:miter lim="800000"/>
         </a:ln>
       </a:lnStyleLst>
       <a:effectStyleLst>
         <a:effectStyle>
+          <a:effectLst/>
+        </a:effectStyle>
+        <a:effectStyle>
+          <a:effectLst/>
+        </a:effectStyle>
+        <a:effectStyle>
           <a:effectLst>
-            <a:outerShdw blurRad="40000" dist="20000" dir="5400000" rotWithShape="0">
+            <a:outerShdw blurRad="57150" dist="19050" dir="5400000" algn="ctr" rotWithShape="0">
               <a:srgbClr val="000000">
-                <a:alpha val="38000"/>
+                <a:alpha val="63000"/>
               </a:srgbClr>
             </a:outerShdw>
           </a:effectLst>
-        </a:effectStyle>
-        <a:effectStyle>
-          <a:effectLst>
-            <a:outerShdw blurRad="40000" dist="23000" dir="5400000" rotWithShape="0">
-              <a:srgbClr val="000000">
-                <a:alpha val="35000"/>
-              </a:srgbClr>
-            </a:outerShdw>
-          </a:effectLst>
-        </a:effectStyle>
-        <a:effectStyle>
-          <a:effectLst>
-            <a:outerShdw blurRad="40000" dist="23000" dir="5400000" rotWithShape="0">
-              <a:srgbClr val="000000">
-                <a:alpha val="35000"/>
-              </a:srgbClr>
-            </a:outerShdw>
-          </a:effectLst>
-          <a:scene3d>
-            <a:camera prst="orthographicFront">
-              <a:rot lat="0" lon="0" rev="0"/>
-            </a:camera>
-            <a:lightRig rig="threePt" dir="t">
-              <a:rot lat="0" lon="0" rev="1200000"/>
-            </a:lightRig>
-          </a:scene3d>
-          <a:sp3d>
-            <a:bevelT w="63500" h="25400"/>
-          </a:sp3d>
         </a:effectStyle>
       </a:effectStyleLst>
       <a:bgFillStyleLst>
         <a:solidFill>
           <a:schemeClr val="phClr"/>
         </a:solidFill>
+        <a:solidFill>
+          <a:schemeClr val="phClr">
+            <a:tint val="95000"/>
+            <a:satMod val="170000"/>
+          </a:schemeClr>
+        </a:solidFill>
         <a:gradFill rotWithShape="1">
           <a:gsLst>
             <a:gs pos="0">
               <a:schemeClr val="phClr">
-                <a:tint val="40000"/>
-                <a:satMod val="350000"/>
+                <a:tint val="93000"/>
+                <a:satMod val="150000"/>
+                <a:shade val="98000"/>
+                <a:lumMod val="102000"/>
               </a:schemeClr>
             </a:gs>
-            <a:gs pos="40000">
+            <a:gs pos="50000">
               <a:schemeClr val="phClr">
-                <a:tint val="45000"/>
-                <a:shade val="99000"/>
-                <a:satMod val="350000"/>
+                <a:tint val="98000"/>
+                <a:satMod val="130000"/>
+                <a:shade val="90000"/>
+                <a:lumMod val="103000"/>
               </a:schemeClr>
             </a:gs>
             <a:gs pos="100000">
               <a:schemeClr val="phClr">
-                <a:shade val="20000"/>
-                <a:satMod val="255000"/>
+                <a:shade val="63000"/>
+                <a:satMod val="120000"/>
               </a:schemeClr>
             </a:gs>
           </a:gsLst>
-          <a:path path="circle">
-            <a:fillToRect l="50000" t="-80000" r="50000" b="180000"/>
-          </a:path>
-        </a:gradFill>
-        <a:gradFill rotWithShape="1">
-          <a:gsLst>
-            <a:gs pos="0">
-              <a:schemeClr val="phClr">
-                <a:tint val="80000"/>
-                <a:satMod val="300000"/>
-              </a:schemeClr>
-            </a:gs>
-            <a:gs pos="100000">
-              <a:schemeClr val="phClr">
-                <a:shade val="30000"/>
-                <a:satMod val="200000"/>
-              </a:schemeClr>
-            </a:gs>
-          </a:gsLst>
-          <a:path path="circle">
-            <a:fillToRect l="50000" t="50000" r="50000" b="50000"/>
-          </a:path>
+          <a:lin ang="5400000" scaled="0"/>
         </a:gradFill>
       </a:bgFillStyleLst>
     </a:fmtScheme>
   </a:themeElements>
   <a:objectDefaults>
-    <a:spDef>
-      <a:spPr/>
-      <a:bodyPr/>
-      <a:lstStyle/>
-      <a:style>
-        <a:lnRef idx="1">
-          <a:schemeClr val="accent1"/>
-        </a:lnRef>
-        <a:fillRef idx="3">
-          <a:schemeClr val="accent1"/>
-        </a:fillRef>
-        <a:effectRef idx="2">
-          <a:schemeClr val="accent1"/>
-        </a:effectRef>
-        <a:fontRef idx="minor">
-          <a:schemeClr val="lt1"/>
-        </a:fontRef>
-      </a:style>
-    </a:spDef>
     <a:lnDef>
       <a:spPr/>
       <a:bodyPr/>
@@ -37066,5 +37431,10 @@
     </a:lnDef>
   </a:objectDefaults>
   <a:extraClrSchemeLst/>
+  <a:extLst>
+    <a:ext uri="{05A4C25C-085E-4340-85A3-A5531E510DB2}">
+      <thm15:themeFamily xmlns:thm15="http://schemas.microsoft.com/office/thememl/2012/main" name="Office Theme" id="{2E142A2C-CD16-42D6-873A-C26D2A0506FA}" vid="{1BDDFF52-6CD6-40A5-AB3C-68EB2F1E4D0A}"/>
+    </a:ext>
+  </a:extLst>
 </a:theme>
 </file>